--- a/qwendata/OCR_Benchmark_Report.pptx
+++ b/qwendata/OCR_Benchmark_Report.pptx
@@ -11,7 +11,6 @@
     <p:sldId id="259" r:id="rId10"/>
     <p:sldId id="260" r:id="rId11"/>
     <p:sldId id="261" r:id="rId12"/>
-    <p:sldId id="262" r:id="rId13"/>
   </p:sldIdLst>
   <p:sldSz cx="12191695" cy="6858000" type="screen4x3"/>
   <p:notesSz cx="6858000" cy="9144000"/>
@@ -3111,7 +3110,7 @@
         <p:spPr>
           <a:xfrm>
             <a:off x="914400" y="1371600"/>
-            <a:ext cx="10332720" cy="1371600"/>
+            <a:ext cx="10332720" cy="1097280"/>
           </a:xfrm>
           <a:prstGeom prst="rect">
             <a:avLst/>
@@ -3132,7 +3131,7 @@
               </a:defRPr>
             </a:pPr>
             <a:r>
-              <a:t>OCR Engine Benchmark Report</a:t>
+              <a:t>EasyOCR Benchmark Report</a:t>
             </a:r>
           </a:p>
         </p:txBody>
@@ -3145,7 +3144,7 @@
         </p:nvSpPr>
         <p:spPr>
           <a:xfrm>
-            <a:off x="914400" y="2926080"/>
+            <a:off x="914400" y="2651760"/>
             <a:ext cx="10332720" cy="731520"/>
           </a:xfrm>
           <a:prstGeom prst="rect">
@@ -3167,7 +3166,7 @@
               </a:defRPr>
             </a:pPr>
             <a:r>
-              <a:t>SK Hynix Semiconductor Label OCR Performance Comparison</a:t>
+              <a:t>SK Hynix 반도체 라벨 OCR 정확도 분석</a:t>
             </a:r>
           </a:p>
         </p:txBody>
@@ -3180,8 +3179,8 @@
         </p:nvSpPr>
         <p:spPr>
           <a:xfrm>
-            <a:off x="914400" y="4114800"/>
-            <a:ext cx="10332720" cy="1828800"/>
+            <a:off x="914400" y="3657600"/>
+            <a:ext cx="10332720" cy="2286000"/>
           </a:xfrm>
           <a:prstGeom prst="rect">
             <a:avLst/>
@@ -3202,7 +3201,19 @@
               </a:defRPr>
             </a:pPr>
             <a:r>
-              <a:t>3 OCR Methods  |  Speed &amp; Accuracy Analysis  |  1/4 Bilinear Resized Image</a:t>
+              <a:t>Ground Truth: Qwen3.5-2B LLM OCR 결과 (검증 완료)</a:t>
+            </a:r>
+          </a:p>
+          <a:p>
+            <a:pPr algn="ctr">
+              <a:defRPr sz="1600" b="0">
+                <a:solidFill>
+                  <a:srgbClr val="0074D9"/>
+                </a:solidFill>
+              </a:defRPr>
+            </a:pPr>
+            <a:r>
+              <a:t>테스트 이미지: Bilinear 1/4 Resize (1032x656)</a:t>
             </a:r>
           </a:p>
           <a:p>
@@ -3223,7 +3234,7 @@
               </a:defRPr>
             </a:pPr>
             <a:r>
-              <a:t>EasyOCR  vs  TrOCR (Microsoft)  vs  RapidOCR (PaddleOCR)</a:t>
+              <a:t>EasyOCR 1.7.2 (GPU, CRAFT + CRNN)</a:t>
             </a:r>
           </a:p>
           <a:p>
@@ -3237,14 +3248,14 @@
           </a:p>
           <a:p>
             <a:pPr algn="ctr">
-              <a:defRPr sz="1400" b="0">
+              <a:defRPr sz="1600" b="0">
                 <a:solidFill>
-                  <a:srgbClr val="BDBDBD"/>
+                  <a:srgbClr val="F39C12"/>
                 </a:solidFill>
               </a:defRPr>
             </a:pPr>
             <a:r>
-              <a:t>2026.03.05</a:t>
+              <a:t>3가지 전처리 변형 | OCR vs GT 필드별 비교 | 0.5~0.7초 추론</a:t>
             </a:r>
           </a:p>
         </p:txBody>
@@ -3284,7 +3295,7 @@
         <p:spPr>
           <a:xfrm>
             <a:off x="457200" y="274320"/>
-            <a:ext cx="10972800" cy="731520"/>
+            <a:ext cx="10972800" cy="640080"/>
           </a:xfrm>
           <a:prstGeom prst="rect">
             <a:avLst/>
@@ -3305,7 +3316,7 @@
               </a:defRPr>
             </a:pPr>
             <a:r>
-              <a:t>Test Environment &amp; Target Image</a:t>
+              <a:t>테스트 환경 및 대상 이미지</a:t>
             </a:r>
           </a:p>
         </p:txBody>
@@ -3318,7 +3329,7 @@
         </p:nvSpPr>
         <p:spPr>
           <a:xfrm>
-            <a:off x="457200" y="1188720"/>
+            <a:off x="457200" y="1097280"/>
             <a:ext cx="5029200" cy="3200400"/>
           </a:xfrm>
           <a:prstGeom prst="rect">
@@ -3340,7 +3351,76 @@
               </a:defRPr>
             </a:pPr>
             <a:r>
-              <a:t>Test Environment</a:t>
+              <a:t>EasyOCR 구성</a:t>
+            </a:r>
+          </a:p>
+          <a:p>
+            <a:pPr algn="l">
+              <a:defRPr sz="600" b="0">
+                <a:solidFill>
+                  <a:srgbClr val="FFFFFF"/>
+                </a:solidFill>
+              </a:defRPr>
+            </a:pPr>
+          </a:p>
+          <a:p>
+            <a:pPr algn="l">
+              <a:defRPr sz="1400" b="0">
+                <a:solidFill>
+                  <a:srgbClr val="FFFFFF"/>
+                </a:solidFill>
+              </a:defRPr>
+            </a:pPr>
+            <a:r>
+              <a:t>Engine: EasyOCR 1.7.2</a:t>
+            </a:r>
+          </a:p>
+          <a:p>
+            <a:pPr algn="l">
+              <a:defRPr sz="1400" b="0">
+                <a:solidFill>
+                  <a:srgbClr val="FFFFFF"/>
+                </a:solidFill>
+              </a:defRPr>
+            </a:pPr>
+            <a:r>
+              <a:t>Detection: CRAFT (Character-Region Awareness)</a:t>
+            </a:r>
+          </a:p>
+          <a:p>
+            <a:pPr algn="l">
+              <a:defRPr sz="1400" b="0">
+                <a:solidFill>
+                  <a:srgbClr val="FFFFFF"/>
+                </a:solidFill>
+              </a:defRPr>
+            </a:pPr>
+            <a:r>
+              <a:t>Recognition: CRNN + CTC Decoder</a:t>
+            </a:r>
+          </a:p>
+          <a:p>
+            <a:pPr algn="l">
+              <a:defRPr sz="1400" b="0">
+                <a:solidFill>
+                  <a:srgbClr val="FFFFFF"/>
+                </a:solidFill>
+              </a:defRPr>
+            </a:pPr>
+            <a:r>
+              <a:t>Language: English</a:t>
+            </a:r>
+          </a:p>
+          <a:p>
+            <a:pPr algn="l">
+              <a:defRPr sz="1400" b="0">
+                <a:solidFill>
+                  <a:srgbClr val="FFFFFF"/>
+                </a:solidFill>
+              </a:defRPr>
+            </a:pPr>
+            <a:r>
+              <a:t>GPU: NVIDIA RTX 5060 (CUDA)</a:t>
             </a:r>
           </a:p>
           <a:p>
@@ -3354,15 +3434,24 @@
           </a:p>
           <a:p>
             <a:pPr algn="l">
-              <a:defRPr sz="1400" b="0">
+              <a:defRPr sz="2000" b="1">
+                <a:solidFill>
+                  <a:srgbClr val="F39C12"/>
+                </a:solidFill>
+              </a:defRPr>
+            </a:pPr>
+            <a:r>
+              <a:t>3가지 전처리 변형</a:t>
+            </a:r>
+          </a:p>
+          <a:p>
+            <a:pPr algn="l">
+              <a:defRPr sz="600" b="0">
                 <a:solidFill>
                   <a:srgbClr val="FFFFFF"/>
                 </a:solidFill>
               </a:defRPr>
             </a:pPr>
-            <a:r>
-              <a:t>GPU: NVIDIA GPU (CUDA enabled)</a:t>
-            </a:r>
           </a:p>
           <a:p>
             <a:pPr algn="l">
@@ -3373,7 +3462,7 @@
               </a:defRPr>
             </a:pPr>
             <a:r>
-              <a:t>Python: 3.14.2</a:t>
+              <a:t>1) Quarter: 1/4 bilinear 이미지 그대로</a:t>
             </a:r>
           </a:p>
           <a:p>
@@ -3385,7 +3474,7 @@
               </a:defRPr>
             </a:pPr>
             <a:r>
-              <a:t>PyTorch: 2.12.0+cu130</a:t>
+              <a:t>2) Upscale 2x: INTER_CUBIC 2배 확대</a:t>
             </a:r>
           </a:p>
           <a:p>
@@ -3397,97 +3486,7 @@
               </a:defRPr>
             </a:pPr>
             <a:r>
-              <a:t>ONNX Runtime GPU: 1.24.0</a:t>
-            </a:r>
-          </a:p>
-          <a:p>
-            <a:pPr algn="l">
-              <a:defRPr sz="800" b="0">
-                <a:solidFill>
-                  <a:srgbClr val="FFFFFF"/>
-                </a:solidFill>
-              </a:defRPr>
-            </a:pPr>
-          </a:p>
-          <a:p>
-            <a:pPr algn="l">
-              <a:defRPr sz="2000" b="1">
-                <a:solidFill>
-                  <a:srgbClr val="2ECC71"/>
-                </a:solidFill>
-              </a:defRPr>
-            </a:pPr>
-            <a:r>
-              <a:t>Image Info</a:t>
-            </a:r>
-          </a:p>
-          <a:p>
-            <a:pPr algn="l">
-              <a:defRPr sz="800" b="0">
-                <a:solidFill>
-                  <a:srgbClr val="FFFFFF"/>
-                </a:solidFill>
-              </a:defRPr>
-            </a:pPr>
-          </a:p>
-          <a:p>
-            <a:pPr algn="l">
-              <a:defRPr sz="1400" b="0">
-                <a:solidFill>
-                  <a:srgbClr val="FFFFFF"/>
-                </a:solidFill>
-              </a:defRPr>
-            </a:pPr>
-            <a:r>
-              <a:t>Original: SK Hynix semiconductor label</a:t>
-            </a:r>
-          </a:p>
-          <a:p>
-            <a:pPr algn="l">
-              <a:defRPr sz="1400" b="0">
-                <a:solidFill>
-                  <a:srgbClr val="FFFFFF"/>
-                </a:solidFill>
-              </a:defRPr>
-            </a:pPr>
-            <a:r>
-              <a:t>Preprocessing: 1/4 bilinear resize</a:t>
-            </a:r>
-          </a:p>
-          <a:p>
-            <a:pPr algn="l">
-              <a:defRPr sz="1400" b="0">
-                <a:solidFill>
-                  <a:srgbClr val="FFFFFF"/>
-                </a:solidFill>
-              </a:defRPr>
-            </a:pPr>
-            <a:r>
-              <a:t>Content: SUPPLIER, DEVICE, LOT NO, ITEM,</a:t>
-            </a:r>
-          </a:p>
-          <a:p>
-            <a:pPr algn="l">
-              <a:defRPr sz="1400" b="0">
-                <a:solidFill>
-                  <a:srgbClr val="FFFFFF"/>
-                </a:solidFill>
-              </a:defRPr>
-            </a:pPr>
-            <a:r>
-              <a:t>    Q'TY, DATE CODE, PACK DATE, ASSEMBLED</a:t>
-            </a:r>
-          </a:p>
-          <a:p>
-            <a:pPr algn="l">
-              <a:defRPr sz="1400" b="1">
-                <a:solidFill>
-                  <a:srgbClr val="F39C12"/>
-                </a:solidFill>
-              </a:defRPr>
-            </a:pPr>
-            <a:r>
-              <a:t>Total ground truth fields: 8</a:t>
+              <a:t>3) CLAHE: 2배 확대 + 적응적 히스토그램 평활화</a:t>
             </a:r>
           </a:p>
         </p:txBody>
@@ -3508,7 +3507,7 @@
         </p:blipFill>
         <p:spPr>
           <a:xfrm>
-            <a:off x="5943600" y="1188720"/>
+            <a:off x="5943600" y="1097280"/>
             <a:ext cx="5486400" cy="3840480"/>
           </a:xfrm>
           <a:prstGeom prst="rect">
@@ -3541,12 +3540,12 @@
             <a:pPr algn="l">
               <a:defRPr sz="1600" b="1">
                 <a:solidFill>
-                  <a:srgbClr val="F39C12"/>
+                  <a:srgbClr val="2ECC71"/>
                 </a:solidFill>
               </a:defRPr>
             </a:pPr>
             <a:r>
-              <a:t>Ground Truth Fields</a:t>
+              <a:t>Ground Truth (Qwen3.5-2B OCR 검증 결과)</a:t>
             </a:r>
           </a:p>
           <a:p>
@@ -3558,7 +3557,7 @@
               </a:defRPr>
             </a:pPr>
             <a:r>
-              <a:t>SUPPLIER: SK hynix  |  DEVICE: HN8T062EHKX039R  |  LOT NO: 5QQAM42QC-14X(1/2)</a:t>
+              <a:t>SUPPLIER: SK hynix | DEVICE: HN8T062EHKX039R | LOT NO: 5QQAM42QC-14X(1/2)</a:t>
             </a:r>
           </a:p>
           <a:p>
@@ -3570,7 +3569,7 @@
               </a:defRPr>
             </a:pPr>
             <a:r>
-              <a:t>ITEM: 402880-04W(A3-3AA00AAU1TKJX-5AXCCXX-GAYI)-A002  |  Q'TY: 2000 EA  |  DATE CODE: 251A</a:t>
+              <a:t>ITEM: 402880-04W(A3-3AA00AAAU1TKJX-5AXCCXX-GAYI)-A002</a:t>
             </a:r>
           </a:p>
           <a:p>
@@ -3582,7 +3581,7 @@
               </a:defRPr>
             </a:pPr>
             <a:r>
-              <a:t>PACK DATE: 2022/12/22  |  ASSEMBLED IN KOREA FROM WAFER FABRICATED IN KOREA</a:t>
+              <a:t>Q'TY: 2000 EA | DATE CODE: 251A | PACK DATE: 2022/12/22 | ASSEMBLED IN KOREA...</a:t>
             </a:r>
           </a:p>
         </p:txBody>
@@ -3621,8 +3620,8 @@
         </p:nvSpPr>
         <p:spPr>
           <a:xfrm>
-            <a:off x="457200" y="274320"/>
-            <a:ext cx="10972800" cy="731520"/>
+            <a:off x="457200" y="182880"/>
+            <a:ext cx="10972800" cy="640080"/>
           </a:xfrm>
           <a:prstGeom prst="rect">
             <a:avLst/>
@@ -3636,14 +3635,14 @@
           <a:lstStyle/>
           <a:p>
             <a:pPr algn="l">
-              <a:defRPr sz="3200" b="1">
+              <a:defRPr sz="3000" b="1">
                 <a:solidFill>
                   <a:srgbClr val="0074D9"/>
                 </a:solidFill>
               </a:defRPr>
             </a:pPr>
             <a:r>
-              <a:t>Method 1: EasyOCR (GPU)</a:t>
+              <a:t>OCR vs GT 비교 (1) Quarter 원본 — 0.519초</a:t>
             </a:r>
           </a:p>
         </p:txBody>
@@ -3656,8 +3655,8 @@
         </p:nvSpPr>
         <p:spPr>
           <a:xfrm>
-            <a:off x="457200" y="1097280"/>
-            <a:ext cx="5486400" cy="2286000"/>
+            <a:off x="457200" y="777240"/>
+            <a:ext cx="4572000" cy="365760"/>
           </a:xfrm>
           <a:prstGeom prst="rect">
             <a:avLst/>
@@ -3671,83 +3670,14 @@
           <a:lstStyle/>
           <a:p>
             <a:pPr algn="l">
-              <a:defRPr sz="1800" b="1">
+              <a:defRPr sz="1600" b="1">
                 <a:solidFill>
                   <a:srgbClr val="2ECC71"/>
                 </a:solidFill>
               </a:defRPr>
             </a:pPr>
             <a:r>
-              <a:t>Architecture</a:t>
-            </a:r>
-          </a:p>
-          <a:p>
-            <a:pPr algn="l">
-              <a:defRPr sz="600" b="0">
-                <a:solidFill>
-                  <a:srgbClr val="FFFFFF"/>
-                </a:solidFill>
-              </a:defRPr>
-            </a:pPr>
-          </a:p>
-          <a:p>
-            <a:pPr algn="l">
-              <a:defRPr sz="1300" b="0">
-                <a:solidFill>
-                  <a:srgbClr val="FFFFFF"/>
-                </a:solidFill>
-              </a:defRPr>
-            </a:pPr>
-            <a:r>
-              <a:t>Detection: CRAFT (Character-Region Awareness)</a:t>
-            </a:r>
-          </a:p>
-          <a:p>
-            <a:pPr algn="l">
-              <a:defRPr sz="1300" b="0">
-                <a:solidFill>
-                  <a:srgbClr val="FFFFFF"/>
-                </a:solidFill>
-              </a:defRPr>
-            </a:pPr>
-            <a:r>
-              <a:t>Recognition: CRNN + CTC decoder</a:t>
-            </a:r>
-          </a:p>
-          <a:p>
-            <a:pPr algn="l">
-              <a:defRPr sz="1300" b="0">
-                <a:solidFill>
-                  <a:srgbClr val="FFFFFF"/>
-                </a:solidFill>
-              </a:defRPr>
-            </a:pPr>
-            <a:r>
-              <a:t>GPU acceleration via PyTorch CUDA</a:t>
-            </a:r>
-          </a:p>
-          <a:p>
-            <a:pPr algn="l">
-              <a:defRPr sz="1300" b="0">
-                <a:solidFill>
-                  <a:srgbClr val="FFFFFF"/>
-                </a:solidFill>
-              </a:defRPr>
-            </a:pPr>
-            <a:r>
-              <a:t>Lightweight, easy to deploy</a:t>
-            </a:r>
-          </a:p>
-          <a:p>
-            <a:pPr algn="l">
-              <a:defRPr sz="1300" b="0">
-                <a:solidFill>
-                  <a:srgbClr val="BDBDBD"/>
-                </a:solidFill>
-              </a:defRPr>
-            </a:pPr>
-            <a:r>
-              <a:t>Version: 1.7.2</a:t>
+              <a:t>가장 빠름 | 62.5% 정확도</a:t>
             </a:r>
           </a:p>
         </p:txBody>
@@ -3761,8 +3691,8 @@
           <p:nvPr/>
         </p:nvGraphicFramePr>
         <p:xfrm>
-          <a:off x="457200" y="3474720"/>
-          <a:ext cx="10972800" cy="2286000"/>
+          <a:off x="457200" y="1280160"/>
+          <a:ext cx="11247120" cy="5029200"/>
         </p:xfrm>
         <a:graphic>
           <a:graphicData uri="http://schemas.openxmlformats.org/drawingml/2006/table">
@@ -3771,14 +3701,12 @@
                 <a:tableStyleId>{5C22544A-7EE6-4342-B048-85BDC9FD1C3A}</a:tableStyleId>
               </a:tblPr>
               <a:tblGrid>
-                <a:gridCol w="1828800"/>
-                <a:gridCol w="1828800"/>
-                <a:gridCol w="1828800"/>
-                <a:gridCol w="1828800"/>
-                <a:gridCol w="1828800"/>
-                <a:gridCol w="1828800"/>
+                <a:gridCol w="1371600"/>
+                <a:gridCol w="3840480"/>
+                <a:gridCol w="3840480"/>
+                <a:gridCol w="2194560"/>
               </a:tblGrid>
-              <a:tr h="457200">
+              <a:tr h="558800">
                 <a:tc>
                   <a:txBody>
                     <a:bodyPr/>
@@ -3792,7 +3720,7 @@
                         </a:defRPr>
                       </a:pPr>
                       <a:r>
-                        <a:t>Variant</a:t>
+                        <a:t>필드</a:t>
                       </a:r>
                     </a:p>
                   </a:txBody>
@@ -3815,7 +3743,7 @@
                         </a:defRPr>
                       </a:pPr>
                       <a:r>
-                        <a:t>Time (s)</a:t>
+                        <a:t>Ground Truth (Qwen)</a:t>
                       </a:r>
                     </a:p>
                   </a:txBody>
@@ -3838,7 +3766,7 @@
                         </a:defRPr>
                       </a:pPr>
                       <a:r>
-                        <a:t>Accuracy</a:t>
+                        <a:t>EasyOCR 결과</a:t>
                       </a:r>
                     </a:p>
                   </a:txBody>
@@ -3861,78 +3789,408 @@
                         </a:defRPr>
                       </a:pPr>
                       <a:r>
+                        <a:t>판정</a:t>
+                      </a:r>
+                    </a:p>
+                  </a:txBody>
+                  <a:tcPr anchor="ctr">
+                    <a:solidFill>
+                      <a:srgbClr val="005299"/>
+                    </a:solidFill>
+                  </a:tcPr>
+                </a:tc>
+              </a:tr>
+              <a:tr h="558800">
+                <a:tc>
+                  <a:txBody>
+                    <a:bodyPr/>
+                    <a:lstStyle/>
+                    <a:p>
+                      <a:pPr algn="l">
+                        <a:defRPr sz="1100" b="1">
+                          <a:solidFill>
+                            <a:srgbClr val="FFFFFF"/>
+                          </a:solidFill>
+                        </a:defRPr>
+                      </a:pPr>
+                      <a:r>
+                        <a:t>SUPPLIER</a:t>
+                      </a:r>
+                    </a:p>
+                  </a:txBody>
+                  <a:tcPr anchor="ctr">
+                    <a:solidFill>
+                      <a:srgbClr val="2A2A3E"/>
+                    </a:solidFill>
+                  </a:tcPr>
+                </a:tc>
+                <a:tc>
+                  <a:txBody>
+                    <a:bodyPr/>
+                    <a:lstStyle/>
+                    <a:p>
+                      <a:pPr algn="l">
+                        <a:defRPr sz="1000" b="0">
+                          <a:solidFill>
+                            <a:srgbClr val="2ECC71"/>
+                          </a:solidFill>
+                        </a:defRPr>
+                      </a:pPr>
+                      <a:r>
+                        <a:t>SK hynix</a:t>
+                      </a:r>
+                    </a:p>
+                  </a:txBody>
+                  <a:tcPr anchor="ctr">
+                    <a:solidFill>
+                      <a:srgbClr val="2A2A3E"/>
+                    </a:solidFill>
+                  </a:tcPr>
+                </a:tc>
+                <a:tc>
+                  <a:txBody>
+                    <a:bodyPr/>
+                    <a:lstStyle/>
+                    <a:p>
+                      <a:pPr algn="l">
+                        <a:defRPr sz="1000" b="0">
+                          <a:solidFill>
+                            <a:srgbClr val="FFFFFF"/>
+                          </a:solidFill>
+                        </a:defRPr>
+                      </a:pPr>
+                      <a:r>
+                        <a:t>SK hynix</a:t>
+                      </a:r>
+                    </a:p>
+                  </a:txBody>
+                  <a:tcPr anchor="ctr">
+                    <a:solidFill>
+                      <a:srgbClr val="2A2A3E"/>
+                    </a:solidFill>
+                  </a:tcPr>
+                </a:tc>
+                <a:tc>
+                  <a:txBody>
+                    <a:bodyPr/>
+                    <a:lstStyle/>
+                    <a:p>
+                      <a:pPr algn="l">
+                        <a:defRPr sz="900" b="1">
+                          <a:solidFill>
+                            <a:srgbClr val="2ECC71"/>
+                          </a:solidFill>
+                        </a:defRPr>
+                      </a:pPr>
+                      <a:r>
+                        <a:t>MATCH</a:t>
+                      </a:r>
+                    </a:p>
+                  </a:txBody>
+                  <a:tcPr anchor="ctr">
+                    <a:solidFill>
+                      <a:srgbClr val="2A2A3E"/>
+                    </a:solidFill>
+                  </a:tcPr>
+                </a:tc>
+              </a:tr>
+              <a:tr h="558800">
+                <a:tc>
+                  <a:txBody>
+                    <a:bodyPr/>
+                    <a:lstStyle/>
+                    <a:p>
+                      <a:pPr algn="l">
+                        <a:defRPr sz="1100" b="1">
+                          <a:solidFill>
+                            <a:srgbClr val="FFFFFF"/>
+                          </a:solidFill>
+                        </a:defRPr>
+                      </a:pPr>
+                      <a:r>
                         <a:t>DEVICE</a:t>
                       </a:r>
                     </a:p>
                   </a:txBody>
                   <a:tcPr anchor="ctr">
                     <a:solidFill>
-                      <a:srgbClr val="005299"/>
-                    </a:solidFill>
-                  </a:tcPr>
-                </a:tc>
-                <a:tc>
-                  <a:txBody>
-                    <a:bodyPr/>
-                    <a:lstStyle/>
-                    <a:p>
-                      <a:pPr algn="ctr">
-                        <a:defRPr sz="1300" b="1">
+                      <a:srgbClr val="222236"/>
+                    </a:solidFill>
+                  </a:tcPr>
+                </a:tc>
+                <a:tc>
+                  <a:txBody>
+                    <a:bodyPr/>
+                    <a:lstStyle/>
+                    <a:p>
+                      <a:pPr algn="l">
+                        <a:defRPr sz="1000" b="0">
+                          <a:solidFill>
+                            <a:srgbClr val="2ECC71"/>
+                          </a:solidFill>
+                        </a:defRPr>
+                      </a:pPr>
+                      <a:r>
+                        <a:t>HN8T062EHKX039R</a:t>
+                      </a:r>
+                    </a:p>
+                  </a:txBody>
+                  <a:tcPr anchor="ctr">
+                    <a:solidFill>
+                      <a:srgbClr val="222236"/>
+                    </a:solidFill>
+                  </a:tcPr>
+                </a:tc>
+                <a:tc>
+                  <a:txBody>
+                    <a:bodyPr/>
+                    <a:lstStyle/>
+                    <a:p>
+                      <a:pPr algn="l">
+                        <a:defRPr sz="1000" b="0">
                           <a:solidFill>
                             <a:srgbClr val="FFFFFF"/>
                           </a:solidFill>
                         </a:defRPr>
                       </a:pPr>
                       <a:r>
-                        <a:t>LOT_NO</a:t>
-                      </a:r>
-                    </a:p>
-                  </a:txBody>
-                  <a:tcPr anchor="ctr">
-                    <a:solidFill>
-                      <a:srgbClr val="005299"/>
-                    </a:solidFill>
-                  </a:tcPr>
-                </a:tc>
-                <a:tc>
-                  <a:txBody>
-                    <a:bodyPr/>
-                    <a:lstStyle/>
-                    <a:p>
-                      <a:pPr algn="ctr">
-                        <a:defRPr sz="1300" b="1">
+                        <a:t>HN8TO62EHKXO39R</a:t>
+                      </a:r>
+                    </a:p>
+                  </a:txBody>
+                  <a:tcPr anchor="ctr">
+                    <a:solidFill>
+                      <a:srgbClr val="222236"/>
+                    </a:solidFill>
+                  </a:tcPr>
+                </a:tc>
+                <a:tc>
+                  <a:txBody>
+                    <a:bodyPr/>
+                    <a:lstStyle/>
+                    <a:p>
+                      <a:pPr algn="l">
+                        <a:defRPr sz="900" b="1">
+                          <a:solidFill>
+                            <a:srgbClr val="F39C12"/>
+                          </a:solidFill>
+                        </a:defRPr>
+                      </a:pPr>
+                      <a:r>
+                        <a:t>PARTIAL - 0→O 혼동 (T062→TO62, 039R→O39R)</a:t>
+                      </a:r>
+                    </a:p>
+                  </a:txBody>
+                  <a:tcPr anchor="ctr">
+                    <a:solidFill>
+                      <a:srgbClr val="222236"/>
+                    </a:solidFill>
+                  </a:tcPr>
+                </a:tc>
+              </a:tr>
+              <a:tr h="558800">
+                <a:tc>
+                  <a:txBody>
+                    <a:bodyPr/>
+                    <a:lstStyle/>
+                    <a:p>
+                      <a:pPr algn="l">
+                        <a:defRPr sz="1100" b="1">
                           <a:solidFill>
                             <a:srgbClr val="FFFFFF"/>
                           </a:solidFill>
                         </a:defRPr>
                       </a:pPr>
                       <a:r>
+                        <a:t>LOT NO.</a:t>
+                      </a:r>
+                    </a:p>
+                  </a:txBody>
+                  <a:tcPr anchor="ctr">
+                    <a:solidFill>
+                      <a:srgbClr val="2A2A3E"/>
+                    </a:solidFill>
+                  </a:tcPr>
+                </a:tc>
+                <a:tc>
+                  <a:txBody>
+                    <a:bodyPr/>
+                    <a:lstStyle/>
+                    <a:p>
+                      <a:pPr algn="l">
+                        <a:defRPr sz="1000" b="0">
+                          <a:solidFill>
+                            <a:srgbClr val="2ECC71"/>
+                          </a:solidFill>
+                        </a:defRPr>
+                      </a:pPr>
+                      <a:r>
+                        <a:t>5QQAM42QC-14X(1/2)</a:t>
+                      </a:r>
+                    </a:p>
+                  </a:txBody>
+                  <a:tcPr anchor="ctr">
+                    <a:solidFill>
+                      <a:srgbClr val="2A2A3E"/>
+                    </a:solidFill>
+                  </a:tcPr>
+                </a:tc>
+                <a:tc>
+                  <a:txBody>
+                    <a:bodyPr/>
+                    <a:lstStyle/>
+                    <a:p>
+                      <a:pPr algn="l">
+                        <a:defRPr sz="1000" b="0">
+                          <a:solidFill>
+                            <a:srgbClr val="FFFFFF"/>
+                          </a:solidFill>
+                        </a:defRPr>
+                      </a:pPr>
+                      <a:r>
+                        <a:t>SQ0AM42C _ 14X( 1/2</a:t>
+                      </a:r>
+                    </a:p>
+                  </a:txBody>
+                  <a:tcPr anchor="ctr">
+                    <a:solidFill>
+                      <a:srgbClr val="2A2A3E"/>
+                    </a:solidFill>
+                  </a:tcPr>
+                </a:tc>
+                <a:tc>
+                  <a:txBody>
+                    <a:bodyPr/>
+                    <a:lstStyle/>
+                    <a:p>
+                      <a:pPr algn="l">
+                        <a:defRPr sz="900" b="1">
+                          <a:solidFill>
+                            <a:srgbClr val="E74C3C"/>
+                          </a:solidFill>
+                        </a:defRPr>
+                      </a:pPr>
+                      <a:r>
+                        <a:t>FAIL - 5QQAM→SQ0AM, 42QC→42C, 구조 깨짐</a:t>
+                      </a:r>
+                    </a:p>
+                  </a:txBody>
+                  <a:tcPr anchor="ctr">
+                    <a:solidFill>
+                      <a:srgbClr val="2A2A3E"/>
+                    </a:solidFill>
+                  </a:tcPr>
+                </a:tc>
+              </a:tr>
+              <a:tr h="558800">
+                <a:tc>
+                  <a:txBody>
+                    <a:bodyPr/>
+                    <a:lstStyle/>
+                    <a:p>
+                      <a:pPr algn="l">
+                        <a:defRPr sz="1100" b="1">
+                          <a:solidFill>
+                            <a:srgbClr val="FFFFFF"/>
+                          </a:solidFill>
+                        </a:defRPr>
+                      </a:pPr>
+                      <a:r>
                         <a:t>ITEM</a:t>
                       </a:r>
                     </a:p>
                   </a:txBody>
                   <a:tcPr anchor="ctr">
                     <a:solidFill>
-                      <a:srgbClr val="005299"/>
+                      <a:srgbClr val="222236"/>
+                    </a:solidFill>
+                  </a:tcPr>
+                </a:tc>
+                <a:tc>
+                  <a:txBody>
+                    <a:bodyPr/>
+                    <a:lstStyle/>
+                    <a:p>
+                      <a:pPr algn="l">
+                        <a:defRPr sz="1000" b="0">
+                          <a:solidFill>
+                            <a:srgbClr val="2ECC71"/>
+                          </a:solidFill>
+                        </a:defRPr>
+                      </a:pPr>
+                      <a:r>
+                        <a:t>402880-04W(A3-3AA00AAAU1TKJX -5AXCCXX-GAYI)-A002</a:t>
+                      </a:r>
+                    </a:p>
+                  </a:txBody>
+                  <a:tcPr anchor="ctr">
+                    <a:solidFill>
+                      <a:srgbClr val="222236"/>
+                    </a:solidFill>
+                  </a:tcPr>
+                </a:tc>
+                <a:tc>
+                  <a:txBody>
+                    <a:bodyPr/>
+                    <a:lstStyle/>
+                    <a:p>
+                      <a:pPr algn="l">
+                        <a:defRPr sz="1000" b="0">
+                          <a:solidFill>
+                            <a:srgbClr val="FFFFFF"/>
+                          </a:solidFill>
+                        </a:defRPr>
+                      </a:pPr>
+                      <a:r>
+                        <a:t>402880 CWA3_ ZAAOQAAAUITKJX GAXCCXX _ GAYI)-AOO?</a:t>
+                      </a:r>
+                    </a:p>
+                  </a:txBody>
+                  <a:tcPr anchor="ctr">
+                    <a:solidFill>
+                      <a:srgbClr val="222236"/>
+                    </a:solidFill>
+                  </a:tcPr>
+                </a:tc>
+                <a:tc>
+                  <a:txBody>
+                    <a:bodyPr/>
+                    <a:lstStyle/>
+                    <a:p>
+                      <a:pPr algn="l">
+                        <a:defRPr sz="900" b="1">
+                          <a:solidFill>
+                            <a:srgbClr val="E74C3C"/>
+                          </a:solidFill>
+                        </a:defRPr>
+                      </a:pPr>
+                      <a:r>
+                        <a:t>FAIL - 04W→CW, 3AA00→ZAAOQ, A002→AOO?</a:t>
+                      </a:r>
+                    </a:p>
+                  </a:txBody>
+                  <a:tcPr anchor="ctr">
+                    <a:solidFill>
+                      <a:srgbClr val="222236"/>
                     </a:solidFill>
                   </a:tcPr>
                 </a:tc>
               </a:tr>
-              <a:tr h="457200">
-                <a:tc>
-                  <a:txBody>
-                    <a:bodyPr/>
-                    <a:lstStyle/>
-                    <a:p>
-                      <a:pPr algn="ctr">
-                        <a:defRPr sz="1200" b="0">
+              <a:tr h="558800">
+                <a:tc>
+                  <a:txBody>
+                    <a:bodyPr/>
+                    <a:lstStyle/>
+                    <a:p>
+                      <a:pPr algn="l">
+                        <a:defRPr sz="1100" b="1">
                           <a:solidFill>
                             <a:srgbClr val="FFFFFF"/>
                           </a:solidFill>
                         </a:defRPr>
                       </a:pPr>
                       <a:r>
-                        <a:t>Quarter (as-is)</a:t>
+                        <a:t>Q'TY</a:t>
                       </a:r>
                     </a:p>
                   </a:txBody>
@@ -3947,15 +4205,38 @@
                     <a:bodyPr/>
                     <a:lstStyle/>
                     <a:p>
-                      <a:pPr algn="ctr">
-                        <a:defRPr sz="1200" b="0">
+                      <a:pPr algn="l">
+                        <a:defRPr sz="1000" b="0">
+                          <a:solidFill>
+                            <a:srgbClr val="2ECC71"/>
+                          </a:solidFill>
+                        </a:defRPr>
+                      </a:pPr>
+                      <a:r>
+                        <a:t>2000 EA</a:t>
+                      </a:r>
+                    </a:p>
+                  </a:txBody>
+                  <a:tcPr anchor="ctr">
+                    <a:solidFill>
+                      <a:srgbClr val="2A2A3E"/>
+                    </a:solidFill>
+                  </a:tcPr>
+                </a:tc>
+                <a:tc>
+                  <a:txBody>
+                    <a:bodyPr/>
+                    <a:lstStyle/>
+                    <a:p>
+                      <a:pPr algn="l">
+                        <a:defRPr sz="1000" b="0">
                           <a:solidFill>
                             <a:srgbClr val="FFFFFF"/>
                           </a:solidFill>
                         </a:defRPr>
                       </a:pPr>
                       <a:r>
-                        <a:t>0.563</a:t>
+                        <a:t>2000 EA</a:t>
                       </a:r>
                     </a:p>
                   </a:txBody>
@@ -3970,15 +4251,134 @@
                     <a:bodyPr/>
                     <a:lstStyle/>
                     <a:p>
-                      <a:pPr algn="ctr">
-                        <a:defRPr sz="1200" b="0">
+                      <a:pPr algn="l">
+                        <a:defRPr sz="900" b="1">
+                          <a:solidFill>
+                            <a:srgbClr val="2ECC71"/>
+                          </a:solidFill>
+                        </a:defRPr>
+                      </a:pPr>
+                      <a:r>
+                        <a:t>MATCH</a:t>
+                      </a:r>
+                    </a:p>
+                  </a:txBody>
+                  <a:tcPr anchor="ctr">
+                    <a:solidFill>
+                      <a:srgbClr val="2A2A3E"/>
+                    </a:solidFill>
+                  </a:tcPr>
+                </a:tc>
+              </a:tr>
+              <a:tr h="558800">
+                <a:tc>
+                  <a:txBody>
+                    <a:bodyPr/>
+                    <a:lstStyle/>
+                    <a:p>
+                      <a:pPr algn="l">
+                        <a:defRPr sz="1100" b="1">
                           <a:solidFill>
                             <a:srgbClr val="FFFFFF"/>
                           </a:solidFill>
                         </a:defRPr>
                       </a:pPr>
                       <a:r>
-                        <a:t>62.5%</a:t>
+                        <a:t>DATE CODE</a:t>
+                      </a:r>
+                    </a:p>
+                  </a:txBody>
+                  <a:tcPr anchor="ctr">
+                    <a:solidFill>
+                      <a:srgbClr val="222236"/>
+                    </a:solidFill>
+                  </a:tcPr>
+                </a:tc>
+                <a:tc>
+                  <a:txBody>
+                    <a:bodyPr/>
+                    <a:lstStyle/>
+                    <a:p>
+                      <a:pPr algn="l">
+                        <a:defRPr sz="1000" b="0">
+                          <a:solidFill>
+                            <a:srgbClr val="2ECC71"/>
+                          </a:solidFill>
+                        </a:defRPr>
+                      </a:pPr>
+                      <a:r>
+                        <a:t>251A</a:t>
+                      </a:r>
+                    </a:p>
+                  </a:txBody>
+                  <a:tcPr anchor="ctr">
+                    <a:solidFill>
+                      <a:srgbClr val="222236"/>
+                    </a:solidFill>
+                  </a:tcPr>
+                </a:tc>
+                <a:tc>
+                  <a:txBody>
+                    <a:bodyPr/>
+                    <a:lstStyle/>
+                    <a:p>
+                      <a:pPr algn="l">
+                        <a:defRPr sz="1000" b="0">
+                          <a:solidFill>
+                            <a:srgbClr val="FFFFFF"/>
+                          </a:solidFill>
+                        </a:defRPr>
+                      </a:pPr>
+                      <a:r>
+                        <a:t>251A</a:t>
+                      </a:r>
+                    </a:p>
+                  </a:txBody>
+                  <a:tcPr anchor="ctr">
+                    <a:solidFill>
+                      <a:srgbClr val="222236"/>
+                    </a:solidFill>
+                  </a:tcPr>
+                </a:tc>
+                <a:tc>
+                  <a:txBody>
+                    <a:bodyPr/>
+                    <a:lstStyle/>
+                    <a:p>
+                      <a:pPr algn="l">
+                        <a:defRPr sz="900" b="1">
+                          <a:solidFill>
+                            <a:srgbClr val="2ECC71"/>
+                          </a:solidFill>
+                        </a:defRPr>
+                      </a:pPr>
+                      <a:r>
+                        <a:t>MATCH</a:t>
+                      </a:r>
+                    </a:p>
+                  </a:txBody>
+                  <a:tcPr anchor="ctr">
+                    <a:solidFill>
+                      <a:srgbClr val="222236"/>
+                    </a:solidFill>
+                  </a:tcPr>
+                </a:tc>
+              </a:tr>
+              <a:tr h="558800">
+                <a:tc>
+                  <a:txBody>
+                    <a:bodyPr/>
+                    <a:lstStyle/>
+                    <a:p>
+                      <a:pPr algn="l">
+                        <a:defRPr sz="1100" b="1">
+                          <a:solidFill>
+                            <a:srgbClr val="FFFFFF"/>
+                          </a:solidFill>
+                        </a:defRPr>
+                      </a:pPr>
+                      <a:r>
+                        <a:t>PACK DATE</a:t>
                       </a:r>
                     </a:p>
                   </a:txBody>
@@ -3993,487 +4393,161 @@
                     <a:bodyPr/>
                     <a:lstStyle/>
                     <a:p>
-                      <a:pPr algn="ctr">
-                        <a:defRPr sz="1200" b="0">
+                      <a:pPr algn="l">
+                        <a:defRPr sz="1000" b="0">
+                          <a:solidFill>
+                            <a:srgbClr val="2ECC71"/>
+                          </a:solidFill>
+                        </a:defRPr>
+                      </a:pPr>
+                      <a:r>
+                        <a:t>2022/12/22</a:t>
+                      </a:r>
+                    </a:p>
+                  </a:txBody>
+                  <a:tcPr anchor="ctr">
+                    <a:solidFill>
+                      <a:srgbClr val="2A2A3E"/>
+                    </a:solidFill>
+                  </a:tcPr>
+                </a:tc>
+                <a:tc>
+                  <a:txBody>
+                    <a:bodyPr/>
+                    <a:lstStyle/>
+                    <a:p>
+                      <a:pPr algn="l">
+                        <a:defRPr sz="1000" b="0">
+                          <a:solidFill>
+                            <a:srgbClr val="FFFFFF"/>
+                          </a:solidFill>
+                        </a:defRPr>
+                      </a:pPr>
+                      <a:r>
+                        <a:t>2022/12/22</a:t>
+                      </a:r>
+                    </a:p>
+                  </a:txBody>
+                  <a:tcPr anchor="ctr">
+                    <a:solidFill>
+                      <a:srgbClr val="2A2A3E"/>
+                    </a:solidFill>
+                  </a:tcPr>
+                </a:tc>
+                <a:tc>
+                  <a:txBody>
+                    <a:bodyPr/>
+                    <a:lstStyle/>
+                    <a:p>
+                      <a:pPr algn="l">
+                        <a:defRPr sz="900" b="1">
+                          <a:solidFill>
+                            <a:srgbClr val="2ECC71"/>
+                          </a:solidFill>
+                        </a:defRPr>
+                      </a:pPr>
+                      <a:r>
+                        <a:t>MATCH</a:t>
+                      </a:r>
+                    </a:p>
+                  </a:txBody>
+                  <a:tcPr anchor="ctr">
+                    <a:solidFill>
+                      <a:srgbClr val="2A2A3E"/>
+                    </a:solidFill>
+                  </a:tcPr>
+                </a:tc>
+              </a:tr>
+              <a:tr h="558800">
+                <a:tc>
+                  <a:txBody>
+                    <a:bodyPr/>
+                    <a:lstStyle/>
+                    <a:p>
+                      <a:pPr algn="l">
+                        <a:defRPr sz="1100" b="1">
+                          <a:solidFill>
+                            <a:srgbClr val="FFFFFF"/>
+                          </a:solidFill>
+                        </a:defRPr>
+                      </a:pPr>
+                      <a:r>
+                        <a:t>ASSEMBLED</a:t>
+                      </a:r>
+                    </a:p>
+                  </a:txBody>
+                  <a:tcPr anchor="ctr">
+                    <a:solidFill>
+                      <a:srgbClr val="222236"/>
+                    </a:solidFill>
+                  </a:tcPr>
+                </a:tc>
+                <a:tc>
+                  <a:txBody>
+                    <a:bodyPr/>
+                    <a:lstStyle/>
+                    <a:p>
+                      <a:pPr algn="l">
+                        <a:defRPr sz="1000" b="0">
+                          <a:solidFill>
+                            <a:srgbClr val="2ECC71"/>
+                          </a:solidFill>
+                        </a:defRPr>
+                      </a:pPr>
+                      <a:r>
+                        <a:t>ASSEMBLED IN KOREA FROM WAFER FABRICATED IN KOREA</a:t>
+                      </a:r>
+                    </a:p>
+                  </a:txBody>
+                  <a:tcPr anchor="ctr">
+                    <a:solidFill>
+                      <a:srgbClr val="222236"/>
+                    </a:solidFill>
+                  </a:tcPr>
+                </a:tc>
+                <a:tc>
+                  <a:txBody>
+                    <a:bodyPr/>
+                    <a:lstStyle/>
+                    <a:p>
+                      <a:pPr algn="l">
+                        <a:defRPr sz="1000" b="0">
+                          <a:solidFill>
+                            <a:srgbClr val="FFFFFF"/>
+                          </a:solidFill>
+                        </a:defRPr>
+                      </a:pPr>
+                      <a:r>
+                        <a:t>ASSEMBLED IN KOREA FROM WAFER FABRICA TED IN KOREA</a:t>
+                      </a:r>
+                    </a:p>
+                  </a:txBody>
+                  <a:tcPr anchor="ctr">
+                    <a:solidFill>
+                      <a:srgbClr val="222236"/>
+                    </a:solidFill>
+                  </a:tcPr>
+                </a:tc>
+                <a:tc>
+                  <a:txBody>
+                    <a:bodyPr/>
+                    <a:lstStyle/>
+                    <a:p>
+                      <a:pPr algn="l">
+                        <a:defRPr sz="900" b="1">
                           <a:solidFill>
                             <a:srgbClr val="F39C12"/>
                           </a:solidFill>
                         </a:defRPr>
                       </a:pPr>
                       <a:r>
-                        <a:t>PARTIAL (87%)</a:t>
-                      </a:r>
-                    </a:p>
-                  </a:txBody>
-                  <a:tcPr anchor="ctr">
-                    <a:solidFill>
-                      <a:srgbClr val="2A2A3E"/>
-                    </a:solidFill>
-                  </a:tcPr>
-                </a:tc>
-                <a:tc>
-                  <a:txBody>
-                    <a:bodyPr/>
-                    <a:lstStyle/>
-                    <a:p>
-                      <a:pPr algn="ctr">
-                        <a:defRPr sz="1200" b="0">
-                          <a:solidFill>
-                            <a:srgbClr val="E74C3C"/>
-                          </a:solidFill>
-                        </a:defRPr>
-                      </a:pPr>
-                      <a:r>
-                        <a:t>MISSED</a:t>
-                      </a:r>
-                    </a:p>
-                  </a:txBody>
-                  <a:tcPr anchor="ctr">
-                    <a:solidFill>
-                      <a:srgbClr val="2A2A3E"/>
-                    </a:solidFill>
-                  </a:tcPr>
-                </a:tc>
-                <a:tc>
-                  <a:txBody>
-                    <a:bodyPr/>
-                    <a:lstStyle/>
-                    <a:p>
-                      <a:pPr algn="ctr">
-                        <a:defRPr sz="1200" b="0">
-                          <a:solidFill>
-                            <a:srgbClr val="E74C3C"/>
-                          </a:solidFill>
-                        </a:defRPr>
-                      </a:pPr>
-                      <a:r>
-                        <a:t>MISSED</a:t>
-                      </a:r>
-                    </a:p>
-                  </a:txBody>
-                  <a:tcPr anchor="ctr">
-                    <a:solidFill>
-                      <a:srgbClr val="2A2A3E"/>
-                    </a:solidFill>
-                  </a:tcPr>
-                </a:tc>
-              </a:tr>
-              <a:tr h="457200">
-                <a:tc>
-                  <a:txBody>
-                    <a:bodyPr/>
-                    <a:lstStyle/>
-                    <a:p>
-                      <a:pPr algn="ctr">
-                        <a:defRPr sz="1200" b="0">
-                          <a:solidFill>
-                            <a:srgbClr val="FFFFFF"/>
-                          </a:solidFill>
-                        </a:defRPr>
-                      </a:pPr>
-                      <a:r>
-                        <a:t>Upscale 2x</a:t>
+                        <a:t>PARTIAL - FABRICATED→FABRICA TED (띄어쓰기)</a:t>
                       </a:r>
                     </a:p>
                   </a:txBody>
                   <a:tcPr anchor="ctr">
                     <a:solidFill>
                       <a:srgbClr val="222236"/>
-                    </a:solidFill>
-                  </a:tcPr>
-                </a:tc>
-                <a:tc>
-                  <a:txBody>
-                    <a:bodyPr/>
-                    <a:lstStyle/>
-                    <a:p>
-                      <a:pPr algn="ctr">
-                        <a:defRPr sz="1200" b="0">
-                          <a:solidFill>
-                            <a:srgbClr val="FFFFFF"/>
-                          </a:solidFill>
-                        </a:defRPr>
-                      </a:pPr>
-                      <a:r>
-                        <a:t>0.810</a:t>
-                      </a:r>
-                    </a:p>
-                  </a:txBody>
-                  <a:tcPr anchor="ctr">
-                    <a:solidFill>
-                      <a:srgbClr val="222236"/>
-                    </a:solidFill>
-                  </a:tcPr>
-                </a:tc>
-                <a:tc>
-                  <a:txBody>
-                    <a:bodyPr/>
-                    <a:lstStyle/>
-                    <a:p>
-                      <a:pPr algn="ctr">
-                        <a:defRPr sz="1200" b="0">
-                          <a:solidFill>
-                            <a:srgbClr val="FFFFFF"/>
-                          </a:solidFill>
-                        </a:defRPr>
-                      </a:pPr>
-                      <a:r>
-                        <a:t>56.2%</a:t>
-                      </a:r>
-                    </a:p>
-                  </a:txBody>
-                  <a:tcPr anchor="ctr">
-                    <a:solidFill>
-                      <a:srgbClr val="222236"/>
-                    </a:solidFill>
-                  </a:tcPr>
-                </a:tc>
-                <a:tc>
-                  <a:txBody>
-                    <a:bodyPr/>
-                    <a:lstStyle/>
-                    <a:p>
-                      <a:pPr algn="ctr">
-                        <a:defRPr sz="1200" b="0">
-                          <a:solidFill>
-                            <a:srgbClr val="F39C12"/>
-                          </a:solidFill>
-                        </a:defRPr>
-                      </a:pPr>
-                      <a:r>
-                        <a:t>PARTIAL (87%)</a:t>
-                      </a:r>
-                    </a:p>
-                  </a:txBody>
-                  <a:tcPr anchor="ctr">
-                    <a:solidFill>
-                      <a:srgbClr val="222236"/>
-                    </a:solidFill>
-                  </a:tcPr>
-                </a:tc>
-                <a:tc>
-                  <a:txBody>
-                    <a:bodyPr/>
-                    <a:lstStyle/>
-                    <a:p>
-                      <a:pPr algn="ctr">
-                        <a:defRPr sz="1200" b="0">
-                          <a:solidFill>
-                            <a:srgbClr val="E74C3C"/>
-                          </a:solidFill>
-                        </a:defRPr>
-                      </a:pPr>
-                      <a:r>
-                        <a:t>MISSED</a:t>
-                      </a:r>
-                    </a:p>
-                  </a:txBody>
-                  <a:tcPr anchor="ctr">
-                    <a:solidFill>
-                      <a:srgbClr val="222236"/>
-                    </a:solidFill>
-                  </a:tcPr>
-                </a:tc>
-                <a:tc>
-                  <a:txBody>
-                    <a:bodyPr/>
-                    <a:lstStyle/>
-                    <a:p>
-                      <a:pPr algn="ctr">
-                        <a:defRPr sz="1200" b="0">
-                          <a:solidFill>
-                            <a:srgbClr val="E74C3C"/>
-                          </a:solidFill>
-                        </a:defRPr>
-                      </a:pPr>
-                      <a:r>
-                        <a:t>MISSED</a:t>
-                      </a:r>
-                    </a:p>
-                  </a:txBody>
-                  <a:tcPr anchor="ctr">
-                    <a:solidFill>
-                      <a:srgbClr val="222236"/>
-                    </a:solidFill>
-                  </a:tcPr>
-                </a:tc>
-              </a:tr>
-              <a:tr h="457200">
-                <a:tc>
-                  <a:txBody>
-                    <a:bodyPr/>
-                    <a:lstStyle/>
-                    <a:p>
-                      <a:pPr algn="ctr">
-                        <a:defRPr sz="1200" b="0">
-                          <a:solidFill>
-                            <a:srgbClr val="FFFFFF"/>
-                          </a:solidFill>
-                        </a:defRPr>
-                      </a:pPr>
-                      <a:r>
-                        <a:t>CLAHE Enhanced</a:t>
-                      </a:r>
-                    </a:p>
-                  </a:txBody>
-                  <a:tcPr anchor="ctr">
-                    <a:solidFill>
-                      <a:srgbClr val="2A2A3E"/>
-                    </a:solidFill>
-                  </a:tcPr>
-                </a:tc>
-                <a:tc>
-                  <a:txBody>
-                    <a:bodyPr/>
-                    <a:lstStyle/>
-                    <a:p>
-                      <a:pPr algn="ctr">
-                        <a:defRPr sz="1200" b="0">
-                          <a:solidFill>
-                            <a:srgbClr val="FFFFFF"/>
-                          </a:solidFill>
-                        </a:defRPr>
-                      </a:pPr>
-                      <a:r>
-                        <a:t>0.752</a:t>
-                      </a:r>
-                    </a:p>
-                  </a:txBody>
-                  <a:tcPr anchor="ctr">
-                    <a:solidFill>
-                      <a:srgbClr val="2A2A3E"/>
-                    </a:solidFill>
-                  </a:tcPr>
-                </a:tc>
-                <a:tc>
-                  <a:txBody>
-                    <a:bodyPr/>
-                    <a:lstStyle/>
-                    <a:p>
-                      <a:pPr algn="ctr">
-                        <a:defRPr sz="1200" b="0">
-                          <a:solidFill>
-                            <a:srgbClr val="FFFFFF"/>
-                          </a:solidFill>
-                        </a:defRPr>
-                      </a:pPr>
-                      <a:r>
-                        <a:t>56.2%</a:t>
-                      </a:r>
-                    </a:p>
-                  </a:txBody>
-                  <a:tcPr anchor="ctr">
-                    <a:solidFill>
-                      <a:srgbClr val="2A2A3E"/>
-                    </a:solidFill>
-                  </a:tcPr>
-                </a:tc>
-                <a:tc>
-                  <a:txBody>
-                    <a:bodyPr/>
-                    <a:lstStyle/>
-                    <a:p>
-                      <a:pPr algn="ctr">
-                        <a:defRPr sz="1200" b="0">
-                          <a:solidFill>
-                            <a:srgbClr val="F39C12"/>
-                          </a:solidFill>
-                        </a:defRPr>
-                      </a:pPr>
-                      <a:r>
-                        <a:t>PARTIAL (87%)</a:t>
-                      </a:r>
-                    </a:p>
-                  </a:txBody>
-                  <a:tcPr anchor="ctr">
-                    <a:solidFill>
-                      <a:srgbClr val="2A2A3E"/>
-                    </a:solidFill>
-                  </a:tcPr>
-                </a:tc>
-                <a:tc>
-                  <a:txBody>
-                    <a:bodyPr/>
-                    <a:lstStyle/>
-                    <a:p>
-                      <a:pPr algn="ctr">
-                        <a:defRPr sz="1200" b="0">
-                          <a:solidFill>
-                            <a:srgbClr val="E74C3C"/>
-                          </a:solidFill>
-                        </a:defRPr>
-                      </a:pPr>
-                      <a:r>
-                        <a:t>MISSED</a:t>
-                      </a:r>
-                    </a:p>
-                  </a:txBody>
-                  <a:tcPr anchor="ctr">
-                    <a:solidFill>
-                      <a:srgbClr val="2A2A3E"/>
-                    </a:solidFill>
-                  </a:tcPr>
-                </a:tc>
-                <a:tc>
-                  <a:txBody>
-                    <a:bodyPr/>
-                    <a:lstStyle/>
-                    <a:p>
-                      <a:pPr algn="ctr">
-                        <a:defRPr sz="1200" b="0">
-                          <a:solidFill>
-                            <a:srgbClr val="E74C3C"/>
-                          </a:solidFill>
-                        </a:defRPr>
-                      </a:pPr>
-                      <a:r>
-                        <a:t>MISSED</a:t>
-                      </a:r>
-                    </a:p>
-                  </a:txBody>
-                  <a:tcPr anchor="ctr">
-                    <a:solidFill>
-                      <a:srgbClr val="2A2A3E"/>
-                    </a:solidFill>
-                  </a:tcPr>
-                </a:tc>
-              </a:tr>
-              <a:tr h="457200">
-                <a:tc>
-                  <a:txBody>
-                    <a:bodyPr/>
-                    <a:lstStyle/>
-                    <a:p>
-                      <a:pPr algn="ctr">
-                        <a:defRPr sz="1300" b="1">
-                          <a:solidFill>
-                            <a:srgbClr val="FFFFFF"/>
-                          </a:solidFill>
-                        </a:defRPr>
-                      </a:pPr>
-                      <a:r>
-                        <a:t>BEST</a:t>
-                      </a:r>
-                    </a:p>
-                  </a:txBody>
-                  <a:tcPr anchor="ctr">
-                    <a:solidFill>
-                      <a:srgbClr val="2ECC71"/>
-                    </a:solidFill>
-                  </a:tcPr>
-                </a:tc>
-                <a:tc>
-                  <a:txBody>
-                    <a:bodyPr/>
-                    <a:lstStyle/>
-                    <a:p>
-                      <a:pPr algn="ctr">
-                        <a:defRPr sz="1300" b="1">
-                          <a:solidFill>
-                            <a:srgbClr val="2ECC71"/>
-                          </a:solidFill>
-                        </a:defRPr>
-                      </a:pPr>
-                      <a:r>
-                        <a:t>0.563s</a:t>
-                      </a:r>
-                    </a:p>
-                  </a:txBody>
-                  <a:tcPr anchor="ctr">
-                    <a:solidFill>
-                      <a:srgbClr val="1A3A1A"/>
-                    </a:solidFill>
-                  </a:tcPr>
-                </a:tc>
-                <a:tc>
-                  <a:txBody>
-                    <a:bodyPr/>
-                    <a:lstStyle/>
-                    <a:p>
-                      <a:pPr algn="ctr">
-                        <a:defRPr sz="1300" b="1">
-                          <a:solidFill>
-                            <a:srgbClr val="2ECC71"/>
-                          </a:solidFill>
-                        </a:defRPr>
-                      </a:pPr>
-                      <a:r>
-                        <a:t>62.5%</a:t>
-                      </a:r>
-                    </a:p>
-                  </a:txBody>
-                  <a:tcPr anchor="ctr">
-                    <a:solidFill>
-                      <a:srgbClr val="1A3A1A"/>
-                    </a:solidFill>
-                  </a:tcPr>
-                </a:tc>
-                <a:tc>
-                  <a:txBody>
-                    <a:bodyPr/>
-                    <a:lstStyle/>
-                    <a:p>
-                      <a:pPr algn="ctr">
-                        <a:defRPr sz="1200" b="0">
-                          <a:solidFill>
-                            <a:srgbClr val="2ECC71"/>
-                          </a:solidFill>
-                        </a:defRPr>
-                      </a:pPr>
-                      <a:r>
-                        <a:t>5/8 fields</a:t>
-                      </a:r>
-                    </a:p>
-                  </a:txBody>
-                  <a:tcPr anchor="ctr">
-                    <a:solidFill>
-                      <a:srgbClr val="1A3A1A"/>
-                    </a:solidFill>
-                  </a:tcPr>
-                </a:tc>
-                <a:tc>
-                  <a:txBody>
-                    <a:bodyPr/>
-                    <a:lstStyle/>
-                    <a:p>
-                      <a:pPr algn="ctr">
-                        <a:defRPr sz="1200" b="0">
-                          <a:solidFill>
-                            <a:srgbClr val="2ECC71"/>
-                          </a:solidFill>
-                        </a:defRPr>
-                      </a:pPr>
-                      <a:r>
-                        <a:t>5/8 fields</a:t>
-                      </a:r>
-                    </a:p>
-                  </a:txBody>
-                  <a:tcPr anchor="ctr">
-                    <a:solidFill>
-                      <a:srgbClr val="1A3A1A"/>
-                    </a:solidFill>
-                  </a:tcPr>
-                </a:tc>
-                <a:tc>
-                  <a:txBody>
-                    <a:bodyPr/>
-                    <a:lstStyle/>
-                    <a:p>
-                      <a:pPr algn="ctr">
-                        <a:defRPr sz="1200" b="0">
-                          <a:solidFill>
-                            <a:srgbClr val="2ECC71"/>
-                          </a:solidFill>
-                        </a:defRPr>
-                      </a:pPr>
-                      <a:r>
-                        <a:t>5/8 fields</a:t>
-                      </a:r>
-                    </a:p>
-                  </a:txBody>
-                  <a:tcPr anchor="ctr">
-                    <a:solidFill>
-                      <a:srgbClr val="1A3A1A"/>
                     </a:solidFill>
                   </a:tcPr>
                 </a:tc>
@@ -4490,8 +4564,8 @@
         </p:nvSpPr>
         <p:spPr>
           <a:xfrm>
-            <a:off x="457200" y="5852160"/>
-            <a:ext cx="10972800" cy="914400"/>
+            <a:off x="457200" y="6309360"/>
+            <a:ext cx="10972800" cy="457200"/>
           </a:xfrm>
           <a:prstGeom prst="rect">
             <a:avLst/>
@@ -4505,14 +4579,14 @@
           <a:lstStyle/>
           <a:p>
             <a:pPr algn="l">
-              <a:defRPr sz="1400" b="1">
+              <a:defRPr sz="1300" b="1">
                 <a:solidFill>
                   <a:srgbClr val="F39C12"/>
                 </a:solidFill>
               </a:defRPr>
             </a:pPr>
             <a:r>
-              <a:t>Verdict: FAST (under 1s) but moderate accuracy. Struggles with complex alphanumeric codes (LOT NO, ITEM).</a:t>
+              <a:t>주요 오류: 0/O 혼동 (DEVICE), 복잡한 영숫자 코드 실패 (LOT NO, ITEM)</a:t>
             </a:r>
           </a:p>
         </p:txBody>
@@ -4551,8 +4625,8 @@
         </p:nvSpPr>
         <p:spPr>
           <a:xfrm>
-            <a:off x="457200" y="274320"/>
-            <a:ext cx="10972800" cy="731520"/>
+            <a:off x="457200" y="182880"/>
+            <a:ext cx="10972800" cy="640080"/>
           </a:xfrm>
           <a:prstGeom prst="rect">
             <a:avLst/>
@@ -4566,14 +4640,14 @@
           <a:lstStyle/>
           <a:p>
             <a:pPr algn="l">
-              <a:defRPr sz="3200" b="1">
+              <a:defRPr sz="3000" b="1">
                 <a:solidFill>
                   <a:srgbClr val="0074D9"/>
                 </a:solidFill>
               </a:defRPr>
             </a:pPr>
             <a:r>
-              <a:t>Method 2: TrOCR (Microsoft Transformer OCR)</a:t>
+              <a:t>OCR vs GT 비교 (2) Upscale 2x — 0.733초</a:t>
             </a:r>
           </a:p>
         </p:txBody>
@@ -4586,8 +4660,8 @@
         </p:nvSpPr>
         <p:spPr>
           <a:xfrm>
-            <a:off x="457200" y="1097280"/>
-            <a:ext cx="5486400" cy="2286000"/>
+            <a:off x="457200" y="777240"/>
+            <a:ext cx="4572000" cy="365760"/>
           </a:xfrm>
           <a:prstGeom prst="rect">
             <a:avLst/>
@@ -4601,97 +4675,902 @@
           <a:lstStyle/>
           <a:p>
             <a:pPr algn="l">
-              <a:defRPr sz="1800" b="1">
+              <a:defRPr sz="1600" b="1">
                 <a:solidFill>
-                  <a:srgbClr val="2ECC71"/>
+                  <a:srgbClr val="E74C3C"/>
                 </a:solidFill>
               </a:defRPr>
             </a:pPr>
             <a:r>
-              <a:t>Architecture</a:t>
-            </a:r>
-          </a:p>
-          <a:p>
-            <a:pPr algn="l">
-              <a:defRPr sz="600" b="0">
-                <a:solidFill>
-                  <a:srgbClr val="FFFFFF"/>
-                </a:solidFill>
-              </a:defRPr>
-            </a:pPr>
-          </a:p>
-          <a:p>
-            <a:pPr algn="l">
-              <a:defRPr sz="1300" b="0">
-                <a:solidFill>
-                  <a:srgbClr val="FFFFFF"/>
-                </a:solidFill>
-              </a:defRPr>
-            </a:pPr>
-            <a:r>
-              <a:t>Encoder: ViT (Vision Transformer)</a:t>
-            </a:r>
-          </a:p>
-          <a:p>
-            <a:pPr algn="l">
-              <a:defRPr sz="1300" b="0">
-                <a:solidFill>
-                  <a:srgbClr val="FFFFFF"/>
-                </a:solidFill>
-              </a:defRPr>
-            </a:pPr>
-            <a:r>
-              <a:t>Decoder: RoBERTa-based text decoder</a:t>
-            </a:r>
-          </a:p>
-          <a:p>
-            <a:pPr algn="l">
-              <a:defRPr sz="1300" b="0">
-                <a:solidFill>
-                  <a:srgbClr val="FFFFFF"/>
-                </a:solidFill>
-              </a:defRPr>
-            </a:pPr>
-            <a:r>
-              <a:t>Hybrid: EasyOCR detection + TrOCR recognition</a:t>
-            </a:r>
-          </a:p>
-          <a:p>
-            <a:pPr algn="l">
-              <a:defRPr sz="1300" b="0">
-                <a:solidFill>
-                  <a:srgbClr val="BDBDBD"/>
-                </a:solidFill>
-              </a:defRPr>
-            </a:pPr>
-            <a:r>
-              <a:t>Model: microsoft/trocr-base-printed</a:t>
-            </a:r>
-          </a:p>
-          <a:p>
-            <a:pPr algn="l">
-              <a:defRPr sz="1300" b="0">
-                <a:solidFill>
-                  <a:srgbClr val="BDBDBD"/>
-                </a:solidFill>
-              </a:defRPr>
-            </a:pPr>
-            <a:r>
-              <a:t>Pre-trained on printed text recognition</a:t>
+              <a:t>56.2% 정확도 — 오히려 하락</a:t>
             </a:r>
           </a:p>
         </p:txBody>
       </p:sp>
+      <p:graphicFrame>
+        <p:nvGraphicFramePr>
+          <p:cNvPr id="4" name="Table 3"/>
+          <p:cNvGraphicFramePr>
+            <a:graphicFrameLocks noGrp="1"/>
+          </p:cNvGraphicFramePr>
+          <p:nvPr/>
+        </p:nvGraphicFramePr>
+        <p:xfrm>
+          <a:off x="457200" y="1280160"/>
+          <a:ext cx="11247120" cy="5029200"/>
+        </p:xfrm>
+        <a:graphic>
+          <a:graphicData uri="http://schemas.openxmlformats.org/drawingml/2006/table">
+            <a:tbl>
+              <a:tblPr firstRow="1" bandRow="1">
+                <a:tableStyleId>{5C22544A-7EE6-4342-B048-85BDC9FD1C3A}</a:tableStyleId>
+              </a:tblPr>
+              <a:tblGrid>
+                <a:gridCol w="1371600"/>
+                <a:gridCol w="3840480"/>
+                <a:gridCol w="3840480"/>
+                <a:gridCol w="2194560"/>
+              </a:tblGrid>
+              <a:tr h="558800">
+                <a:tc>
+                  <a:txBody>
+                    <a:bodyPr/>
+                    <a:lstStyle/>
+                    <a:p>
+                      <a:pPr algn="ctr">
+                        <a:defRPr sz="1300" b="1">
+                          <a:solidFill>
+                            <a:srgbClr val="FFFFFF"/>
+                          </a:solidFill>
+                        </a:defRPr>
+                      </a:pPr>
+                      <a:r>
+                        <a:t>필드</a:t>
+                      </a:r>
+                    </a:p>
+                  </a:txBody>
+                  <a:tcPr anchor="ctr">
+                    <a:solidFill>
+                      <a:srgbClr val="005299"/>
+                    </a:solidFill>
+                  </a:tcPr>
+                </a:tc>
+                <a:tc>
+                  <a:txBody>
+                    <a:bodyPr/>
+                    <a:lstStyle/>
+                    <a:p>
+                      <a:pPr algn="ctr">
+                        <a:defRPr sz="1300" b="1">
+                          <a:solidFill>
+                            <a:srgbClr val="FFFFFF"/>
+                          </a:solidFill>
+                        </a:defRPr>
+                      </a:pPr>
+                      <a:r>
+                        <a:t>Ground Truth (Qwen)</a:t>
+                      </a:r>
+                    </a:p>
+                  </a:txBody>
+                  <a:tcPr anchor="ctr">
+                    <a:solidFill>
+                      <a:srgbClr val="005299"/>
+                    </a:solidFill>
+                  </a:tcPr>
+                </a:tc>
+                <a:tc>
+                  <a:txBody>
+                    <a:bodyPr/>
+                    <a:lstStyle/>
+                    <a:p>
+                      <a:pPr algn="ctr">
+                        <a:defRPr sz="1300" b="1">
+                          <a:solidFill>
+                            <a:srgbClr val="FFFFFF"/>
+                          </a:solidFill>
+                        </a:defRPr>
+                      </a:pPr>
+                      <a:r>
+                        <a:t>EasyOCR 결과</a:t>
+                      </a:r>
+                    </a:p>
+                  </a:txBody>
+                  <a:tcPr anchor="ctr">
+                    <a:solidFill>
+                      <a:srgbClr val="005299"/>
+                    </a:solidFill>
+                  </a:tcPr>
+                </a:tc>
+                <a:tc>
+                  <a:txBody>
+                    <a:bodyPr/>
+                    <a:lstStyle/>
+                    <a:p>
+                      <a:pPr algn="ctr">
+                        <a:defRPr sz="1300" b="1">
+                          <a:solidFill>
+                            <a:srgbClr val="FFFFFF"/>
+                          </a:solidFill>
+                        </a:defRPr>
+                      </a:pPr>
+                      <a:r>
+                        <a:t>판정</a:t>
+                      </a:r>
+                    </a:p>
+                  </a:txBody>
+                  <a:tcPr anchor="ctr">
+                    <a:solidFill>
+                      <a:srgbClr val="005299"/>
+                    </a:solidFill>
+                  </a:tcPr>
+                </a:tc>
+              </a:tr>
+              <a:tr h="558800">
+                <a:tc>
+                  <a:txBody>
+                    <a:bodyPr/>
+                    <a:lstStyle/>
+                    <a:p>
+                      <a:pPr algn="l">
+                        <a:defRPr sz="1100" b="1">
+                          <a:solidFill>
+                            <a:srgbClr val="FFFFFF"/>
+                          </a:solidFill>
+                        </a:defRPr>
+                      </a:pPr>
+                      <a:r>
+                        <a:t>SUPPLIER</a:t>
+                      </a:r>
+                    </a:p>
+                  </a:txBody>
+                  <a:tcPr anchor="ctr">
+                    <a:solidFill>
+                      <a:srgbClr val="2A2A3E"/>
+                    </a:solidFill>
+                  </a:tcPr>
+                </a:tc>
+                <a:tc>
+                  <a:txBody>
+                    <a:bodyPr/>
+                    <a:lstStyle/>
+                    <a:p>
+                      <a:pPr algn="l">
+                        <a:defRPr sz="1000" b="0">
+                          <a:solidFill>
+                            <a:srgbClr val="2ECC71"/>
+                          </a:solidFill>
+                        </a:defRPr>
+                      </a:pPr>
+                      <a:r>
+                        <a:t>SK hynix</a:t>
+                      </a:r>
+                    </a:p>
+                  </a:txBody>
+                  <a:tcPr anchor="ctr">
+                    <a:solidFill>
+                      <a:srgbClr val="2A2A3E"/>
+                    </a:solidFill>
+                  </a:tcPr>
+                </a:tc>
+                <a:tc>
+                  <a:txBody>
+                    <a:bodyPr/>
+                    <a:lstStyle/>
+                    <a:p>
+                      <a:pPr algn="l">
+                        <a:defRPr sz="1000" b="0">
+                          <a:solidFill>
+                            <a:srgbClr val="FFFFFF"/>
+                          </a:solidFill>
+                        </a:defRPr>
+                      </a:pPr>
+                      <a:r>
+                        <a:t>SK hynix</a:t>
+                      </a:r>
+                    </a:p>
+                  </a:txBody>
+                  <a:tcPr anchor="ctr">
+                    <a:solidFill>
+                      <a:srgbClr val="2A2A3E"/>
+                    </a:solidFill>
+                  </a:tcPr>
+                </a:tc>
+                <a:tc>
+                  <a:txBody>
+                    <a:bodyPr/>
+                    <a:lstStyle/>
+                    <a:p>
+                      <a:pPr algn="l">
+                        <a:defRPr sz="900" b="1">
+                          <a:solidFill>
+                            <a:srgbClr val="2ECC71"/>
+                          </a:solidFill>
+                        </a:defRPr>
+                      </a:pPr>
+                      <a:r>
+                        <a:t>MATCH</a:t>
+                      </a:r>
+                    </a:p>
+                  </a:txBody>
+                  <a:tcPr anchor="ctr">
+                    <a:solidFill>
+                      <a:srgbClr val="2A2A3E"/>
+                    </a:solidFill>
+                  </a:tcPr>
+                </a:tc>
+              </a:tr>
+              <a:tr h="558800">
+                <a:tc>
+                  <a:txBody>
+                    <a:bodyPr/>
+                    <a:lstStyle/>
+                    <a:p>
+                      <a:pPr algn="l">
+                        <a:defRPr sz="1100" b="1">
+                          <a:solidFill>
+                            <a:srgbClr val="FFFFFF"/>
+                          </a:solidFill>
+                        </a:defRPr>
+                      </a:pPr>
+                      <a:r>
+                        <a:t>DEVICE</a:t>
+                      </a:r>
+                    </a:p>
+                  </a:txBody>
+                  <a:tcPr anchor="ctr">
+                    <a:solidFill>
+                      <a:srgbClr val="222236"/>
+                    </a:solidFill>
+                  </a:tcPr>
+                </a:tc>
+                <a:tc>
+                  <a:txBody>
+                    <a:bodyPr/>
+                    <a:lstStyle/>
+                    <a:p>
+                      <a:pPr algn="l">
+                        <a:defRPr sz="1000" b="0">
+                          <a:solidFill>
+                            <a:srgbClr val="2ECC71"/>
+                          </a:solidFill>
+                        </a:defRPr>
+                      </a:pPr>
+                      <a:r>
+                        <a:t>HN8T062EHKX039R</a:t>
+                      </a:r>
+                    </a:p>
+                  </a:txBody>
+                  <a:tcPr anchor="ctr">
+                    <a:solidFill>
+                      <a:srgbClr val="222236"/>
+                    </a:solidFill>
+                  </a:tcPr>
+                </a:tc>
+                <a:tc>
+                  <a:txBody>
+                    <a:bodyPr/>
+                    <a:lstStyle/>
+                    <a:p>
+                      <a:pPr algn="l">
+                        <a:defRPr sz="1000" b="0">
+                          <a:solidFill>
+                            <a:srgbClr val="FFFFFF"/>
+                          </a:solidFill>
+                        </a:defRPr>
+                      </a:pPr>
+                      <a:r>
+                        <a:t>HN8TO62EHKXO39R</a:t>
+                      </a:r>
+                    </a:p>
+                  </a:txBody>
+                  <a:tcPr anchor="ctr">
+                    <a:solidFill>
+                      <a:srgbClr val="222236"/>
+                    </a:solidFill>
+                  </a:tcPr>
+                </a:tc>
+                <a:tc>
+                  <a:txBody>
+                    <a:bodyPr/>
+                    <a:lstStyle/>
+                    <a:p>
+                      <a:pPr algn="l">
+                        <a:defRPr sz="900" b="1">
+                          <a:solidFill>
+                            <a:srgbClr val="F39C12"/>
+                          </a:solidFill>
+                        </a:defRPr>
+                      </a:pPr>
+                      <a:r>
+                        <a:t>PARTIAL - 0→O 혼동</a:t>
+                      </a:r>
+                    </a:p>
+                  </a:txBody>
+                  <a:tcPr anchor="ctr">
+                    <a:solidFill>
+                      <a:srgbClr val="222236"/>
+                    </a:solidFill>
+                  </a:tcPr>
+                </a:tc>
+              </a:tr>
+              <a:tr h="558800">
+                <a:tc>
+                  <a:txBody>
+                    <a:bodyPr/>
+                    <a:lstStyle/>
+                    <a:p>
+                      <a:pPr algn="l">
+                        <a:defRPr sz="1100" b="1">
+                          <a:solidFill>
+                            <a:srgbClr val="FFFFFF"/>
+                          </a:solidFill>
+                        </a:defRPr>
+                      </a:pPr>
+                      <a:r>
+                        <a:t>LOT NO.</a:t>
+                      </a:r>
+                    </a:p>
+                  </a:txBody>
+                  <a:tcPr anchor="ctr">
+                    <a:solidFill>
+                      <a:srgbClr val="2A2A3E"/>
+                    </a:solidFill>
+                  </a:tcPr>
+                </a:tc>
+                <a:tc>
+                  <a:txBody>
+                    <a:bodyPr/>
+                    <a:lstStyle/>
+                    <a:p>
+                      <a:pPr algn="l">
+                        <a:defRPr sz="1000" b="0">
+                          <a:solidFill>
+                            <a:srgbClr val="2ECC71"/>
+                          </a:solidFill>
+                        </a:defRPr>
+                      </a:pPr>
+                      <a:r>
+                        <a:t>5QQAM42QC-14X(1/2)</a:t>
+                      </a:r>
+                    </a:p>
+                  </a:txBody>
+                  <a:tcPr anchor="ctr">
+                    <a:solidFill>
+                      <a:srgbClr val="2A2A3E"/>
+                    </a:solidFill>
+                  </a:tcPr>
+                </a:tc>
+                <a:tc>
+                  <a:txBody>
+                    <a:bodyPr/>
+                    <a:lstStyle/>
+                    <a:p>
+                      <a:pPr algn="l">
+                        <a:defRPr sz="1000" b="0">
+                          <a:solidFill>
+                            <a:srgbClr val="FFFFFF"/>
+                          </a:solidFill>
+                        </a:defRPr>
+                      </a:pPr>
+                      <a:r>
+                        <a:t>SQQAM4zOC 14X( 1 /2</a:t>
+                      </a:r>
+                    </a:p>
+                  </a:txBody>
+                  <a:tcPr anchor="ctr">
+                    <a:solidFill>
+                      <a:srgbClr val="2A2A3E"/>
+                    </a:solidFill>
+                  </a:tcPr>
+                </a:tc>
+                <a:tc>
+                  <a:txBody>
+                    <a:bodyPr/>
+                    <a:lstStyle/>
+                    <a:p>
+                      <a:pPr algn="l">
+                        <a:defRPr sz="900" b="1">
+                          <a:solidFill>
+                            <a:srgbClr val="E74C3C"/>
+                          </a:solidFill>
+                        </a:defRPr>
+                      </a:pPr>
+                      <a:r>
+                        <a:t>FAIL - 5QQAM42QC→SQQAM4zOC, -14X→14X</a:t>
+                      </a:r>
+                    </a:p>
+                  </a:txBody>
+                  <a:tcPr anchor="ctr">
+                    <a:solidFill>
+                      <a:srgbClr val="2A2A3E"/>
+                    </a:solidFill>
+                  </a:tcPr>
+                </a:tc>
+              </a:tr>
+              <a:tr h="558800">
+                <a:tc>
+                  <a:txBody>
+                    <a:bodyPr/>
+                    <a:lstStyle/>
+                    <a:p>
+                      <a:pPr algn="l">
+                        <a:defRPr sz="1100" b="1">
+                          <a:solidFill>
+                            <a:srgbClr val="FFFFFF"/>
+                          </a:solidFill>
+                        </a:defRPr>
+                      </a:pPr>
+                      <a:r>
+                        <a:t>ITEM</a:t>
+                      </a:r>
+                    </a:p>
+                  </a:txBody>
+                  <a:tcPr anchor="ctr">
+                    <a:solidFill>
+                      <a:srgbClr val="222236"/>
+                    </a:solidFill>
+                  </a:tcPr>
+                </a:tc>
+                <a:tc>
+                  <a:txBody>
+                    <a:bodyPr/>
+                    <a:lstStyle/>
+                    <a:p>
+                      <a:pPr algn="l">
+                        <a:defRPr sz="1000" b="0">
+                          <a:solidFill>
+                            <a:srgbClr val="2ECC71"/>
+                          </a:solidFill>
+                        </a:defRPr>
+                      </a:pPr>
+                      <a:r>
+                        <a:t>402880-04W(A3-3AA00AAAU1TKJX -5AXCCXX-GAYI)-A002</a:t>
+                      </a:r>
+                    </a:p>
+                  </a:txBody>
+                  <a:tcPr anchor="ctr">
+                    <a:solidFill>
+                      <a:srgbClr val="222236"/>
+                    </a:solidFill>
+                  </a:tcPr>
+                </a:tc>
+                <a:tc>
+                  <a:txBody>
+                    <a:bodyPr/>
+                    <a:lstStyle/>
+                    <a:p>
+                      <a:pPr algn="l">
+                        <a:defRPr sz="1000" b="0">
+                          <a:solidFill>
+                            <a:srgbClr val="FFFFFF"/>
+                          </a:solidFill>
+                        </a:defRPr>
+                      </a:pPr>
+                      <a:r>
+                        <a:t>402880- CMA3_ZAAOQAAAUITKJX _ 6AXCCXX_ GAYI)-AOO2</a:t>
+                      </a:r>
+                    </a:p>
+                  </a:txBody>
+                  <a:tcPr anchor="ctr">
+                    <a:solidFill>
+                      <a:srgbClr val="222236"/>
+                    </a:solidFill>
+                  </a:tcPr>
+                </a:tc>
+                <a:tc>
+                  <a:txBody>
+                    <a:bodyPr/>
+                    <a:lstStyle/>
+                    <a:p>
+                      <a:pPr algn="l">
+                        <a:defRPr sz="900" b="1">
+                          <a:solidFill>
+                            <a:srgbClr val="E74C3C"/>
+                          </a:solidFill>
+                        </a:defRPr>
+                      </a:pPr>
+                      <a:r>
+                        <a:t>FAIL - 04W→CMA, 3AA00→ZAAOQ, 5AX→6AX</a:t>
+                      </a:r>
+                    </a:p>
+                  </a:txBody>
+                  <a:tcPr anchor="ctr">
+                    <a:solidFill>
+                      <a:srgbClr val="222236"/>
+                    </a:solidFill>
+                  </a:tcPr>
+                </a:tc>
+              </a:tr>
+              <a:tr h="558800">
+                <a:tc>
+                  <a:txBody>
+                    <a:bodyPr/>
+                    <a:lstStyle/>
+                    <a:p>
+                      <a:pPr algn="l">
+                        <a:defRPr sz="1100" b="1">
+                          <a:solidFill>
+                            <a:srgbClr val="FFFFFF"/>
+                          </a:solidFill>
+                        </a:defRPr>
+                      </a:pPr>
+                      <a:r>
+                        <a:t>Q'TY</a:t>
+                      </a:r>
+                    </a:p>
+                  </a:txBody>
+                  <a:tcPr anchor="ctr">
+                    <a:solidFill>
+                      <a:srgbClr val="2A2A3E"/>
+                    </a:solidFill>
+                  </a:tcPr>
+                </a:tc>
+                <a:tc>
+                  <a:txBody>
+                    <a:bodyPr/>
+                    <a:lstStyle/>
+                    <a:p>
+                      <a:pPr algn="l">
+                        <a:defRPr sz="1000" b="0">
+                          <a:solidFill>
+                            <a:srgbClr val="2ECC71"/>
+                          </a:solidFill>
+                        </a:defRPr>
+                      </a:pPr>
+                      <a:r>
+                        <a:t>2000 EA</a:t>
+                      </a:r>
+                    </a:p>
+                  </a:txBody>
+                  <a:tcPr anchor="ctr">
+                    <a:solidFill>
+                      <a:srgbClr val="2A2A3E"/>
+                    </a:solidFill>
+                  </a:tcPr>
+                </a:tc>
+                <a:tc>
+                  <a:txBody>
+                    <a:bodyPr/>
+                    <a:lstStyle/>
+                    <a:p>
+                      <a:pPr algn="l">
+                        <a:defRPr sz="1000" b="0">
+                          <a:solidFill>
+                            <a:srgbClr val="FFFFFF"/>
+                          </a:solidFill>
+                        </a:defRPr>
+                      </a:pPr>
+                      <a:r>
+                        <a:t>?000 EA</a:t>
+                      </a:r>
+                    </a:p>
+                  </a:txBody>
+                  <a:tcPr anchor="ctr">
+                    <a:solidFill>
+                      <a:srgbClr val="2A2A3E"/>
+                    </a:solidFill>
+                  </a:tcPr>
+                </a:tc>
+                <a:tc>
+                  <a:txBody>
+                    <a:bodyPr/>
+                    <a:lstStyle/>
+                    <a:p>
+                      <a:pPr algn="l">
+                        <a:defRPr sz="900" b="1">
+                          <a:solidFill>
+                            <a:srgbClr val="E74C3C"/>
+                          </a:solidFill>
+                        </a:defRPr>
+                      </a:pPr>
+                      <a:r>
+                        <a:t>FAIL - 2000→?000</a:t>
+                      </a:r>
+                    </a:p>
+                  </a:txBody>
+                  <a:tcPr anchor="ctr">
+                    <a:solidFill>
+                      <a:srgbClr val="2A2A3E"/>
+                    </a:solidFill>
+                  </a:tcPr>
+                </a:tc>
+              </a:tr>
+              <a:tr h="558800">
+                <a:tc>
+                  <a:txBody>
+                    <a:bodyPr/>
+                    <a:lstStyle/>
+                    <a:p>
+                      <a:pPr algn="l">
+                        <a:defRPr sz="1100" b="1">
+                          <a:solidFill>
+                            <a:srgbClr val="FFFFFF"/>
+                          </a:solidFill>
+                        </a:defRPr>
+                      </a:pPr>
+                      <a:r>
+                        <a:t>DATE CODE</a:t>
+                      </a:r>
+                    </a:p>
+                  </a:txBody>
+                  <a:tcPr anchor="ctr">
+                    <a:solidFill>
+                      <a:srgbClr val="222236"/>
+                    </a:solidFill>
+                  </a:tcPr>
+                </a:tc>
+                <a:tc>
+                  <a:txBody>
+                    <a:bodyPr/>
+                    <a:lstStyle/>
+                    <a:p>
+                      <a:pPr algn="l">
+                        <a:defRPr sz="1000" b="0">
+                          <a:solidFill>
+                            <a:srgbClr val="2ECC71"/>
+                          </a:solidFill>
+                        </a:defRPr>
+                      </a:pPr>
+                      <a:r>
+                        <a:t>251A</a:t>
+                      </a:r>
+                    </a:p>
+                  </a:txBody>
+                  <a:tcPr anchor="ctr">
+                    <a:solidFill>
+                      <a:srgbClr val="222236"/>
+                    </a:solidFill>
+                  </a:tcPr>
+                </a:tc>
+                <a:tc>
+                  <a:txBody>
+                    <a:bodyPr/>
+                    <a:lstStyle/>
+                    <a:p>
+                      <a:pPr algn="l">
+                        <a:defRPr sz="1000" b="0">
+                          <a:solidFill>
+                            <a:srgbClr val="FFFFFF"/>
+                          </a:solidFill>
+                        </a:defRPr>
+                      </a:pPr>
+                      <a:r>
+                        <a:t>251A</a:t>
+                      </a:r>
+                    </a:p>
+                  </a:txBody>
+                  <a:tcPr anchor="ctr">
+                    <a:solidFill>
+                      <a:srgbClr val="222236"/>
+                    </a:solidFill>
+                  </a:tcPr>
+                </a:tc>
+                <a:tc>
+                  <a:txBody>
+                    <a:bodyPr/>
+                    <a:lstStyle/>
+                    <a:p>
+                      <a:pPr algn="l">
+                        <a:defRPr sz="900" b="1">
+                          <a:solidFill>
+                            <a:srgbClr val="2ECC71"/>
+                          </a:solidFill>
+                        </a:defRPr>
+                      </a:pPr>
+                      <a:r>
+                        <a:t>MATCH</a:t>
+                      </a:r>
+                    </a:p>
+                  </a:txBody>
+                  <a:tcPr anchor="ctr">
+                    <a:solidFill>
+                      <a:srgbClr val="222236"/>
+                    </a:solidFill>
+                  </a:tcPr>
+                </a:tc>
+              </a:tr>
+              <a:tr h="558800">
+                <a:tc>
+                  <a:txBody>
+                    <a:bodyPr/>
+                    <a:lstStyle/>
+                    <a:p>
+                      <a:pPr algn="l">
+                        <a:defRPr sz="1100" b="1">
+                          <a:solidFill>
+                            <a:srgbClr val="FFFFFF"/>
+                          </a:solidFill>
+                        </a:defRPr>
+                      </a:pPr>
+                      <a:r>
+                        <a:t>PACK DATE</a:t>
+                      </a:r>
+                    </a:p>
+                  </a:txBody>
+                  <a:tcPr anchor="ctr">
+                    <a:solidFill>
+                      <a:srgbClr val="2A2A3E"/>
+                    </a:solidFill>
+                  </a:tcPr>
+                </a:tc>
+                <a:tc>
+                  <a:txBody>
+                    <a:bodyPr/>
+                    <a:lstStyle/>
+                    <a:p>
+                      <a:pPr algn="l">
+                        <a:defRPr sz="1000" b="0">
+                          <a:solidFill>
+                            <a:srgbClr val="2ECC71"/>
+                          </a:solidFill>
+                        </a:defRPr>
+                      </a:pPr>
+                      <a:r>
+                        <a:t>2022/12/22</a:t>
+                      </a:r>
+                    </a:p>
+                  </a:txBody>
+                  <a:tcPr anchor="ctr">
+                    <a:solidFill>
+                      <a:srgbClr val="2A2A3E"/>
+                    </a:solidFill>
+                  </a:tcPr>
+                </a:tc>
+                <a:tc>
+                  <a:txBody>
+                    <a:bodyPr/>
+                    <a:lstStyle/>
+                    <a:p>
+                      <a:pPr algn="l">
+                        <a:defRPr sz="1000" b="0">
+                          <a:solidFill>
+                            <a:srgbClr val="FFFFFF"/>
+                          </a:solidFill>
+                        </a:defRPr>
+                      </a:pPr>
+                      <a:r>
+                        <a:t>2022/12/22</a:t>
+                      </a:r>
+                    </a:p>
+                  </a:txBody>
+                  <a:tcPr anchor="ctr">
+                    <a:solidFill>
+                      <a:srgbClr val="2A2A3E"/>
+                    </a:solidFill>
+                  </a:tcPr>
+                </a:tc>
+                <a:tc>
+                  <a:txBody>
+                    <a:bodyPr/>
+                    <a:lstStyle/>
+                    <a:p>
+                      <a:pPr algn="l">
+                        <a:defRPr sz="900" b="1">
+                          <a:solidFill>
+                            <a:srgbClr val="2ECC71"/>
+                          </a:solidFill>
+                        </a:defRPr>
+                      </a:pPr>
+                      <a:r>
+                        <a:t>MATCH</a:t>
+                      </a:r>
+                    </a:p>
+                  </a:txBody>
+                  <a:tcPr anchor="ctr">
+                    <a:solidFill>
+                      <a:srgbClr val="2A2A3E"/>
+                    </a:solidFill>
+                  </a:tcPr>
+                </a:tc>
+              </a:tr>
+              <a:tr h="558800">
+                <a:tc>
+                  <a:txBody>
+                    <a:bodyPr/>
+                    <a:lstStyle/>
+                    <a:p>
+                      <a:pPr algn="l">
+                        <a:defRPr sz="1100" b="1">
+                          <a:solidFill>
+                            <a:srgbClr val="FFFFFF"/>
+                          </a:solidFill>
+                        </a:defRPr>
+                      </a:pPr>
+                      <a:r>
+                        <a:t>ASSEMBLED</a:t>
+                      </a:r>
+                    </a:p>
+                  </a:txBody>
+                  <a:tcPr anchor="ctr">
+                    <a:solidFill>
+                      <a:srgbClr val="222236"/>
+                    </a:solidFill>
+                  </a:tcPr>
+                </a:tc>
+                <a:tc>
+                  <a:txBody>
+                    <a:bodyPr/>
+                    <a:lstStyle/>
+                    <a:p>
+                      <a:pPr algn="l">
+                        <a:defRPr sz="1000" b="0">
+                          <a:solidFill>
+                            <a:srgbClr val="2ECC71"/>
+                          </a:solidFill>
+                        </a:defRPr>
+                      </a:pPr>
+                      <a:r>
+                        <a:t>ASSEMBLED IN KOREA FROM WAFER FABRICATED IN KOREA</a:t>
+                      </a:r>
+                    </a:p>
+                  </a:txBody>
+                  <a:tcPr anchor="ctr">
+                    <a:solidFill>
+                      <a:srgbClr val="222236"/>
+                    </a:solidFill>
+                  </a:tcPr>
+                </a:tc>
+                <a:tc>
+                  <a:txBody>
+                    <a:bodyPr/>
+                    <a:lstStyle/>
+                    <a:p>
+                      <a:pPr algn="l">
+                        <a:defRPr sz="1000" b="0">
+                          <a:solidFill>
+                            <a:srgbClr val="FFFFFF"/>
+                          </a:solidFill>
+                        </a:defRPr>
+                      </a:pPr>
+                      <a:r>
+                        <a:t>ASSEMBLED IN KOREA FROM WAFER FABRICA TED IN KOREA</a:t>
+                      </a:r>
+                    </a:p>
+                  </a:txBody>
+                  <a:tcPr anchor="ctr">
+                    <a:solidFill>
+                      <a:srgbClr val="222236"/>
+                    </a:solidFill>
+                  </a:tcPr>
+                </a:tc>
+                <a:tc>
+                  <a:txBody>
+                    <a:bodyPr/>
+                    <a:lstStyle/>
+                    <a:p>
+                      <a:pPr algn="l">
+                        <a:defRPr sz="900" b="1">
+                          <a:solidFill>
+                            <a:srgbClr val="F39C12"/>
+                          </a:solidFill>
+                        </a:defRPr>
+                      </a:pPr>
+                      <a:r>
+                        <a:t>PARTIAL - FABRICATED→FABRICA TED</a:t>
+                      </a:r>
+                    </a:p>
+                  </a:txBody>
+                  <a:tcPr anchor="ctr">
+                    <a:solidFill>
+                      <a:srgbClr val="222236"/>
+                    </a:solidFill>
+                  </a:tcPr>
+                </a:tc>
+              </a:tr>
+            </a:tbl>
+          </a:graphicData>
+        </a:graphic>
+      </p:graphicFrame>
       <p:sp>
         <p:nvSpPr>
-          <p:cNvPr id="4" name="TextBox 3"/>
+          <p:cNvPr id="5" name="TextBox 4"/>
           <p:cNvSpPr txBox="1"/>
           <p:nvPr/>
         </p:nvSpPr>
         <p:spPr>
           <a:xfrm>
-            <a:off x="6400800" y="1097280"/>
-            <a:ext cx="5029200" cy="2286000"/>
+            <a:off x="457200" y="6309360"/>
+            <a:ext cx="10972800" cy="457200"/>
           </a:xfrm>
           <a:prstGeom prst="rect">
             <a:avLst/>
@@ -4705,592 +5584,14 @@
           <a:lstStyle/>
           <a:p>
             <a:pPr algn="l">
-              <a:defRPr sz="1800" b="1">
+              <a:defRPr sz="1300" b="1">
                 <a:solidFill>
                   <a:srgbClr val="F39C12"/>
                 </a:solidFill>
               </a:defRPr>
             </a:pPr>
             <a:r>
-              <a:t>Approach</a:t>
-            </a:r>
-          </a:p>
-          <a:p>
-            <a:pPr algn="l">
-              <a:defRPr sz="600" b="0">
-                <a:solidFill>
-                  <a:srgbClr val="FFFFFF"/>
-                </a:solidFill>
-              </a:defRPr>
-            </a:pPr>
-          </a:p>
-          <a:p>
-            <a:pPr algn="l">
-              <a:defRPr sz="1300" b="0">
-                <a:solidFill>
-                  <a:srgbClr val="FFFFFF"/>
-                </a:solidFill>
-              </a:defRPr>
-            </a:pPr>
-            <a:r>
-              <a:t>1. Upscale image 2x (INTER_CUBIC)</a:t>
-            </a:r>
-          </a:p>
-          <a:p>
-            <a:pPr algn="l">
-              <a:defRPr sz="1300" b="0">
-                <a:solidFill>
-                  <a:srgbClr val="FFFFFF"/>
-                </a:solidFill>
-              </a:defRPr>
-            </a:pPr>
-            <a:r>
-              <a:t>2. EasyOCR detects 20 text boxes</a:t>
-            </a:r>
-          </a:p>
-          <a:p>
-            <a:pPr algn="l">
-              <a:defRPr sz="1300" b="0">
-                <a:solidFill>
-                  <a:srgbClr val="FFFFFF"/>
-                </a:solidFill>
-              </a:defRPr>
-            </a:pPr>
-            <a:r>
-              <a:t>3. Crop each box region</a:t>
-            </a:r>
-          </a:p>
-          <a:p>
-            <a:pPr algn="l">
-              <a:defRPr sz="1300" b="0">
-                <a:solidFill>
-                  <a:srgbClr val="FFFFFF"/>
-                </a:solidFill>
-              </a:defRPr>
-            </a:pPr>
-            <a:r>
-              <a:t>4. TrOCR recognizes each crop</a:t>
-            </a:r>
-          </a:p>
-          <a:p>
-            <a:pPr algn="l">
-              <a:defRPr sz="1300" b="0">
-                <a:solidFill>
-                  <a:srgbClr val="FFFFFF"/>
-                </a:solidFill>
-              </a:defRPr>
-            </a:pPr>
-            <a:r>
-              <a:t>5. Concatenate all results</a:t>
-            </a:r>
-          </a:p>
-        </p:txBody>
-      </p:sp>
-      <p:graphicFrame>
-        <p:nvGraphicFramePr>
-          <p:cNvPr id="5" name="Table 4"/>
-          <p:cNvGraphicFramePr>
-            <a:graphicFrameLocks noGrp="1"/>
-          </p:cNvGraphicFramePr>
-          <p:nvPr/>
-        </p:nvGraphicFramePr>
-        <p:xfrm>
-          <a:off x="457200" y="3657600"/>
-          <a:ext cx="10972800" cy="1645920"/>
-        </p:xfrm>
-        <a:graphic>
-          <a:graphicData uri="http://schemas.openxmlformats.org/drawingml/2006/table">
-            <a:tbl>
-              <a:tblPr firstRow="1" bandRow="1">
-                <a:tableStyleId>{5C22544A-7EE6-4342-B048-85BDC9FD1C3A}</a:tableStyleId>
-              </a:tblPr>
-              <a:tblGrid>
-                <a:gridCol w="1828800"/>
-                <a:gridCol w="1828800"/>
-                <a:gridCol w="1828800"/>
-                <a:gridCol w="1828800"/>
-                <a:gridCol w="1828800"/>
-                <a:gridCol w="1828800"/>
-              </a:tblGrid>
-              <a:tr h="548640">
-                <a:tc>
-                  <a:txBody>
-                    <a:bodyPr/>
-                    <a:lstStyle/>
-                    <a:p>
-                      <a:pPr algn="ctr">
-                        <a:defRPr sz="1300" b="1">
-                          <a:solidFill>
-                            <a:srgbClr val="FFFFFF"/>
-                          </a:solidFill>
-                        </a:defRPr>
-                      </a:pPr>
-                      <a:r>
-                        <a:t>Config</a:t>
-                      </a:r>
-                    </a:p>
-                  </a:txBody>
-                  <a:tcPr anchor="ctr">
-                    <a:solidFill>
-                      <a:srgbClr val="005299"/>
-                    </a:solidFill>
-                  </a:tcPr>
-                </a:tc>
-                <a:tc>
-                  <a:txBody>
-                    <a:bodyPr/>
-                    <a:lstStyle/>
-                    <a:p>
-                      <a:pPr algn="ctr">
-                        <a:defRPr sz="1300" b="1">
-                          <a:solidFill>
-                            <a:srgbClr val="FFFFFF"/>
-                          </a:solidFill>
-                        </a:defRPr>
-                      </a:pPr>
-                      <a:r>
-                        <a:t>Time (s)</a:t>
-                      </a:r>
-                    </a:p>
-                  </a:txBody>
-                  <a:tcPr anchor="ctr">
-                    <a:solidFill>
-                      <a:srgbClr val="005299"/>
-                    </a:solidFill>
-                  </a:tcPr>
-                </a:tc>
-                <a:tc>
-                  <a:txBody>
-                    <a:bodyPr/>
-                    <a:lstStyle/>
-                    <a:p>
-                      <a:pPr algn="ctr">
-                        <a:defRPr sz="1300" b="1">
-                          <a:solidFill>
-                            <a:srgbClr val="FFFFFF"/>
-                          </a:solidFill>
-                        </a:defRPr>
-                      </a:pPr>
-                      <a:r>
-                        <a:t>Accuracy</a:t>
-                      </a:r>
-                    </a:p>
-                  </a:txBody>
-                  <a:tcPr anchor="ctr">
-                    <a:solidFill>
-                      <a:srgbClr val="005299"/>
-                    </a:solidFill>
-                  </a:tcPr>
-                </a:tc>
-                <a:tc>
-                  <a:txBody>
-                    <a:bodyPr/>
-                    <a:lstStyle/>
-                    <a:p>
-                      <a:pPr algn="ctr">
-                        <a:defRPr sz="1300" b="1">
-                          <a:solidFill>
-                            <a:srgbClr val="FFFFFF"/>
-                          </a:solidFill>
-                        </a:defRPr>
-                      </a:pPr>
-                      <a:r>
-                        <a:t>Boxes</a:t>
-                      </a:r>
-                    </a:p>
-                  </a:txBody>
-                  <a:tcPr anchor="ctr">
-                    <a:solidFill>
-                      <a:srgbClr val="005299"/>
-                    </a:solidFill>
-                  </a:tcPr>
-                </a:tc>
-                <a:tc>
-                  <a:txBody>
-                    <a:bodyPr/>
-                    <a:lstStyle/>
-                    <a:p>
-                      <a:pPr algn="ctr">
-                        <a:defRPr sz="1300" b="1">
-                          <a:solidFill>
-                            <a:srgbClr val="FFFFFF"/>
-                          </a:solidFill>
-                        </a:defRPr>
-                      </a:pPr>
-                      <a:r>
-                        <a:t>Key Wins</a:t>
-                      </a:r>
-                    </a:p>
-                  </a:txBody>
-                  <a:tcPr anchor="ctr">
-                    <a:solidFill>
-                      <a:srgbClr val="005299"/>
-                    </a:solidFill>
-                  </a:tcPr>
-                </a:tc>
-                <a:tc>
-                  <a:txBody>
-                    <a:bodyPr/>
-                    <a:lstStyle/>
-                    <a:p>
-                      <a:pPr algn="ctr">
-                        <a:defRPr sz="1300" b="1">
-                          <a:solidFill>
-                            <a:srgbClr val="FFFFFF"/>
-                          </a:solidFill>
-                        </a:defRPr>
-                      </a:pPr>
-                      <a:r>
-                        <a:t>Key Misses</a:t>
-                      </a:r>
-                    </a:p>
-                  </a:txBody>
-                  <a:tcPr anchor="ctr">
-                    <a:solidFill>
-                      <a:srgbClr val="005299"/>
-                    </a:solidFill>
-                  </a:tcPr>
-                </a:tc>
-              </a:tr>
-              <a:tr h="548640">
-                <a:tc>
-                  <a:txBody>
-                    <a:bodyPr/>
-                    <a:lstStyle/>
-                    <a:p>
-                      <a:pPr algn="ctr">
-                        <a:defRPr sz="1200" b="0">
-                          <a:solidFill>
-                            <a:srgbClr val="FFFFFF"/>
-                          </a:solidFill>
-                        </a:defRPr>
-                      </a:pPr>
-                      <a:r>
-                        <a:t>Hybrid (EasyOCR+TrOCR)</a:t>
-                      </a:r>
-                    </a:p>
-                  </a:txBody>
-                  <a:tcPr anchor="ctr">
-                    <a:solidFill>
-                      <a:srgbClr val="2A2A3E"/>
-                    </a:solidFill>
-                  </a:tcPr>
-                </a:tc>
-                <a:tc>
-                  <a:txBody>
-                    <a:bodyPr/>
-                    <a:lstStyle/>
-                    <a:p>
-                      <a:pPr algn="ctr">
-                        <a:defRPr sz="1200" b="0">
-                          <a:solidFill>
-                            <a:srgbClr val="E74C3C"/>
-                          </a:solidFill>
-                        </a:defRPr>
-                      </a:pPr>
-                      <a:r>
-                        <a:t>3.241</a:t>
-                      </a:r>
-                    </a:p>
-                  </a:txBody>
-                  <a:tcPr anchor="ctr">
-                    <a:solidFill>
-                      <a:srgbClr val="2A2A3E"/>
-                    </a:solidFill>
-                  </a:tcPr>
-                </a:tc>
-                <a:tc>
-                  <a:txBody>
-                    <a:bodyPr/>
-                    <a:lstStyle/>
-                    <a:p>
-                      <a:pPr algn="ctr">
-                        <a:defRPr sz="1200" b="1">
-                          <a:solidFill>
-                            <a:srgbClr val="2ECC71"/>
-                          </a:solidFill>
-                        </a:defRPr>
-                      </a:pPr>
-                      <a:r>
-                        <a:t>81.2%</a:t>
-                      </a:r>
-                    </a:p>
-                  </a:txBody>
-                  <a:tcPr anchor="ctr">
-                    <a:solidFill>
-                      <a:srgbClr val="2A2A3E"/>
-                    </a:solidFill>
-                  </a:tcPr>
-                </a:tc>
-                <a:tc>
-                  <a:txBody>
-                    <a:bodyPr/>
-                    <a:lstStyle/>
-                    <a:p>
-                      <a:pPr algn="ctr">
-                        <a:defRPr sz="1200" b="0">
-                          <a:solidFill>
-                            <a:srgbClr val="FFFFFF"/>
-                          </a:solidFill>
-                        </a:defRPr>
-                      </a:pPr>
-                      <a:r>
-                        <a:t>20</a:t>
-                      </a:r>
-                    </a:p>
-                  </a:txBody>
-                  <a:tcPr anchor="ctr">
-                    <a:solidFill>
-                      <a:srgbClr val="2A2A3E"/>
-                    </a:solidFill>
-                  </a:tcPr>
-                </a:tc>
-                <a:tc>
-                  <a:txBody>
-                    <a:bodyPr/>
-                    <a:lstStyle/>
-                    <a:p>
-                      <a:pPr algn="ctr">
-                        <a:defRPr sz="1200" b="0">
-                          <a:solidFill>
-                            <a:srgbClr val="2ECC71"/>
-                          </a:solidFill>
-                        </a:defRPr>
-                      </a:pPr>
-                      <a:r>
-                        <a:t>DEVICE, ASSEMBLED</a:t>
-                      </a:r>
-                    </a:p>
-                  </a:txBody>
-                  <a:tcPr anchor="ctr">
-                    <a:solidFill>
-                      <a:srgbClr val="2A2A3E"/>
-                    </a:solidFill>
-                  </a:tcPr>
-                </a:tc>
-                <a:tc>
-                  <a:txBody>
-                    <a:bodyPr/>
-                    <a:lstStyle/>
-                    <a:p>
-                      <a:pPr algn="ctr">
-                        <a:defRPr sz="1200" b="0">
-                          <a:solidFill>
-                            <a:srgbClr val="E74C3C"/>
-                          </a:solidFill>
-                        </a:defRPr>
-                      </a:pPr>
-                      <a:r>
-                        <a:t>ITEM (54%)</a:t>
-                      </a:r>
-                    </a:p>
-                  </a:txBody>
-                  <a:tcPr anchor="ctr">
-                    <a:solidFill>
-                      <a:srgbClr val="2A2A3E"/>
-                    </a:solidFill>
-                  </a:tcPr>
-                </a:tc>
-              </a:tr>
-              <a:tr h="548640">
-                <a:tc>
-                  <a:txBody>
-                    <a:bodyPr/>
-                    <a:lstStyle/>
-                    <a:p>
-                      <a:pPr algn="ctr">
-                        <a:defRPr sz="1300" b="1">
-                          <a:solidFill>
-                            <a:srgbClr val="FFFFFF"/>
-                          </a:solidFill>
-                        </a:defRPr>
-                      </a:pPr>
-                      <a:r>
-                        <a:t>BEST</a:t>
-                      </a:r>
-                    </a:p>
-                  </a:txBody>
-                  <a:tcPr anchor="ctr">
-                    <a:solidFill>
-                      <a:srgbClr val="2ECC71"/>
-                    </a:solidFill>
-                  </a:tcPr>
-                </a:tc>
-                <a:tc>
-                  <a:txBody>
-                    <a:bodyPr/>
-                    <a:lstStyle/>
-                    <a:p>
-                      <a:pPr algn="ctr">
-                        <a:defRPr sz="1300" b="1">
-                          <a:solidFill>
-                            <a:srgbClr val="E74C3C"/>
-                          </a:solidFill>
-                        </a:defRPr>
-                      </a:pPr>
-                      <a:r>
-                        <a:t>3.241s</a:t>
-                      </a:r>
-                    </a:p>
-                  </a:txBody>
-                  <a:tcPr anchor="ctr">
-                    <a:solidFill>
-                      <a:srgbClr val="3A1A1A"/>
-                    </a:solidFill>
-                  </a:tcPr>
-                </a:tc>
-                <a:tc>
-                  <a:txBody>
-                    <a:bodyPr/>
-                    <a:lstStyle/>
-                    <a:p>
-                      <a:pPr algn="ctr">
-                        <a:defRPr sz="1300" b="1">
-                          <a:solidFill>
-                            <a:srgbClr val="2ECC71"/>
-                          </a:solidFill>
-                        </a:defRPr>
-                      </a:pPr>
-                      <a:r>
-                        <a:t>81.2%</a:t>
-                      </a:r>
-                    </a:p>
-                  </a:txBody>
-                  <a:tcPr anchor="ctr">
-                    <a:solidFill>
-                      <a:srgbClr val="1A3A1A"/>
-                    </a:solidFill>
-                  </a:tcPr>
-                </a:tc>
-                <a:tc>
-                  <a:txBody>
-                    <a:bodyPr/>
-                    <a:lstStyle/>
-                    <a:p>
-                      <a:pPr algn="ctr">
-                        <a:defRPr sz="1200" b="0">
-                          <a:solidFill>
-                            <a:srgbClr val="2ECC71"/>
-                          </a:solidFill>
-                        </a:defRPr>
-                      </a:pPr>
-                      <a:r>
-                        <a:t>6.5/8</a:t>
-                      </a:r>
-                    </a:p>
-                  </a:txBody>
-                  <a:tcPr anchor="ctr">
-                    <a:solidFill>
-                      <a:srgbClr val="1A3A1A"/>
-                    </a:solidFill>
-                  </a:tcPr>
-                </a:tc>
-                <a:tc>
-                  <a:txBody>
-                    <a:bodyPr/>
-                    <a:lstStyle/>
-                    <a:p>
-                      <a:pPr algn="ctr">
-                        <a:defRPr sz="1200" b="0">
-                          <a:solidFill>
-                            <a:srgbClr val="2ECC71"/>
-                          </a:solidFill>
-                        </a:defRPr>
-                      </a:pPr>
-                      <a:r>
-                        <a:t>Best accuracy</a:t>
-                      </a:r>
-                    </a:p>
-                  </a:txBody>
-                  <a:tcPr anchor="ctr">
-                    <a:solidFill>
-                      <a:srgbClr val="1A3A1A"/>
-                    </a:solidFill>
-                  </a:tcPr>
-                </a:tc>
-                <a:tc>
-                  <a:txBody>
-                    <a:bodyPr/>
-                    <a:lstStyle/>
-                    <a:p>
-                      <a:pPr algn="ctr">
-                        <a:defRPr sz="1200" b="0">
-                          <a:solidFill>
-                            <a:srgbClr val="E74C3C"/>
-                          </a:solidFill>
-                        </a:defRPr>
-                      </a:pPr>
-                      <a:r>
-                        <a:t>Too slow</a:t>
-                      </a:r>
-                    </a:p>
-                  </a:txBody>
-                  <a:tcPr anchor="ctr">
-                    <a:solidFill>
-                      <a:srgbClr val="3A1A1A"/>
-                    </a:solidFill>
-                  </a:tcPr>
-                </a:tc>
-              </a:tr>
-            </a:tbl>
-          </a:graphicData>
-        </a:graphic>
-      </p:graphicFrame>
-      <p:sp>
-        <p:nvSpPr>
-          <p:cNvPr id="6" name="TextBox 5"/>
-          <p:cNvSpPr txBox="1"/>
-          <p:nvPr/>
-        </p:nvSpPr>
-        <p:spPr>
-          <a:xfrm>
-            <a:off x="457200" y="5394960"/>
-            <a:ext cx="10972800" cy="1371600"/>
-          </a:xfrm>
-          <a:prstGeom prst="rect">
-            <a:avLst/>
-          </a:prstGeom>
-          <a:noFill/>
-        </p:spPr>
-        <p:txBody>
-          <a:bodyPr wrap="square">
-            <a:spAutoFit/>
-          </a:bodyPr>
-          <a:lstStyle/>
-          <a:p>
-            <a:pPr algn="l">
-              <a:defRPr sz="1200" b="1">
-                <a:solidFill>
-                  <a:srgbClr val="0074D9"/>
-                </a:solidFill>
-              </a:defRPr>
-            </a:pPr>
-            <a:r>
-              <a:t>OCR Output (excerpt):</a:t>
-            </a:r>
-          </a:p>
-          <a:p>
-            <a:pPr algn="l">
-              <a:defRPr sz="1100" b="0">
-                <a:solidFill>
-                  <a:srgbClr val="BDBDBD"/>
-                </a:solidFill>
-              </a:defRPr>
-            </a:pPr>
-            <a:r>
-              <a:t>SUPPLIER:SK HYNIX | DEVICE:HN8T062EHKX039R | LOT NO.:500AM42QC 14X(1/2 | Q'TY:2000 EA</a:t>
-            </a:r>
-          </a:p>
-          <a:p>
-            <a:pPr algn="l">
-              <a:defRPr sz="1400" b="1">
-                <a:solidFill>
-                  <a:srgbClr val="F39C12"/>
-                </a:solidFill>
-              </a:defRPr>
-            </a:pPr>
-            <a:r>
-              <a:t>Verdict: HIGHEST ACCURACY (81.2%) but 3.2x over 1-second budget. Best for batch/offline processing.</a:t>
+              <a:t>Upscale로 Q'TY도 실패 (?000). 확대가 CRAFT 검출 경계를 오히려 왜곡시킴.</a:t>
             </a:r>
           </a:p>
         </p:txBody>
@@ -5329,8 +5630,8 @@
         </p:nvSpPr>
         <p:spPr>
           <a:xfrm>
-            <a:off x="457200" y="274320"/>
-            <a:ext cx="10972800" cy="731520"/>
+            <a:off x="457200" y="182880"/>
+            <a:ext cx="10972800" cy="640080"/>
           </a:xfrm>
           <a:prstGeom prst="rect">
             <a:avLst/>
@@ -5344,14 +5645,14 @@
           <a:lstStyle/>
           <a:p>
             <a:pPr algn="l">
-              <a:defRPr sz="3200" b="1">
+              <a:defRPr sz="3000" b="1">
                 <a:solidFill>
                   <a:srgbClr val="0074D9"/>
                 </a:solidFill>
               </a:defRPr>
             </a:pPr>
             <a:r>
-              <a:t>Method 3: RapidOCR (PaddleOCR via ONNX Runtime)</a:t>
+              <a:t>OCR vs GT 비교 (3) CLAHE Enhanced — 0.712초</a:t>
             </a:r>
           </a:p>
         </p:txBody>
@@ -5364,8 +5665,8 @@
         </p:nvSpPr>
         <p:spPr>
           <a:xfrm>
-            <a:off x="457200" y="1097280"/>
-            <a:ext cx="5486400" cy="2286000"/>
+            <a:off x="457200" y="777240"/>
+            <a:ext cx="4572000" cy="365760"/>
           </a:xfrm>
           <a:prstGeom prst="rect">
             <a:avLst/>
@@ -5379,83 +5680,14 @@
           <a:lstStyle/>
           <a:p>
             <a:pPr algn="l">
-              <a:defRPr sz="1800" b="1">
+              <a:defRPr sz="1600" b="1">
                 <a:solidFill>
-                  <a:srgbClr val="2ECC71"/>
+                  <a:srgbClr val="E74C3C"/>
                 </a:solidFill>
               </a:defRPr>
             </a:pPr>
             <a:r>
-              <a:t>Architecture</a:t>
-            </a:r>
-          </a:p>
-          <a:p>
-            <a:pPr algn="l">
-              <a:defRPr sz="600" b="0">
-                <a:solidFill>
-                  <a:srgbClr val="FFFFFF"/>
-                </a:solidFill>
-              </a:defRPr>
-            </a:pPr>
-          </a:p>
-          <a:p>
-            <a:pPr algn="l">
-              <a:defRPr sz="1300" b="0">
-                <a:solidFill>
-                  <a:srgbClr val="FFFFFF"/>
-                </a:solidFill>
-              </a:defRPr>
-            </a:pPr>
-            <a:r>
-              <a:t>Detection: DB (Differentiable Binarization)</a:t>
-            </a:r>
-          </a:p>
-          <a:p>
-            <a:pPr algn="l">
-              <a:defRPr sz="1300" b="0">
-                <a:solidFill>
-                  <a:srgbClr val="FFFFFF"/>
-                </a:solidFill>
-              </a:defRPr>
-            </a:pPr>
-            <a:r>
-              <a:t>Direction: Text angle classifier</a:t>
-            </a:r>
-          </a:p>
-          <a:p>
-            <a:pPr algn="l">
-              <a:defRPr sz="1300" b="0">
-                <a:solidFill>
-                  <a:srgbClr val="FFFFFF"/>
-                </a:solidFill>
-              </a:defRPr>
-            </a:pPr>
-            <a:r>
-              <a:t>Recognition: SVTR / CRNN</a:t>
-            </a:r>
-          </a:p>
-          <a:p>
-            <a:pPr algn="l">
-              <a:defRPr sz="1300" b="0">
-                <a:solidFill>
-                  <a:srgbClr val="FFFFFF"/>
-                </a:solidFill>
-              </a:defRPr>
-            </a:pPr>
-            <a:r>
-              <a:t>Backend: ONNX Runtime (CPU inference)</a:t>
-            </a:r>
-          </a:p>
-          <a:p>
-            <a:pPr algn="l">
-              <a:defRPr sz="1300" b="0">
-                <a:solidFill>
-                  <a:srgbClr val="BDBDBD"/>
-                </a:solidFill>
-              </a:defRPr>
-            </a:pPr>
-            <a:r>
-              <a:t>Based on PaddleOCR models (Baidu)</a:t>
+              <a:t>56.2% 정확도 — 개선 없음</a:t>
             </a:r>
           </a:p>
         </p:txBody>
@@ -5469,8 +5701,8 @@
           <p:nvPr/>
         </p:nvGraphicFramePr>
         <p:xfrm>
-          <a:off x="457200" y="3474720"/>
-          <a:ext cx="10972800" cy="2286000"/>
+          <a:off x="457200" y="1280160"/>
+          <a:ext cx="11247120" cy="5029200"/>
         </p:xfrm>
         <a:graphic>
           <a:graphicData uri="http://schemas.openxmlformats.org/drawingml/2006/table">
@@ -5479,14 +5711,12 @@
                 <a:tableStyleId>{5C22544A-7EE6-4342-B048-85BDC9FD1C3A}</a:tableStyleId>
               </a:tblPr>
               <a:tblGrid>
-                <a:gridCol w="1828800"/>
-                <a:gridCol w="1828800"/>
-                <a:gridCol w="1828800"/>
-                <a:gridCol w="1828800"/>
-                <a:gridCol w="1828800"/>
-                <a:gridCol w="1828800"/>
+                <a:gridCol w="1371600"/>
+                <a:gridCol w="3840480"/>
+                <a:gridCol w="3840480"/>
+                <a:gridCol w="2194560"/>
               </a:tblGrid>
-              <a:tr h="457200">
+              <a:tr h="558800">
                 <a:tc>
                   <a:txBody>
                     <a:bodyPr/>
@@ -5500,7 +5730,7 @@
                         </a:defRPr>
                       </a:pPr>
                       <a:r>
-                        <a:t>Variant</a:t>
+                        <a:t>필드</a:t>
                       </a:r>
                     </a:p>
                   </a:txBody>
@@ -5523,7 +5753,7 @@
                         </a:defRPr>
                       </a:pPr>
                       <a:r>
-                        <a:t>Time (s)</a:t>
+                        <a:t>Ground Truth (Qwen)</a:t>
                       </a:r>
                     </a:p>
                   </a:txBody>
@@ -5546,7 +5776,7 @@
                         </a:defRPr>
                       </a:pPr>
                       <a:r>
-                        <a:t>Accuracy</a:t>
+                        <a:t>EasyOCR 결과</a:t>
                       </a:r>
                     </a:p>
                   </a:txBody>
@@ -5569,78 +5799,408 @@
                         </a:defRPr>
                       </a:pPr>
                       <a:r>
+                        <a:t>판정</a:t>
+                      </a:r>
+                    </a:p>
+                  </a:txBody>
+                  <a:tcPr anchor="ctr">
+                    <a:solidFill>
+                      <a:srgbClr val="005299"/>
+                    </a:solidFill>
+                  </a:tcPr>
+                </a:tc>
+              </a:tr>
+              <a:tr h="558800">
+                <a:tc>
+                  <a:txBody>
+                    <a:bodyPr/>
+                    <a:lstStyle/>
+                    <a:p>
+                      <a:pPr algn="l">
+                        <a:defRPr sz="1100" b="1">
+                          <a:solidFill>
+                            <a:srgbClr val="FFFFFF"/>
+                          </a:solidFill>
+                        </a:defRPr>
+                      </a:pPr>
+                      <a:r>
+                        <a:t>SUPPLIER</a:t>
+                      </a:r>
+                    </a:p>
+                  </a:txBody>
+                  <a:tcPr anchor="ctr">
+                    <a:solidFill>
+                      <a:srgbClr val="2A2A3E"/>
+                    </a:solidFill>
+                  </a:tcPr>
+                </a:tc>
+                <a:tc>
+                  <a:txBody>
+                    <a:bodyPr/>
+                    <a:lstStyle/>
+                    <a:p>
+                      <a:pPr algn="l">
+                        <a:defRPr sz="1000" b="0">
+                          <a:solidFill>
+                            <a:srgbClr val="2ECC71"/>
+                          </a:solidFill>
+                        </a:defRPr>
+                      </a:pPr>
+                      <a:r>
+                        <a:t>SK hynix</a:t>
+                      </a:r>
+                    </a:p>
+                  </a:txBody>
+                  <a:tcPr anchor="ctr">
+                    <a:solidFill>
+                      <a:srgbClr val="2A2A3E"/>
+                    </a:solidFill>
+                  </a:tcPr>
+                </a:tc>
+                <a:tc>
+                  <a:txBody>
+                    <a:bodyPr/>
+                    <a:lstStyle/>
+                    <a:p>
+                      <a:pPr algn="l">
+                        <a:defRPr sz="1000" b="0">
+                          <a:solidFill>
+                            <a:srgbClr val="FFFFFF"/>
+                          </a:solidFill>
+                        </a:defRPr>
+                      </a:pPr>
+                      <a:r>
+                        <a:t>SK hynix</a:t>
+                      </a:r>
+                    </a:p>
+                  </a:txBody>
+                  <a:tcPr anchor="ctr">
+                    <a:solidFill>
+                      <a:srgbClr val="2A2A3E"/>
+                    </a:solidFill>
+                  </a:tcPr>
+                </a:tc>
+                <a:tc>
+                  <a:txBody>
+                    <a:bodyPr/>
+                    <a:lstStyle/>
+                    <a:p>
+                      <a:pPr algn="l">
+                        <a:defRPr sz="900" b="1">
+                          <a:solidFill>
+                            <a:srgbClr val="2ECC71"/>
+                          </a:solidFill>
+                        </a:defRPr>
+                      </a:pPr>
+                      <a:r>
+                        <a:t>MATCH</a:t>
+                      </a:r>
+                    </a:p>
+                  </a:txBody>
+                  <a:tcPr anchor="ctr">
+                    <a:solidFill>
+                      <a:srgbClr val="2A2A3E"/>
+                    </a:solidFill>
+                  </a:tcPr>
+                </a:tc>
+              </a:tr>
+              <a:tr h="558800">
+                <a:tc>
+                  <a:txBody>
+                    <a:bodyPr/>
+                    <a:lstStyle/>
+                    <a:p>
+                      <a:pPr algn="l">
+                        <a:defRPr sz="1100" b="1">
+                          <a:solidFill>
+                            <a:srgbClr val="FFFFFF"/>
+                          </a:solidFill>
+                        </a:defRPr>
+                      </a:pPr>
+                      <a:r>
                         <a:t>DEVICE</a:t>
                       </a:r>
                     </a:p>
                   </a:txBody>
                   <a:tcPr anchor="ctr">
                     <a:solidFill>
-                      <a:srgbClr val="005299"/>
-                    </a:solidFill>
-                  </a:tcPr>
-                </a:tc>
-                <a:tc>
-                  <a:txBody>
-                    <a:bodyPr/>
-                    <a:lstStyle/>
-                    <a:p>
-                      <a:pPr algn="ctr">
-                        <a:defRPr sz="1300" b="1">
+                      <a:srgbClr val="222236"/>
+                    </a:solidFill>
+                  </a:tcPr>
+                </a:tc>
+                <a:tc>
+                  <a:txBody>
+                    <a:bodyPr/>
+                    <a:lstStyle/>
+                    <a:p>
+                      <a:pPr algn="l">
+                        <a:defRPr sz="1000" b="0">
+                          <a:solidFill>
+                            <a:srgbClr val="2ECC71"/>
+                          </a:solidFill>
+                        </a:defRPr>
+                      </a:pPr>
+                      <a:r>
+                        <a:t>HN8T062EHKX039R</a:t>
+                      </a:r>
+                    </a:p>
+                  </a:txBody>
+                  <a:tcPr anchor="ctr">
+                    <a:solidFill>
+                      <a:srgbClr val="222236"/>
+                    </a:solidFill>
+                  </a:tcPr>
+                </a:tc>
+                <a:tc>
+                  <a:txBody>
+                    <a:bodyPr/>
+                    <a:lstStyle/>
+                    <a:p>
+                      <a:pPr algn="l">
+                        <a:defRPr sz="1000" b="0">
                           <a:solidFill>
                             <a:srgbClr val="FFFFFF"/>
                           </a:solidFill>
                         </a:defRPr>
                       </a:pPr>
                       <a:r>
-                        <a:t>LOT_NO</a:t>
-                      </a:r>
-                    </a:p>
-                  </a:txBody>
-                  <a:tcPr anchor="ctr">
-                    <a:solidFill>
-                      <a:srgbClr val="005299"/>
-                    </a:solidFill>
-                  </a:tcPr>
-                </a:tc>
-                <a:tc>
-                  <a:txBody>
-                    <a:bodyPr/>
-                    <a:lstStyle/>
-                    <a:p>
-                      <a:pPr algn="ctr">
-                        <a:defRPr sz="1300" b="1">
+                        <a:t>HN8TO62EHKXO39R</a:t>
+                      </a:r>
+                    </a:p>
+                  </a:txBody>
+                  <a:tcPr anchor="ctr">
+                    <a:solidFill>
+                      <a:srgbClr val="222236"/>
+                    </a:solidFill>
+                  </a:tcPr>
+                </a:tc>
+                <a:tc>
+                  <a:txBody>
+                    <a:bodyPr/>
+                    <a:lstStyle/>
+                    <a:p>
+                      <a:pPr algn="l">
+                        <a:defRPr sz="900" b="1">
+                          <a:solidFill>
+                            <a:srgbClr val="F39C12"/>
+                          </a:solidFill>
+                        </a:defRPr>
+                      </a:pPr>
+                      <a:r>
+                        <a:t>PARTIAL - 0→O 혼동</a:t>
+                      </a:r>
+                    </a:p>
+                  </a:txBody>
+                  <a:tcPr anchor="ctr">
+                    <a:solidFill>
+                      <a:srgbClr val="222236"/>
+                    </a:solidFill>
+                  </a:tcPr>
+                </a:tc>
+              </a:tr>
+              <a:tr h="558800">
+                <a:tc>
+                  <a:txBody>
+                    <a:bodyPr/>
+                    <a:lstStyle/>
+                    <a:p>
+                      <a:pPr algn="l">
+                        <a:defRPr sz="1100" b="1">
                           <a:solidFill>
                             <a:srgbClr val="FFFFFF"/>
                           </a:solidFill>
                         </a:defRPr>
                       </a:pPr>
                       <a:r>
+                        <a:t>LOT NO.</a:t>
+                      </a:r>
+                    </a:p>
+                  </a:txBody>
+                  <a:tcPr anchor="ctr">
+                    <a:solidFill>
+                      <a:srgbClr val="2A2A3E"/>
+                    </a:solidFill>
+                  </a:tcPr>
+                </a:tc>
+                <a:tc>
+                  <a:txBody>
+                    <a:bodyPr/>
+                    <a:lstStyle/>
+                    <a:p>
+                      <a:pPr algn="l">
+                        <a:defRPr sz="1000" b="0">
+                          <a:solidFill>
+                            <a:srgbClr val="2ECC71"/>
+                          </a:solidFill>
+                        </a:defRPr>
+                      </a:pPr>
+                      <a:r>
+                        <a:t>5QQAM42QC-14X(1/2)</a:t>
+                      </a:r>
+                    </a:p>
+                  </a:txBody>
+                  <a:tcPr anchor="ctr">
+                    <a:solidFill>
+                      <a:srgbClr val="2A2A3E"/>
+                    </a:solidFill>
+                  </a:tcPr>
+                </a:tc>
+                <a:tc>
+                  <a:txBody>
+                    <a:bodyPr/>
+                    <a:lstStyle/>
+                    <a:p>
+                      <a:pPr algn="l">
+                        <a:defRPr sz="1000" b="0">
+                          <a:solidFill>
+                            <a:srgbClr val="FFFFFF"/>
+                          </a:solidFill>
+                        </a:defRPr>
+                      </a:pPr>
+                      <a:r>
+                        <a:t>3SOQAM4zOC 14X( 1 /2</a:t>
+                      </a:r>
+                    </a:p>
+                  </a:txBody>
+                  <a:tcPr anchor="ctr">
+                    <a:solidFill>
+                      <a:srgbClr val="2A2A3E"/>
+                    </a:solidFill>
+                  </a:tcPr>
+                </a:tc>
+                <a:tc>
+                  <a:txBody>
+                    <a:bodyPr/>
+                    <a:lstStyle/>
+                    <a:p>
+                      <a:pPr algn="l">
+                        <a:defRPr sz="900" b="1">
+                          <a:solidFill>
+                            <a:srgbClr val="E74C3C"/>
+                          </a:solidFill>
+                        </a:defRPr>
+                      </a:pPr>
+                      <a:r>
+                        <a:t>FAIL - 5QQAM42QC→3SOQAM4zOC</a:t>
+                      </a:r>
+                    </a:p>
+                  </a:txBody>
+                  <a:tcPr anchor="ctr">
+                    <a:solidFill>
+                      <a:srgbClr val="2A2A3E"/>
+                    </a:solidFill>
+                  </a:tcPr>
+                </a:tc>
+              </a:tr>
+              <a:tr h="558800">
+                <a:tc>
+                  <a:txBody>
+                    <a:bodyPr/>
+                    <a:lstStyle/>
+                    <a:p>
+                      <a:pPr algn="l">
+                        <a:defRPr sz="1100" b="1">
+                          <a:solidFill>
+                            <a:srgbClr val="FFFFFF"/>
+                          </a:solidFill>
+                        </a:defRPr>
+                      </a:pPr>
+                      <a:r>
                         <a:t>ITEM</a:t>
                       </a:r>
                     </a:p>
                   </a:txBody>
                   <a:tcPr anchor="ctr">
                     <a:solidFill>
-                      <a:srgbClr val="005299"/>
+                      <a:srgbClr val="222236"/>
+                    </a:solidFill>
+                  </a:tcPr>
+                </a:tc>
+                <a:tc>
+                  <a:txBody>
+                    <a:bodyPr/>
+                    <a:lstStyle/>
+                    <a:p>
+                      <a:pPr algn="l">
+                        <a:defRPr sz="1000" b="0">
+                          <a:solidFill>
+                            <a:srgbClr val="2ECC71"/>
+                          </a:solidFill>
+                        </a:defRPr>
+                      </a:pPr>
+                      <a:r>
+                        <a:t>402880-04W(A3-3AA00AAAU1TKJX -5AXCCXX-GAYI)-A002</a:t>
+                      </a:r>
+                    </a:p>
+                  </a:txBody>
+                  <a:tcPr anchor="ctr">
+                    <a:solidFill>
+                      <a:srgbClr val="222236"/>
+                    </a:solidFill>
+                  </a:tcPr>
+                </a:tc>
+                <a:tc>
+                  <a:txBody>
+                    <a:bodyPr/>
+                    <a:lstStyle/>
+                    <a:p>
+                      <a:pPr algn="l">
+                        <a:defRPr sz="1000" b="0">
+                          <a:solidFill>
+                            <a:srgbClr val="FFFFFF"/>
+                          </a:solidFill>
+                        </a:defRPr>
+                      </a:pPr>
+                      <a:r>
+                        <a:t>402880- 04VA3_3AAOQAAAUITKJX _ 6AXCCXX _ GAYI)-AO02</a:t>
+                      </a:r>
+                    </a:p>
+                  </a:txBody>
+                  <a:tcPr anchor="ctr">
+                    <a:solidFill>
+                      <a:srgbClr val="222236"/>
+                    </a:solidFill>
+                  </a:tcPr>
+                </a:tc>
+                <a:tc>
+                  <a:txBody>
+                    <a:bodyPr/>
+                    <a:lstStyle/>
+                    <a:p>
+                      <a:pPr algn="l">
+                        <a:defRPr sz="900" b="1">
+                          <a:solidFill>
+                            <a:srgbClr val="E74C3C"/>
+                          </a:solidFill>
+                        </a:defRPr>
+                      </a:pPr>
+                      <a:r>
+                        <a:t>FAIL - 04W→04V, 3AA00→3AAOQ</a:t>
+                      </a:r>
+                    </a:p>
+                  </a:txBody>
+                  <a:tcPr anchor="ctr">
+                    <a:solidFill>
+                      <a:srgbClr val="222236"/>
                     </a:solidFill>
                   </a:tcPr>
                 </a:tc>
               </a:tr>
-              <a:tr h="457200">
-                <a:tc>
-                  <a:txBody>
-                    <a:bodyPr/>
-                    <a:lstStyle/>
-                    <a:p>
-                      <a:pPr algn="ctr">
-                        <a:defRPr sz="1200" b="0">
+              <a:tr h="558800">
+                <a:tc>
+                  <a:txBody>
+                    <a:bodyPr/>
+                    <a:lstStyle/>
+                    <a:p>
+                      <a:pPr algn="l">
+                        <a:defRPr sz="1100" b="1">
                           <a:solidFill>
                             <a:srgbClr val="FFFFFF"/>
                           </a:solidFill>
                         </a:defRPr>
                       </a:pPr>
                       <a:r>
-                        <a:t>Quarter (as-is)</a:t>
+                        <a:t>Q'TY</a:t>
                       </a:r>
                     </a:p>
                   </a:txBody>
@@ -5655,15 +6215,38 @@
                     <a:bodyPr/>
                     <a:lstStyle/>
                     <a:p>
-                      <a:pPr algn="ctr">
-                        <a:defRPr sz="1200" b="0">
+                      <a:pPr algn="l">
+                        <a:defRPr sz="1000" b="0">
+                          <a:solidFill>
+                            <a:srgbClr val="2ECC71"/>
+                          </a:solidFill>
+                        </a:defRPr>
+                      </a:pPr>
+                      <a:r>
+                        <a:t>2000 EA</a:t>
+                      </a:r>
+                    </a:p>
+                  </a:txBody>
+                  <a:tcPr anchor="ctr">
+                    <a:solidFill>
+                      <a:srgbClr val="2A2A3E"/>
+                    </a:solidFill>
+                  </a:tcPr>
+                </a:tc>
+                <a:tc>
+                  <a:txBody>
+                    <a:bodyPr/>
+                    <a:lstStyle/>
+                    <a:p>
+                      <a:pPr algn="l">
+                        <a:defRPr sz="1000" b="0">
                           <a:solidFill>
                             <a:srgbClr val="FFFFFF"/>
                           </a:solidFill>
                         </a:defRPr>
                       </a:pPr>
                       <a:r>
-                        <a:t>2.192</a:t>
+                        <a:t>?000 EA</a:t>
                       </a:r>
                     </a:p>
                   </a:txBody>
@@ -5678,15 +6261,134 @@
                     <a:bodyPr/>
                     <a:lstStyle/>
                     <a:p>
-                      <a:pPr algn="ctr">
-                        <a:defRPr sz="1200" b="0">
+                      <a:pPr algn="l">
+                        <a:defRPr sz="900" b="1">
+                          <a:solidFill>
+                            <a:srgbClr val="E74C3C"/>
+                          </a:solidFill>
+                        </a:defRPr>
+                      </a:pPr>
+                      <a:r>
+                        <a:t>FAIL - 2000→?000</a:t>
+                      </a:r>
+                    </a:p>
+                  </a:txBody>
+                  <a:tcPr anchor="ctr">
+                    <a:solidFill>
+                      <a:srgbClr val="2A2A3E"/>
+                    </a:solidFill>
+                  </a:tcPr>
+                </a:tc>
+              </a:tr>
+              <a:tr h="558800">
+                <a:tc>
+                  <a:txBody>
+                    <a:bodyPr/>
+                    <a:lstStyle/>
+                    <a:p>
+                      <a:pPr algn="l">
+                        <a:defRPr sz="1100" b="1">
                           <a:solidFill>
                             <a:srgbClr val="FFFFFF"/>
                           </a:solidFill>
                         </a:defRPr>
                       </a:pPr>
                       <a:r>
-                        <a:t>75.0%</a:t>
+                        <a:t>DATE CODE</a:t>
+                      </a:r>
+                    </a:p>
+                  </a:txBody>
+                  <a:tcPr anchor="ctr">
+                    <a:solidFill>
+                      <a:srgbClr val="222236"/>
+                    </a:solidFill>
+                  </a:tcPr>
+                </a:tc>
+                <a:tc>
+                  <a:txBody>
+                    <a:bodyPr/>
+                    <a:lstStyle/>
+                    <a:p>
+                      <a:pPr algn="l">
+                        <a:defRPr sz="1000" b="0">
+                          <a:solidFill>
+                            <a:srgbClr val="2ECC71"/>
+                          </a:solidFill>
+                        </a:defRPr>
+                      </a:pPr>
+                      <a:r>
+                        <a:t>251A</a:t>
+                      </a:r>
+                    </a:p>
+                  </a:txBody>
+                  <a:tcPr anchor="ctr">
+                    <a:solidFill>
+                      <a:srgbClr val="222236"/>
+                    </a:solidFill>
+                  </a:tcPr>
+                </a:tc>
+                <a:tc>
+                  <a:txBody>
+                    <a:bodyPr/>
+                    <a:lstStyle/>
+                    <a:p>
+                      <a:pPr algn="l">
+                        <a:defRPr sz="1000" b="0">
+                          <a:solidFill>
+                            <a:srgbClr val="FFFFFF"/>
+                          </a:solidFill>
+                        </a:defRPr>
+                      </a:pPr>
+                      <a:r>
+                        <a:t>251A</a:t>
+                      </a:r>
+                    </a:p>
+                  </a:txBody>
+                  <a:tcPr anchor="ctr">
+                    <a:solidFill>
+                      <a:srgbClr val="222236"/>
+                    </a:solidFill>
+                  </a:tcPr>
+                </a:tc>
+                <a:tc>
+                  <a:txBody>
+                    <a:bodyPr/>
+                    <a:lstStyle/>
+                    <a:p>
+                      <a:pPr algn="l">
+                        <a:defRPr sz="900" b="1">
+                          <a:solidFill>
+                            <a:srgbClr val="2ECC71"/>
+                          </a:solidFill>
+                        </a:defRPr>
+                      </a:pPr>
+                      <a:r>
+                        <a:t>MATCH</a:t>
+                      </a:r>
+                    </a:p>
+                  </a:txBody>
+                  <a:tcPr anchor="ctr">
+                    <a:solidFill>
+                      <a:srgbClr val="222236"/>
+                    </a:solidFill>
+                  </a:tcPr>
+                </a:tc>
+              </a:tr>
+              <a:tr h="558800">
+                <a:tc>
+                  <a:txBody>
+                    <a:bodyPr/>
+                    <a:lstStyle/>
+                    <a:p>
+                      <a:pPr algn="l">
+                        <a:defRPr sz="1100" b="1">
+                          <a:solidFill>
+                            <a:srgbClr val="FFFFFF"/>
+                          </a:solidFill>
+                        </a:defRPr>
+                      </a:pPr>
+                      <a:r>
+                        <a:t>PACK DATE</a:t>
                       </a:r>
                     </a:p>
                   </a:txBody>
@@ -5701,15 +6403,15 @@
                     <a:bodyPr/>
                     <a:lstStyle/>
                     <a:p>
-                      <a:pPr algn="ctr">
-                        <a:defRPr sz="1200" b="0">
+                      <a:pPr algn="l">
+                        <a:defRPr sz="1000" b="0">
                           <a:solidFill>
                             <a:srgbClr val="2ECC71"/>
                           </a:solidFill>
                         </a:defRPr>
                       </a:pPr>
                       <a:r>
-                        <a:t>FOUND</a:t>
+                        <a:t>2022/12/22</a:t>
                       </a:r>
                     </a:p>
                   </a:txBody>
@@ -5724,464 +6426,138 @@
                     <a:bodyPr/>
                     <a:lstStyle/>
                     <a:p>
-                      <a:pPr algn="ctr">
-                        <a:defRPr sz="1200" b="0">
+                      <a:pPr algn="l">
+                        <a:defRPr sz="1000" b="0">
+                          <a:solidFill>
+                            <a:srgbClr val="FFFFFF"/>
+                          </a:solidFill>
+                        </a:defRPr>
+                      </a:pPr>
+                      <a:r>
+                        <a:t>2022/12/22</a:t>
+                      </a:r>
+                    </a:p>
+                  </a:txBody>
+                  <a:tcPr anchor="ctr">
+                    <a:solidFill>
+                      <a:srgbClr val="2A2A3E"/>
+                    </a:solidFill>
+                  </a:tcPr>
+                </a:tc>
+                <a:tc>
+                  <a:txBody>
+                    <a:bodyPr/>
+                    <a:lstStyle/>
+                    <a:p>
+                      <a:pPr algn="l">
+                        <a:defRPr sz="900" b="1">
+                          <a:solidFill>
+                            <a:srgbClr val="2ECC71"/>
+                          </a:solidFill>
+                        </a:defRPr>
+                      </a:pPr>
+                      <a:r>
+                        <a:t>MATCH</a:t>
+                      </a:r>
+                    </a:p>
+                  </a:txBody>
+                  <a:tcPr anchor="ctr">
+                    <a:solidFill>
+                      <a:srgbClr val="2A2A3E"/>
+                    </a:solidFill>
+                  </a:tcPr>
+                </a:tc>
+              </a:tr>
+              <a:tr h="558800">
+                <a:tc>
+                  <a:txBody>
+                    <a:bodyPr/>
+                    <a:lstStyle/>
+                    <a:p>
+                      <a:pPr algn="l">
+                        <a:defRPr sz="1100" b="1">
+                          <a:solidFill>
+                            <a:srgbClr val="FFFFFF"/>
+                          </a:solidFill>
+                        </a:defRPr>
+                      </a:pPr>
+                      <a:r>
+                        <a:t>ASSEMBLED</a:t>
+                      </a:r>
+                    </a:p>
+                  </a:txBody>
+                  <a:tcPr anchor="ctr">
+                    <a:solidFill>
+                      <a:srgbClr val="222236"/>
+                    </a:solidFill>
+                  </a:tcPr>
+                </a:tc>
+                <a:tc>
+                  <a:txBody>
+                    <a:bodyPr/>
+                    <a:lstStyle/>
+                    <a:p>
+                      <a:pPr algn="l">
+                        <a:defRPr sz="1000" b="0">
+                          <a:solidFill>
+                            <a:srgbClr val="2ECC71"/>
+                          </a:solidFill>
+                        </a:defRPr>
+                      </a:pPr>
+                      <a:r>
+                        <a:t>ASSEMBLED IN KOREA FROM WAFER FABRICATED IN KOREA</a:t>
+                      </a:r>
+                    </a:p>
+                  </a:txBody>
+                  <a:tcPr anchor="ctr">
+                    <a:solidFill>
+                      <a:srgbClr val="222236"/>
+                    </a:solidFill>
+                  </a:tcPr>
+                </a:tc>
+                <a:tc>
+                  <a:txBody>
+                    <a:bodyPr/>
+                    <a:lstStyle/>
+                    <a:p>
+                      <a:pPr algn="l">
+                        <a:defRPr sz="1000" b="0">
+                          <a:solidFill>
+                            <a:srgbClr val="FFFFFF"/>
+                          </a:solidFill>
+                        </a:defRPr>
+                      </a:pPr>
+                      <a:r>
+                        <a:t>ASSEMBLED IN KOREA FROM WAFER FABRICA TED IN KOREA</a:t>
+                      </a:r>
+                    </a:p>
+                  </a:txBody>
+                  <a:tcPr anchor="ctr">
+                    <a:solidFill>
+                      <a:srgbClr val="222236"/>
+                    </a:solidFill>
+                  </a:tcPr>
+                </a:tc>
+                <a:tc>
+                  <a:txBody>
+                    <a:bodyPr/>
+                    <a:lstStyle/>
+                    <a:p>
+                      <a:pPr algn="l">
+                        <a:defRPr sz="900" b="1">
                           <a:solidFill>
                             <a:srgbClr val="F39C12"/>
                           </a:solidFill>
                         </a:defRPr>
                       </a:pPr>
                       <a:r>
-                        <a:t>PARTIAL (94%)</a:t>
-                      </a:r>
-                    </a:p>
-                  </a:txBody>
-                  <a:tcPr anchor="ctr">
-                    <a:solidFill>
-                      <a:srgbClr val="2A2A3E"/>
-                    </a:solidFill>
-                  </a:tcPr>
-                </a:tc>
-                <a:tc>
-                  <a:txBody>
-                    <a:bodyPr/>
-                    <a:lstStyle/>
-                    <a:p>
-                      <a:pPr algn="ctr">
-                        <a:defRPr sz="1200" b="0">
-                          <a:solidFill>
-                            <a:srgbClr val="F39C12"/>
-                          </a:solidFill>
-                        </a:defRPr>
-                      </a:pPr>
-                      <a:r>
-                        <a:t>PARTIAL (85%)</a:t>
-                      </a:r>
-                    </a:p>
-                  </a:txBody>
-                  <a:tcPr anchor="ctr">
-                    <a:solidFill>
-                      <a:srgbClr val="2A2A3E"/>
-                    </a:solidFill>
-                  </a:tcPr>
-                </a:tc>
-              </a:tr>
-              <a:tr h="457200">
-                <a:tc>
-                  <a:txBody>
-                    <a:bodyPr/>
-                    <a:lstStyle/>
-                    <a:p>
-                      <a:pPr algn="ctr">
-                        <a:defRPr sz="1200" b="0">
-                          <a:solidFill>
-                            <a:srgbClr val="FFFFFF"/>
-                          </a:solidFill>
-                        </a:defRPr>
-                      </a:pPr>
-                      <a:r>
-                        <a:t>Upscale 2x</a:t>
+                        <a:t>PARTIAL - FABRICATED→FABRICA TED</a:t>
                       </a:r>
                     </a:p>
                   </a:txBody>
                   <a:tcPr anchor="ctr">
                     <a:solidFill>
                       <a:srgbClr val="222236"/>
-                    </a:solidFill>
-                  </a:tcPr>
-                </a:tc>
-                <a:tc>
-                  <a:txBody>
-                    <a:bodyPr/>
-                    <a:lstStyle/>
-                    <a:p>
-                      <a:pPr algn="ctr">
-                        <a:defRPr sz="1200" b="0">
-                          <a:solidFill>
-                            <a:srgbClr val="FFFFFF"/>
-                          </a:solidFill>
-                        </a:defRPr>
-                      </a:pPr>
-                      <a:r>
-                        <a:t>2.603</a:t>
-                      </a:r>
-                    </a:p>
-                  </a:txBody>
-                  <a:tcPr anchor="ctr">
-                    <a:solidFill>
-                      <a:srgbClr val="222236"/>
-                    </a:solidFill>
-                  </a:tcPr>
-                </a:tc>
-                <a:tc>
-                  <a:txBody>
-                    <a:bodyPr/>
-                    <a:lstStyle/>
-                    <a:p>
-                      <a:pPr algn="ctr">
-                        <a:defRPr sz="1200" b="0">
-                          <a:solidFill>
-                            <a:srgbClr val="FFFFFF"/>
-                          </a:solidFill>
-                        </a:defRPr>
-                      </a:pPr>
-                      <a:r>
-                        <a:t>68.8%</a:t>
-                      </a:r>
-                    </a:p>
-                  </a:txBody>
-                  <a:tcPr anchor="ctr">
-                    <a:solidFill>
-                      <a:srgbClr val="222236"/>
-                    </a:solidFill>
-                  </a:tcPr>
-                </a:tc>
-                <a:tc>
-                  <a:txBody>
-                    <a:bodyPr/>
-                    <a:lstStyle/>
-                    <a:p>
-                      <a:pPr algn="ctr">
-                        <a:defRPr sz="1200" b="0">
-                          <a:solidFill>
-                            <a:srgbClr val="2ECC71"/>
-                          </a:solidFill>
-                        </a:defRPr>
-                      </a:pPr>
-                      <a:r>
-                        <a:t>FOUND</a:t>
-                      </a:r>
-                    </a:p>
-                  </a:txBody>
-                  <a:tcPr anchor="ctr">
-                    <a:solidFill>
-                      <a:srgbClr val="222236"/>
-                    </a:solidFill>
-                  </a:tcPr>
-                </a:tc>
-                <a:tc>
-                  <a:txBody>
-                    <a:bodyPr/>
-                    <a:lstStyle/>
-                    <a:p>
-                      <a:pPr algn="ctr">
-                        <a:defRPr sz="1200" b="0">
-                          <a:solidFill>
-                            <a:srgbClr val="F39C12"/>
-                          </a:solidFill>
-                        </a:defRPr>
-                      </a:pPr>
-                      <a:r>
-                        <a:t>PARTIAL (94%)</a:t>
-                      </a:r>
-                    </a:p>
-                  </a:txBody>
-                  <a:tcPr anchor="ctr">
-                    <a:solidFill>
-                      <a:srgbClr val="222236"/>
-                    </a:solidFill>
-                  </a:tcPr>
-                </a:tc>
-                <a:tc>
-                  <a:txBody>
-                    <a:bodyPr/>
-                    <a:lstStyle/>
-                    <a:p>
-                      <a:pPr algn="ctr">
-                        <a:defRPr sz="1200" b="0">
-                          <a:solidFill>
-                            <a:srgbClr val="E74C3C"/>
-                          </a:solidFill>
-                        </a:defRPr>
-                      </a:pPr>
-                      <a:r>
-                        <a:t>MISSED</a:t>
-                      </a:r>
-                    </a:p>
-                  </a:txBody>
-                  <a:tcPr anchor="ctr">
-                    <a:solidFill>
-                      <a:srgbClr val="222236"/>
-                    </a:solidFill>
-                  </a:tcPr>
-                </a:tc>
-              </a:tr>
-              <a:tr h="457200">
-                <a:tc>
-                  <a:txBody>
-                    <a:bodyPr/>
-                    <a:lstStyle/>
-                    <a:p>
-                      <a:pPr algn="ctr">
-                        <a:defRPr sz="1200" b="0">
-                          <a:solidFill>
-                            <a:srgbClr val="FFFFFF"/>
-                          </a:solidFill>
-                        </a:defRPr>
-                      </a:pPr>
-                      <a:r>
-                        <a:t>CLAHE Enhanced</a:t>
-                      </a:r>
-                    </a:p>
-                  </a:txBody>
-                  <a:tcPr anchor="ctr">
-                    <a:solidFill>
-                      <a:srgbClr val="2A2A3E"/>
-                    </a:solidFill>
-                  </a:tcPr>
-                </a:tc>
-                <a:tc>
-                  <a:txBody>
-                    <a:bodyPr/>
-                    <a:lstStyle/>
-                    <a:p>
-                      <a:pPr algn="ctr">
-                        <a:defRPr sz="1200" b="0">
-                          <a:solidFill>
-                            <a:srgbClr val="FFFFFF"/>
-                          </a:solidFill>
-                        </a:defRPr>
-                      </a:pPr>
-                      <a:r>
-                        <a:t>2.184</a:t>
-                      </a:r>
-                    </a:p>
-                  </a:txBody>
-                  <a:tcPr anchor="ctr">
-                    <a:solidFill>
-                      <a:srgbClr val="2A2A3E"/>
-                    </a:solidFill>
-                  </a:tcPr>
-                </a:tc>
-                <a:tc>
-                  <a:txBody>
-                    <a:bodyPr/>
-                    <a:lstStyle/>
-                    <a:p>
-                      <a:pPr algn="ctr">
-                        <a:defRPr sz="1200" b="0">
-                          <a:solidFill>
-                            <a:srgbClr val="FFFFFF"/>
-                          </a:solidFill>
-                        </a:defRPr>
-                      </a:pPr>
-                      <a:r>
-                        <a:t>68.8%</a:t>
-                      </a:r>
-                    </a:p>
-                  </a:txBody>
-                  <a:tcPr anchor="ctr">
-                    <a:solidFill>
-                      <a:srgbClr val="2A2A3E"/>
-                    </a:solidFill>
-                  </a:tcPr>
-                </a:tc>
-                <a:tc>
-                  <a:txBody>
-                    <a:bodyPr/>
-                    <a:lstStyle/>
-                    <a:p>
-                      <a:pPr algn="ctr">
-                        <a:defRPr sz="1200" b="0">
-                          <a:solidFill>
-                            <a:srgbClr val="2ECC71"/>
-                          </a:solidFill>
-                        </a:defRPr>
-                      </a:pPr>
-                      <a:r>
-                        <a:t>FOUND</a:t>
-                      </a:r>
-                    </a:p>
-                  </a:txBody>
-                  <a:tcPr anchor="ctr">
-                    <a:solidFill>
-                      <a:srgbClr val="2A2A3E"/>
-                    </a:solidFill>
-                  </a:tcPr>
-                </a:tc>
-                <a:tc>
-                  <a:txBody>
-                    <a:bodyPr/>
-                    <a:lstStyle/>
-                    <a:p>
-                      <a:pPr algn="ctr">
-                        <a:defRPr sz="1200" b="0">
-                          <a:solidFill>
-                            <a:srgbClr val="F39C12"/>
-                          </a:solidFill>
-                        </a:defRPr>
-                      </a:pPr>
-                      <a:r>
-                        <a:t>PARTIAL (94%)</a:t>
-                      </a:r>
-                    </a:p>
-                  </a:txBody>
-                  <a:tcPr anchor="ctr">
-                    <a:solidFill>
-                      <a:srgbClr val="2A2A3E"/>
-                    </a:solidFill>
-                  </a:tcPr>
-                </a:tc>
-                <a:tc>
-                  <a:txBody>
-                    <a:bodyPr/>
-                    <a:lstStyle/>
-                    <a:p>
-                      <a:pPr algn="ctr">
-                        <a:defRPr sz="1200" b="0">
-                          <a:solidFill>
-                            <a:srgbClr val="E74C3C"/>
-                          </a:solidFill>
-                        </a:defRPr>
-                      </a:pPr>
-                      <a:r>
-                        <a:t>MISSED</a:t>
-                      </a:r>
-                    </a:p>
-                  </a:txBody>
-                  <a:tcPr anchor="ctr">
-                    <a:solidFill>
-                      <a:srgbClr val="2A2A3E"/>
-                    </a:solidFill>
-                  </a:tcPr>
-                </a:tc>
-              </a:tr>
-              <a:tr h="457200">
-                <a:tc>
-                  <a:txBody>
-                    <a:bodyPr/>
-                    <a:lstStyle/>
-                    <a:p>
-                      <a:pPr algn="ctr">
-                        <a:defRPr sz="1300" b="1">
-                          <a:solidFill>
-                            <a:srgbClr val="FFFFFF"/>
-                          </a:solidFill>
-                        </a:defRPr>
-                      </a:pPr>
-                      <a:r>
-                        <a:t>BEST</a:t>
-                      </a:r>
-                    </a:p>
-                  </a:txBody>
-                  <a:tcPr anchor="ctr">
-                    <a:solidFill>
-                      <a:srgbClr val="2ECC71"/>
-                    </a:solidFill>
-                  </a:tcPr>
-                </a:tc>
-                <a:tc>
-                  <a:txBody>
-                    <a:bodyPr/>
-                    <a:lstStyle/>
-                    <a:p>
-                      <a:pPr algn="ctr">
-                        <a:defRPr sz="1300" b="1">
-                          <a:solidFill>
-                            <a:srgbClr val="E74C3C"/>
-                          </a:solidFill>
-                        </a:defRPr>
-                      </a:pPr>
-                      <a:r>
-                        <a:t>2.184s</a:t>
-                      </a:r>
-                    </a:p>
-                  </a:txBody>
-                  <a:tcPr anchor="ctr">
-                    <a:solidFill>
-                      <a:srgbClr val="3A1A1A"/>
-                    </a:solidFill>
-                  </a:tcPr>
-                </a:tc>
-                <a:tc>
-                  <a:txBody>
-                    <a:bodyPr/>
-                    <a:lstStyle/>
-                    <a:p>
-                      <a:pPr algn="ctr">
-                        <a:defRPr sz="1300" b="1">
-                          <a:solidFill>
-                            <a:srgbClr val="F39C12"/>
-                          </a:solidFill>
-                        </a:defRPr>
-                      </a:pPr>
-                      <a:r>
-                        <a:t>75.0%</a:t>
-                      </a:r>
-                    </a:p>
-                  </a:txBody>
-                  <a:tcPr anchor="ctr">
-                    <a:solidFill>
-                      <a:srgbClr val="2A2A1A"/>
-                    </a:solidFill>
-                  </a:tcPr>
-                </a:tc>
-                <a:tc>
-                  <a:txBody>
-                    <a:bodyPr/>
-                    <a:lstStyle/>
-                    <a:p>
-                      <a:pPr algn="ctr">
-                        <a:defRPr sz="1200" b="0">
-                          <a:solidFill>
-                            <a:srgbClr val="F39C12"/>
-                          </a:solidFill>
-                        </a:defRPr>
-                      </a:pPr>
-                      <a:r>
-                        <a:t>6/8 fields</a:t>
-                      </a:r>
-                    </a:p>
-                  </a:txBody>
-                  <a:tcPr anchor="ctr">
-                    <a:solidFill>
-                      <a:srgbClr val="2A2A1A"/>
-                    </a:solidFill>
-                  </a:tcPr>
-                </a:tc>
-                <a:tc>
-                  <a:txBody>
-                    <a:bodyPr/>
-                    <a:lstStyle/>
-                    <a:p>
-                      <a:pPr algn="ctr">
-                        <a:defRPr sz="1200" b="0">
-                          <a:solidFill>
-                            <a:srgbClr val="F39C12"/>
-                          </a:solidFill>
-                        </a:defRPr>
-                      </a:pPr>
-                      <a:r>
-                        <a:t>6/8 fields</a:t>
-                      </a:r>
-                    </a:p>
-                  </a:txBody>
-                  <a:tcPr anchor="ctr">
-                    <a:solidFill>
-                      <a:srgbClr val="2A2A1A"/>
-                    </a:solidFill>
-                  </a:tcPr>
-                </a:tc>
-                <a:tc>
-                  <a:txBody>
-                    <a:bodyPr/>
-                    <a:lstStyle/>
-                    <a:p>
-                      <a:pPr algn="ctr">
-                        <a:defRPr sz="1200" b="0">
-                          <a:solidFill>
-                            <a:srgbClr val="F39C12"/>
-                          </a:solidFill>
-                        </a:defRPr>
-                      </a:pPr>
-                      <a:r>
-                        <a:t>6/8 fields</a:t>
-                      </a:r>
-                    </a:p>
-                  </a:txBody>
-                  <a:tcPr anchor="ctr">
-                    <a:solidFill>
-                      <a:srgbClr val="2A2A1A"/>
                     </a:solidFill>
                   </a:tcPr>
                 </a:tc>
@@ -6198,8 +6574,8 @@
         </p:nvSpPr>
         <p:spPr>
           <a:xfrm>
-            <a:off x="457200" y="5852160"/>
-            <a:ext cx="10972800" cy="914400"/>
+            <a:off x="457200" y="6309360"/>
+            <a:ext cx="10972800" cy="457200"/>
           </a:xfrm>
           <a:prstGeom prst="rect">
             <a:avLst/>
@@ -6213,14 +6589,14 @@
           <a:lstStyle/>
           <a:p>
             <a:pPr algn="l">
-              <a:defRPr sz="1400" b="1">
+              <a:defRPr sz="1300" b="1">
                 <a:solidFill>
                   <a:srgbClr val="F39C12"/>
                 </a:solidFill>
               </a:defRPr>
             </a:pPr>
             <a:r>
-              <a:t>Verdict: BEST for complex codes (LOT NO 94%, ITEM 85%) but CPU-only inference is 2x over budget.</a:t>
+              <a:t>CLAHE 전처리도 효과 없음. LOT NO에 '3S' 잡음 추가됨. 전처리는 이 이미지에 부적합.</a:t>
             </a:r>
           </a:p>
         </p:txBody>
@@ -6259,8 +6635,8 @@
         </p:nvSpPr>
         <p:spPr>
           <a:xfrm>
-            <a:off x="457200" y="274320"/>
-            <a:ext cx="10972800" cy="731520"/>
+            <a:off x="457200" y="182880"/>
+            <a:ext cx="10972800" cy="640080"/>
           </a:xfrm>
           <a:prstGeom prst="rect">
             <a:avLst/>
@@ -6281,7 +6657,7 @@
               </a:defRPr>
             </a:pPr>
             <a:r>
-              <a:t>Comprehensive Comparison</a:t>
+              <a:t>EasyOCR 3가지 변형 종합 비교</a:t>
             </a:r>
           </a:p>
         </p:txBody>
@@ -6295,8 +6671,8 @@
           <p:nvPr/>
         </p:nvGraphicFramePr>
         <p:xfrm>
-          <a:off x="457200" y="1188720"/>
-          <a:ext cx="10972800" cy="3200400"/>
+          <a:off x="274320" y="1005840"/>
+          <a:ext cx="11612880" cy="2743200"/>
         </p:xfrm>
         <a:graphic>
           <a:graphicData uri="http://schemas.openxmlformats.org/drawingml/2006/table">
@@ -6305,30 +6681,32 @@
                 <a:tableStyleId>{5C22544A-7EE6-4342-B048-85BDC9FD1C3A}</a:tableStyleId>
               </a:tblPr>
               <a:tblGrid>
-                <a:gridCol w="1371600"/>
-                <a:gridCol w="1371600"/>
-                <a:gridCol w="1371600"/>
-                <a:gridCol w="1371600"/>
-                <a:gridCol w="1371600"/>
-                <a:gridCol w="1371600"/>
-                <a:gridCol w="1371600"/>
-                <a:gridCol w="1371600"/>
+                <a:gridCol w="1161288"/>
+                <a:gridCol w="1161288"/>
+                <a:gridCol w="1161288"/>
+                <a:gridCol w="1161288"/>
+                <a:gridCol w="1161288"/>
+                <a:gridCol w="1161288"/>
+                <a:gridCol w="1161288"/>
+                <a:gridCol w="1161288"/>
+                <a:gridCol w="1161288"/>
+                <a:gridCol w="1161288"/>
               </a:tblGrid>
-              <a:tr h="640080">
+              <a:tr h="548640">
                 <a:tc>
                   <a:txBody>
                     <a:bodyPr/>
                     <a:lstStyle/>
                     <a:p>
                       <a:pPr algn="ctr">
-                        <a:defRPr sz="1200" b="1">
+                        <a:defRPr sz="1000" b="1">
                           <a:solidFill>
                             <a:srgbClr val="FFFFFF"/>
                           </a:solidFill>
                         </a:defRPr>
                       </a:pPr>
                       <a:r>
-                        <a:t>Method</a:t>
+                        <a:t>변형</a:t>
                       </a:r>
                     </a:p>
                   </a:txBody>
@@ -6344,14 +6722,14 @@
                     <a:lstStyle/>
                     <a:p>
                       <a:pPr algn="ctr">
-                        <a:defRPr sz="1200" b="1">
+                        <a:defRPr sz="1000" b="1">
                           <a:solidFill>
                             <a:srgbClr val="FFFFFF"/>
                           </a:solidFill>
                         </a:defRPr>
                       </a:pPr>
                       <a:r>
-                        <a:t>Engine</a:t>
+                        <a:t>시간</a:t>
                       </a:r>
                     </a:p>
                   </a:txBody>
@@ -6367,14 +6745,14 @@
                     <a:lstStyle/>
                     <a:p>
                       <a:pPr algn="ctr">
-                        <a:defRPr sz="1200" b="1">
+                        <a:defRPr sz="1000" b="1">
                           <a:solidFill>
                             <a:srgbClr val="FFFFFF"/>
                           </a:solidFill>
                         </a:defRPr>
                       </a:pPr>
                       <a:r>
-                        <a:t>Time</a:t>
+                        <a:t>정확도</a:t>
                       </a:r>
                     </a:p>
                   </a:txBody>
@@ -6390,14 +6768,14 @@
                     <a:lstStyle/>
                     <a:p>
                       <a:pPr algn="ctr">
-                        <a:defRPr sz="1200" b="1">
+                        <a:defRPr sz="1000" b="1">
                           <a:solidFill>
                             <a:srgbClr val="FFFFFF"/>
                           </a:solidFill>
                         </a:defRPr>
                       </a:pPr>
                       <a:r>
-                        <a:t>&lt; 1s?</a:t>
+                        <a:t>SUPPLIER</a:t>
                       </a:r>
                     </a:p>
                   </a:txBody>
@@ -6413,14 +6791,14 @@
                     <a:lstStyle/>
                     <a:p>
                       <a:pPr algn="ctr">
-                        <a:defRPr sz="1200" b="1">
+                        <a:defRPr sz="1000" b="1">
                           <a:solidFill>
                             <a:srgbClr val="FFFFFF"/>
                           </a:solidFill>
                         </a:defRPr>
                       </a:pPr>
                       <a:r>
-                        <a:t>Accuracy</a:t>
+                        <a:t>DEVICE</a:t>
                       </a:r>
                     </a:p>
                   </a:txBody>
@@ -6436,14 +6814,14 @@
                     <a:lstStyle/>
                     <a:p>
                       <a:pPr algn="ctr">
-                        <a:defRPr sz="1200" b="1">
+                        <a:defRPr sz="1000" b="1">
                           <a:solidFill>
                             <a:srgbClr val="FFFFFF"/>
                           </a:solidFill>
                         </a:defRPr>
                       </a:pPr>
                       <a:r>
-                        <a:t>DEVICE</a:t>
+                        <a:t>LOT NO</a:t>
                       </a:r>
                     </a:p>
                   </a:txBody>
@@ -6459,14 +6837,14 @@
                     <a:lstStyle/>
                     <a:p>
                       <a:pPr algn="ctr">
-                        <a:defRPr sz="1200" b="1">
+                        <a:defRPr sz="1000" b="1">
                           <a:solidFill>
                             <a:srgbClr val="FFFFFF"/>
                           </a:solidFill>
                         </a:defRPr>
                       </a:pPr>
                       <a:r>
-                        <a:t>LOT NO</a:t>
+                        <a:t>ITEM</a:t>
                       </a:r>
                     </a:p>
                   </a:txBody>
@@ -6482,14 +6860,14 @@
                     <a:lstStyle/>
                     <a:p>
                       <a:pPr algn="ctr">
-                        <a:defRPr sz="1200" b="1">
+                        <a:defRPr sz="1000" b="1">
                           <a:solidFill>
                             <a:srgbClr val="FFFFFF"/>
                           </a:solidFill>
                         </a:defRPr>
                       </a:pPr>
                       <a:r>
-                        <a:t>ITEM</a:t>
+                        <a:t>Q'TY</a:t>
                       </a:r>
                     </a:p>
                   </a:txBody>
@@ -6499,8 +6877,54 @@
                     </a:solidFill>
                   </a:tcPr>
                 </a:tc>
+                <a:tc>
+                  <a:txBody>
+                    <a:bodyPr/>
+                    <a:lstStyle/>
+                    <a:p>
+                      <a:pPr algn="ctr">
+                        <a:defRPr sz="1000" b="1">
+                          <a:solidFill>
+                            <a:srgbClr val="FFFFFF"/>
+                          </a:solidFill>
+                        </a:defRPr>
+                      </a:pPr>
+                      <a:r>
+                        <a:t>DATE/PACK</a:t>
+                      </a:r>
+                    </a:p>
+                  </a:txBody>
+                  <a:tcPr anchor="ctr">
+                    <a:solidFill>
+                      <a:srgbClr val="005299"/>
+                    </a:solidFill>
+                  </a:tcPr>
+                </a:tc>
+                <a:tc>
+                  <a:txBody>
+                    <a:bodyPr/>
+                    <a:lstStyle/>
+                    <a:p>
+                      <a:pPr algn="ctr">
+                        <a:defRPr sz="1000" b="1">
+                          <a:solidFill>
+                            <a:srgbClr val="FFFFFF"/>
+                          </a:solidFill>
+                        </a:defRPr>
+                      </a:pPr>
+                      <a:r>
+                        <a:t>ASSEMBLED</a:t>
+                      </a:r>
+                    </a:p>
+                  </a:txBody>
+                  <a:tcPr anchor="ctr">
+                    <a:solidFill>
+                      <a:srgbClr val="005299"/>
+                    </a:solidFill>
+                  </a:tcPr>
+                </a:tc>
               </a:tr>
-              <a:tr h="640080">
+              <a:tr h="548640">
                 <a:tc>
                   <a:txBody>
                     <a:bodyPr/>
@@ -6514,7 +6938,7 @@
                         </a:defRPr>
                       </a:pPr>
                       <a:r>
-                        <a:t>EasyOCR</a:t>
+                        <a:t>Quarter</a:t>
                       </a:r>
                     </a:p>
                   </a:txBody>
@@ -6537,9 +6961,20 @@
                         </a:defRPr>
                       </a:pPr>
                       <a:r>
-                        <a:t>CRAFT+CRNN</a:t>
-                      </a:r>
-                    </a:p>
+                        <a:t>0.519s</a:t>
+                      </a:r>
+                    </a:p>
+                  </a:txBody>
+                  <a:tcPr anchor="ctr">
+                    <a:solidFill>
+                      <a:srgbClr val="2A2A3E"/>
+                    </a:solidFill>
+                  </a:tcPr>
+                </a:tc>
+                <a:tc>
+                  <a:txBody>
+                    <a:bodyPr/>
+                    <a:lstStyle/>
                     <a:p>
                       <a:pPr algn="ctr">
                         <a:defRPr sz="1100" b="0">
@@ -6549,7 +6984,7 @@
                         </a:defRPr>
                       </a:pPr>
                       <a:r>
-                        <a:t>(GPU)</a:t>
+                        <a:t>62.5%</a:t>
                       </a:r>
                     </a:p>
                   </a:txBody>
@@ -6559,6 +6994,169 @@
                     </a:solidFill>
                   </a:tcPr>
                 </a:tc>
+                <a:tc>
+                  <a:txBody>
+                    <a:bodyPr/>
+                    <a:lstStyle/>
+                    <a:p>
+                      <a:pPr algn="ctr">
+                        <a:defRPr sz="1100" b="1">
+                          <a:solidFill>
+                            <a:srgbClr val="2ECC71"/>
+                          </a:solidFill>
+                        </a:defRPr>
+                      </a:pPr>
+                      <a:r>
+                        <a:t>O</a:t>
+                      </a:r>
+                    </a:p>
+                  </a:txBody>
+                  <a:tcPr anchor="ctr">
+                    <a:solidFill>
+                      <a:srgbClr val="2A2A3E"/>
+                    </a:solidFill>
+                  </a:tcPr>
+                </a:tc>
+                <a:tc>
+                  <a:txBody>
+                    <a:bodyPr/>
+                    <a:lstStyle/>
+                    <a:p>
+                      <a:pPr algn="ctr">
+                        <a:defRPr sz="1100" b="1">
+                          <a:solidFill>
+                            <a:srgbClr val="F39C12"/>
+                          </a:solidFill>
+                        </a:defRPr>
+                      </a:pPr>
+                      <a:r>
+                        <a:t>~</a:t>
+                      </a:r>
+                    </a:p>
+                  </a:txBody>
+                  <a:tcPr anchor="ctr">
+                    <a:solidFill>
+                      <a:srgbClr val="2A2A3E"/>
+                    </a:solidFill>
+                  </a:tcPr>
+                </a:tc>
+                <a:tc>
+                  <a:txBody>
+                    <a:bodyPr/>
+                    <a:lstStyle/>
+                    <a:p>
+                      <a:pPr algn="ctr">
+                        <a:defRPr sz="1100" b="1">
+                          <a:solidFill>
+                            <a:srgbClr val="E74C3C"/>
+                          </a:solidFill>
+                        </a:defRPr>
+                      </a:pPr>
+                      <a:r>
+                        <a:t>X</a:t>
+                      </a:r>
+                    </a:p>
+                  </a:txBody>
+                  <a:tcPr anchor="ctr">
+                    <a:solidFill>
+                      <a:srgbClr val="2A2A3E"/>
+                    </a:solidFill>
+                  </a:tcPr>
+                </a:tc>
+                <a:tc>
+                  <a:txBody>
+                    <a:bodyPr/>
+                    <a:lstStyle/>
+                    <a:p>
+                      <a:pPr algn="ctr">
+                        <a:defRPr sz="1100" b="1">
+                          <a:solidFill>
+                            <a:srgbClr val="E74C3C"/>
+                          </a:solidFill>
+                        </a:defRPr>
+                      </a:pPr>
+                      <a:r>
+                        <a:t>X</a:t>
+                      </a:r>
+                    </a:p>
+                  </a:txBody>
+                  <a:tcPr anchor="ctr">
+                    <a:solidFill>
+                      <a:srgbClr val="2A2A3E"/>
+                    </a:solidFill>
+                  </a:tcPr>
+                </a:tc>
+                <a:tc>
+                  <a:txBody>
+                    <a:bodyPr/>
+                    <a:lstStyle/>
+                    <a:p>
+                      <a:pPr algn="ctr">
+                        <a:defRPr sz="1100" b="1">
+                          <a:solidFill>
+                            <a:srgbClr val="2ECC71"/>
+                          </a:solidFill>
+                        </a:defRPr>
+                      </a:pPr>
+                      <a:r>
+                        <a:t>O</a:t>
+                      </a:r>
+                    </a:p>
+                  </a:txBody>
+                  <a:tcPr anchor="ctr">
+                    <a:solidFill>
+                      <a:srgbClr val="2A2A3E"/>
+                    </a:solidFill>
+                  </a:tcPr>
+                </a:tc>
+                <a:tc>
+                  <a:txBody>
+                    <a:bodyPr/>
+                    <a:lstStyle/>
+                    <a:p>
+                      <a:pPr algn="ctr">
+                        <a:defRPr sz="1100" b="1">
+                          <a:solidFill>
+                            <a:srgbClr val="2ECC71"/>
+                          </a:solidFill>
+                        </a:defRPr>
+                      </a:pPr>
+                      <a:r>
+                        <a:t>O</a:t>
+                      </a:r>
+                    </a:p>
+                  </a:txBody>
+                  <a:tcPr anchor="ctr">
+                    <a:solidFill>
+                      <a:srgbClr val="2A2A3E"/>
+                    </a:solidFill>
+                  </a:tcPr>
+                </a:tc>
+                <a:tc>
+                  <a:txBody>
+                    <a:bodyPr/>
+                    <a:lstStyle/>
+                    <a:p>
+                      <a:pPr algn="ctr">
+                        <a:defRPr sz="1100" b="1">
+                          <a:solidFill>
+                            <a:srgbClr val="F39C12"/>
+                          </a:solidFill>
+                        </a:defRPr>
+                      </a:pPr>
+                      <a:r>
+                        <a:t>~</a:t>
+                      </a:r>
+                    </a:p>
+                  </a:txBody>
+                  <a:tcPr anchor="ctr">
+                    <a:solidFill>
+                      <a:srgbClr val="2A2A3E"/>
+                    </a:solidFill>
+                  </a:tcPr>
+                </a:tc>
+              </a:tr>
+              <a:tr h="548640">
                 <a:tc>
                   <a:txBody>
                     <a:bodyPr/>
@@ -6572,13 +7170,59 @@
                         </a:defRPr>
                       </a:pPr>
                       <a:r>
-                        <a:t>0.563s</a:t>
-                      </a:r>
-                    </a:p>
-                  </a:txBody>
-                  <a:tcPr anchor="ctr">
-                    <a:solidFill>
-                      <a:srgbClr val="2A2A3E"/>
+                        <a:t>Upscale 2x</a:t>
+                      </a:r>
+                    </a:p>
+                  </a:txBody>
+                  <a:tcPr anchor="ctr">
+                    <a:solidFill>
+                      <a:srgbClr val="222236"/>
+                    </a:solidFill>
+                  </a:tcPr>
+                </a:tc>
+                <a:tc>
+                  <a:txBody>
+                    <a:bodyPr/>
+                    <a:lstStyle/>
+                    <a:p>
+                      <a:pPr algn="ctr">
+                        <a:defRPr sz="1100" b="0">
+                          <a:solidFill>
+                            <a:srgbClr val="FFFFFF"/>
+                          </a:solidFill>
+                        </a:defRPr>
+                      </a:pPr>
+                      <a:r>
+                        <a:t>0.733s</a:t>
+                      </a:r>
+                    </a:p>
+                  </a:txBody>
+                  <a:tcPr anchor="ctr">
+                    <a:solidFill>
+                      <a:srgbClr val="222236"/>
+                    </a:solidFill>
+                  </a:tcPr>
+                </a:tc>
+                <a:tc>
+                  <a:txBody>
+                    <a:bodyPr/>
+                    <a:lstStyle/>
+                    <a:p>
+                      <a:pPr algn="ctr">
+                        <a:defRPr sz="1100" b="0">
+                          <a:solidFill>
+                            <a:srgbClr val="FFFFFF"/>
+                          </a:solidFill>
+                        </a:defRPr>
+                      </a:pPr>
+                      <a:r>
+                        <a:t>56.2%</a:t>
+                      </a:r>
+                    </a:p>
+                  </a:txBody>
+                  <a:tcPr anchor="ctr">
+                    <a:solidFill>
+                      <a:srgbClr val="222236"/>
                     </a:solidFill>
                   </a:tcPr>
                 </a:tc>
@@ -6595,16 +7239,156 @@
                         </a:defRPr>
                       </a:pPr>
                       <a:r>
-                        <a:t>YES</a:t>
-                      </a:r>
-                    </a:p>
-                  </a:txBody>
-                  <a:tcPr anchor="ctr">
-                    <a:solidFill>
-                      <a:srgbClr val="2A2A3E"/>
-                    </a:solidFill>
-                  </a:tcPr>
-                </a:tc>
+                        <a:t>O</a:t>
+                      </a:r>
+                    </a:p>
+                  </a:txBody>
+                  <a:tcPr anchor="ctr">
+                    <a:solidFill>
+                      <a:srgbClr val="222236"/>
+                    </a:solidFill>
+                  </a:tcPr>
+                </a:tc>
+                <a:tc>
+                  <a:txBody>
+                    <a:bodyPr/>
+                    <a:lstStyle/>
+                    <a:p>
+                      <a:pPr algn="ctr">
+                        <a:defRPr sz="1100" b="1">
+                          <a:solidFill>
+                            <a:srgbClr val="F39C12"/>
+                          </a:solidFill>
+                        </a:defRPr>
+                      </a:pPr>
+                      <a:r>
+                        <a:t>~</a:t>
+                      </a:r>
+                    </a:p>
+                  </a:txBody>
+                  <a:tcPr anchor="ctr">
+                    <a:solidFill>
+                      <a:srgbClr val="222236"/>
+                    </a:solidFill>
+                  </a:tcPr>
+                </a:tc>
+                <a:tc>
+                  <a:txBody>
+                    <a:bodyPr/>
+                    <a:lstStyle/>
+                    <a:p>
+                      <a:pPr algn="ctr">
+                        <a:defRPr sz="1100" b="1">
+                          <a:solidFill>
+                            <a:srgbClr val="E74C3C"/>
+                          </a:solidFill>
+                        </a:defRPr>
+                      </a:pPr>
+                      <a:r>
+                        <a:t>X</a:t>
+                      </a:r>
+                    </a:p>
+                  </a:txBody>
+                  <a:tcPr anchor="ctr">
+                    <a:solidFill>
+                      <a:srgbClr val="222236"/>
+                    </a:solidFill>
+                  </a:tcPr>
+                </a:tc>
+                <a:tc>
+                  <a:txBody>
+                    <a:bodyPr/>
+                    <a:lstStyle/>
+                    <a:p>
+                      <a:pPr algn="ctr">
+                        <a:defRPr sz="1100" b="1">
+                          <a:solidFill>
+                            <a:srgbClr val="E74C3C"/>
+                          </a:solidFill>
+                        </a:defRPr>
+                      </a:pPr>
+                      <a:r>
+                        <a:t>X</a:t>
+                      </a:r>
+                    </a:p>
+                  </a:txBody>
+                  <a:tcPr anchor="ctr">
+                    <a:solidFill>
+                      <a:srgbClr val="222236"/>
+                    </a:solidFill>
+                  </a:tcPr>
+                </a:tc>
+                <a:tc>
+                  <a:txBody>
+                    <a:bodyPr/>
+                    <a:lstStyle/>
+                    <a:p>
+                      <a:pPr algn="ctr">
+                        <a:defRPr sz="1100" b="1">
+                          <a:solidFill>
+                            <a:srgbClr val="E74C3C"/>
+                          </a:solidFill>
+                        </a:defRPr>
+                      </a:pPr>
+                      <a:r>
+                        <a:t>X</a:t>
+                      </a:r>
+                    </a:p>
+                  </a:txBody>
+                  <a:tcPr anchor="ctr">
+                    <a:solidFill>
+                      <a:srgbClr val="222236"/>
+                    </a:solidFill>
+                  </a:tcPr>
+                </a:tc>
+                <a:tc>
+                  <a:txBody>
+                    <a:bodyPr/>
+                    <a:lstStyle/>
+                    <a:p>
+                      <a:pPr algn="ctr">
+                        <a:defRPr sz="1100" b="1">
+                          <a:solidFill>
+                            <a:srgbClr val="2ECC71"/>
+                          </a:solidFill>
+                        </a:defRPr>
+                      </a:pPr>
+                      <a:r>
+                        <a:t>O</a:t>
+                      </a:r>
+                    </a:p>
+                  </a:txBody>
+                  <a:tcPr anchor="ctr">
+                    <a:solidFill>
+                      <a:srgbClr val="222236"/>
+                    </a:solidFill>
+                  </a:tcPr>
+                </a:tc>
+                <a:tc>
+                  <a:txBody>
+                    <a:bodyPr/>
+                    <a:lstStyle/>
+                    <a:p>
+                      <a:pPr algn="ctr">
+                        <a:defRPr sz="1100" b="1">
+                          <a:solidFill>
+                            <a:srgbClr val="F39C12"/>
+                          </a:solidFill>
+                        </a:defRPr>
+                      </a:pPr>
+                      <a:r>
+                        <a:t>~</a:t>
+                      </a:r>
+                    </a:p>
+                  </a:txBody>
+                  <a:tcPr anchor="ctr">
+                    <a:solidFill>
+                      <a:srgbClr val="222236"/>
+                    </a:solidFill>
+                  </a:tcPr>
+                </a:tc>
+              </a:tr>
+              <a:tr h="548640">
                 <a:tc>
                   <a:txBody>
                     <a:bodyPr/>
@@ -6618,7 +7402,7 @@
                         </a:defRPr>
                       </a:pPr>
                       <a:r>
-                        <a:t>62.5%</a:t>
+                        <a:t>CLAHE</a:t>
                       </a:r>
                     </a:p>
                   </a:txBody>
@@ -6636,12 +7420,12 @@
                       <a:pPr algn="ctr">
                         <a:defRPr sz="1100" b="0">
                           <a:solidFill>
-                            <a:srgbClr val="2ECC71"/>
-                          </a:solidFill>
-                        </a:defRPr>
-                      </a:pPr>
-                      <a:r>
-                        <a:t>87%</a:t>
+                            <a:srgbClr val="FFFFFF"/>
+                          </a:solidFill>
+                        </a:defRPr>
+                      </a:pPr>
+                      <a:r>
+                        <a:t>0.712s</a:t>
                       </a:r>
                     </a:p>
                   </a:txBody>
@@ -6659,124 +7443,18 @@
                       <a:pPr algn="ctr">
                         <a:defRPr sz="1100" b="0">
                           <a:solidFill>
-                            <a:srgbClr val="E74C3C"/>
-                          </a:solidFill>
-                        </a:defRPr>
-                      </a:pPr>
-                      <a:r>
-                        <a:t>39%</a:t>
+                            <a:srgbClr val="FFFFFF"/>
+                          </a:solidFill>
+                        </a:defRPr>
+                      </a:pPr>
+                      <a:r>
+                        <a:t>56.2%</a:t>
                       </a:r>
                     </a:p>
                   </a:txBody>
                   <a:tcPr anchor="ctr">
                     <a:solidFill>
                       <a:srgbClr val="2A2A3E"/>
-                    </a:solidFill>
-                  </a:tcPr>
-                </a:tc>
-                <a:tc>
-                  <a:txBody>
-                    <a:bodyPr/>
-                    <a:lstStyle/>
-                    <a:p>
-                      <a:pPr algn="ctr">
-                        <a:defRPr sz="1100" b="0">
-                          <a:solidFill>
-                            <a:srgbClr val="E74C3C"/>
-                          </a:solidFill>
-                        </a:defRPr>
-                      </a:pPr>
-                      <a:r>
-                        <a:t>43%</a:t>
-                      </a:r>
-                    </a:p>
-                  </a:txBody>
-                  <a:tcPr anchor="ctr">
-                    <a:solidFill>
-                      <a:srgbClr val="2A2A3E"/>
-                    </a:solidFill>
-                  </a:tcPr>
-                </a:tc>
-              </a:tr>
-              <a:tr h="640080">
-                <a:tc>
-                  <a:txBody>
-                    <a:bodyPr/>
-                    <a:lstStyle/>
-                    <a:p>
-                      <a:pPr algn="ctr">
-                        <a:defRPr sz="1100" b="0">
-                          <a:solidFill>
-                            <a:srgbClr val="FFFFFF"/>
-                          </a:solidFill>
-                        </a:defRPr>
-                      </a:pPr>
-                      <a:r>
-                        <a:t>TrOCR</a:t>
-                      </a:r>
-                    </a:p>
-                  </a:txBody>
-                  <a:tcPr anchor="ctr">
-                    <a:solidFill>
-                      <a:srgbClr val="222236"/>
-                    </a:solidFill>
-                  </a:tcPr>
-                </a:tc>
-                <a:tc>
-                  <a:txBody>
-                    <a:bodyPr/>
-                    <a:lstStyle/>
-                    <a:p>
-                      <a:pPr algn="ctr">
-                        <a:defRPr sz="1100" b="0">
-                          <a:solidFill>
-                            <a:srgbClr val="FFFFFF"/>
-                          </a:solidFill>
-                        </a:defRPr>
-                      </a:pPr>
-                      <a:r>
-                        <a:t>ViT+RoBERTa</a:t>
-                      </a:r>
-                    </a:p>
-                    <a:p>
-                      <a:pPr algn="ctr">
-                        <a:defRPr sz="1100" b="0">
-                          <a:solidFill>
-                            <a:srgbClr val="FFFFFF"/>
-                          </a:solidFill>
-                        </a:defRPr>
-                      </a:pPr>
-                      <a:r>
-                        <a:t>(GPU)</a:t>
-                      </a:r>
-                    </a:p>
-                  </a:txBody>
-                  <a:tcPr anchor="ctr">
-                    <a:solidFill>
-                      <a:srgbClr val="222236"/>
-                    </a:solidFill>
-                  </a:tcPr>
-                </a:tc>
-                <a:tc>
-                  <a:txBody>
-                    <a:bodyPr/>
-                    <a:lstStyle/>
-                    <a:p>
-                      <a:pPr algn="ctr">
-                        <a:defRPr sz="1100" b="0">
-                          <a:solidFill>
-                            <a:srgbClr val="FFFFFF"/>
-                          </a:solidFill>
-                        </a:defRPr>
-                      </a:pPr>
-                      <a:r>
-                        <a:t>3.241s</a:t>
-                      </a:r>
-                    </a:p>
-                  </a:txBody>
-                  <a:tcPr anchor="ctr">
-                    <a:solidFill>
-                      <a:srgbClr val="222236"/>
                     </a:solidFill>
                   </a:tcPr>
                 </a:tc>
@@ -6788,187 +7466,12 @@
                       <a:pPr algn="ctr">
                         <a:defRPr sz="1100" b="1">
                           <a:solidFill>
-                            <a:srgbClr val="E74C3C"/>
-                          </a:solidFill>
-                        </a:defRPr>
-                      </a:pPr>
-                      <a:r>
-                        <a:t>NO</a:t>
-                      </a:r>
-                    </a:p>
-                  </a:txBody>
-                  <a:tcPr anchor="ctr">
-                    <a:solidFill>
-                      <a:srgbClr val="222236"/>
-                    </a:solidFill>
-                  </a:tcPr>
-                </a:tc>
-                <a:tc>
-                  <a:txBody>
-                    <a:bodyPr/>
-                    <a:lstStyle/>
-                    <a:p>
-                      <a:pPr algn="ctr">
-                        <a:defRPr sz="1100" b="0">
-                          <a:solidFill>
-                            <a:srgbClr val="FFFFFF"/>
-                          </a:solidFill>
-                        </a:defRPr>
-                      </a:pPr>
-                      <a:r>
-                        <a:t>81.2%</a:t>
-                      </a:r>
-                    </a:p>
-                  </a:txBody>
-                  <a:tcPr anchor="ctr">
-                    <a:solidFill>
-                      <a:srgbClr val="222236"/>
-                    </a:solidFill>
-                  </a:tcPr>
-                </a:tc>
-                <a:tc>
-                  <a:txBody>
-                    <a:bodyPr/>
-                    <a:lstStyle/>
-                    <a:p>
-                      <a:pPr algn="ctr">
-                        <a:defRPr sz="1100" b="0">
-                          <a:solidFill>
                             <a:srgbClr val="2ECC71"/>
                           </a:solidFill>
                         </a:defRPr>
                       </a:pPr>
                       <a:r>
-                        <a:t>100%</a:t>
-                      </a:r>
-                    </a:p>
-                  </a:txBody>
-                  <a:tcPr anchor="ctr">
-                    <a:solidFill>
-                      <a:srgbClr val="222236"/>
-                    </a:solidFill>
-                  </a:tcPr>
-                </a:tc>
-                <a:tc>
-                  <a:txBody>
-                    <a:bodyPr/>
-                    <a:lstStyle/>
-                    <a:p>
-                      <a:pPr algn="ctr">
-                        <a:defRPr sz="1100" b="0">
-                          <a:solidFill>
-                            <a:srgbClr val="F39C12"/>
-                          </a:solidFill>
-                        </a:defRPr>
-                      </a:pPr>
-                      <a:r>
-                        <a:t>78%</a:t>
-                      </a:r>
-                    </a:p>
-                  </a:txBody>
-                  <a:tcPr anchor="ctr">
-                    <a:solidFill>
-                      <a:srgbClr val="222236"/>
-                    </a:solidFill>
-                  </a:tcPr>
-                </a:tc>
-                <a:tc>
-                  <a:txBody>
-                    <a:bodyPr/>
-                    <a:lstStyle/>
-                    <a:p>
-                      <a:pPr algn="ctr">
-                        <a:defRPr sz="1100" b="0">
-                          <a:solidFill>
-                            <a:srgbClr val="E74C3C"/>
-                          </a:solidFill>
-                        </a:defRPr>
-                      </a:pPr>
-                      <a:r>
-                        <a:t>54%</a:t>
-                      </a:r>
-                    </a:p>
-                  </a:txBody>
-                  <a:tcPr anchor="ctr">
-                    <a:solidFill>
-                      <a:srgbClr val="222236"/>
-                    </a:solidFill>
-                  </a:tcPr>
-                </a:tc>
-              </a:tr>
-              <a:tr h="640080">
-                <a:tc>
-                  <a:txBody>
-                    <a:bodyPr/>
-                    <a:lstStyle/>
-                    <a:p>
-                      <a:pPr algn="ctr">
-                        <a:defRPr sz="1100" b="0">
-                          <a:solidFill>
-                            <a:srgbClr val="FFFFFF"/>
-                          </a:solidFill>
-                        </a:defRPr>
-                      </a:pPr>
-                      <a:r>
-                        <a:t>RapidOCR</a:t>
-                      </a:r>
-                    </a:p>
-                  </a:txBody>
-                  <a:tcPr anchor="ctr">
-                    <a:solidFill>
-                      <a:srgbClr val="2A2A3E"/>
-                    </a:solidFill>
-                  </a:tcPr>
-                </a:tc>
-                <a:tc>
-                  <a:txBody>
-                    <a:bodyPr/>
-                    <a:lstStyle/>
-                    <a:p>
-                      <a:pPr algn="ctr">
-                        <a:defRPr sz="1100" b="0">
-                          <a:solidFill>
-                            <a:srgbClr val="FFFFFF"/>
-                          </a:solidFill>
-                        </a:defRPr>
-                      </a:pPr>
-                      <a:r>
-                        <a:t>DB+SVTR</a:t>
-                      </a:r>
-                    </a:p>
-                    <a:p>
-                      <a:pPr algn="ctr">
-                        <a:defRPr sz="1100" b="0">
-                          <a:solidFill>
-                            <a:srgbClr val="FFFFFF"/>
-                          </a:solidFill>
-                        </a:defRPr>
-                      </a:pPr>
-                      <a:r>
-                        <a:t>(CPU ONNX)</a:t>
-                      </a:r>
-                    </a:p>
-                  </a:txBody>
-                  <a:tcPr anchor="ctr">
-                    <a:solidFill>
-                      <a:srgbClr val="2A2A3E"/>
-                    </a:solidFill>
-                  </a:tcPr>
-                </a:tc>
-                <a:tc>
-                  <a:txBody>
-                    <a:bodyPr/>
-                    <a:lstStyle/>
-                    <a:p>
-                      <a:pPr algn="ctr">
-                        <a:defRPr sz="1100" b="0">
-                          <a:solidFill>
-                            <a:srgbClr val="FFFFFF"/>
-                          </a:solidFill>
-                        </a:defRPr>
-                      </a:pPr>
-                      <a:r>
-                        <a:t>2.192s</a:t>
+                        <a:t>O</a:t>
                       </a:r>
                     </a:p>
                   </a:txBody>
@@ -6986,135 +7489,18 @@
                       <a:pPr algn="ctr">
                         <a:defRPr sz="1100" b="1">
                           <a:solidFill>
-                            <a:srgbClr val="E74C3C"/>
-                          </a:solidFill>
-                        </a:defRPr>
-                      </a:pPr>
-                      <a:r>
-                        <a:t>NO</a:t>
+                            <a:srgbClr val="F39C12"/>
+                          </a:solidFill>
+                        </a:defRPr>
+                      </a:pPr>
+                      <a:r>
+                        <a:t>~</a:t>
                       </a:r>
                     </a:p>
                   </a:txBody>
                   <a:tcPr anchor="ctr">
                     <a:solidFill>
                       <a:srgbClr val="2A2A3E"/>
-                    </a:solidFill>
-                  </a:tcPr>
-                </a:tc>
-                <a:tc>
-                  <a:txBody>
-                    <a:bodyPr/>
-                    <a:lstStyle/>
-                    <a:p>
-                      <a:pPr algn="ctr">
-                        <a:defRPr sz="1100" b="0">
-                          <a:solidFill>
-                            <a:srgbClr val="FFFFFF"/>
-                          </a:solidFill>
-                        </a:defRPr>
-                      </a:pPr>
-                      <a:r>
-                        <a:t>75.0%</a:t>
-                      </a:r>
-                    </a:p>
-                  </a:txBody>
-                  <a:tcPr anchor="ctr">
-                    <a:solidFill>
-                      <a:srgbClr val="2A2A3E"/>
-                    </a:solidFill>
-                  </a:tcPr>
-                </a:tc>
-                <a:tc>
-                  <a:txBody>
-                    <a:bodyPr/>
-                    <a:lstStyle/>
-                    <a:p>
-                      <a:pPr algn="ctr">
-                        <a:defRPr sz="1100" b="0">
-                          <a:solidFill>
-                            <a:srgbClr val="2ECC71"/>
-                          </a:solidFill>
-                        </a:defRPr>
-                      </a:pPr>
-                      <a:r>
-                        <a:t>100%</a:t>
-                      </a:r>
-                    </a:p>
-                  </a:txBody>
-                  <a:tcPr anchor="ctr">
-                    <a:solidFill>
-                      <a:srgbClr val="2A2A3E"/>
-                    </a:solidFill>
-                  </a:tcPr>
-                </a:tc>
-                <a:tc>
-                  <a:txBody>
-                    <a:bodyPr/>
-                    <a:lstStyle/>
-                    <a:p>
-                      <a:pPr algn="ctr">
-                        <a:defRPr sz="1100" b="0">
-                          <a:solidFill>
-                            <a:srgbClr val="2ECC71"/>
-                          </a:solidFill>
-                        </a:defRPr>
-                      </a:pPr>
-                      <a:r>
-                        <a:t>94%</a:t>
-                      </a:r>
-                    </a:p>
-                  </a:txBody>
-                  <a:tcPr anchor="ctr">
-                    <a:solidFill>
-                      <a:srgbClr val="2A2A3E"/>
-                    </a:solidFill>
-                  </a:tcPr>
-                </a:tc>
-                <a:tc>
-                  <a:txBody>
-                    <a:bodyPr/>
-                    <a:lstStyle/>
-                    <a:p>
-                      <a:pPr algn="ctr">
-                        <a:defRPr sz="1100" b="0">
-                          <a:solidFill>
-                            <a:srgbClr val="2ECC71"/>
-                          </a:solidFill>
-                        </a:defRPr>
-                      </a:pPr>
-                      <a:r>
-                        <a:t>85%</a:t>
-                      </a:r>
-                    </a:p>
-                  </a:txBody>
-                  <a:tcPr anchor="ctr">
-                    <a:solidFill>
-                      <a:srgbClr val="2A2A3E"/>
-                    </a:solidFill>
-                  </a:tcPr>
-                </a:tc>
-              </a:tr>
-              <a:tr h="640080">
-                <a:tc>
-                  <a:txBody>
-                    <a:bodyPr/>
-                    <a:lstStyle/>
-                    <a:p>
-                      <a:pPr algn="ctr">
-                        <a:defRPr sz="1200" b="1">
-                          <a:solidFill>
-                            <a:srgbClr val="FFFFFF"/>
-                          </a:solidFill>
-                        </a:defRPr>
-                      </a:pPr>
-                      <a:r>
-                        <a:t>WINNER</a:t>
-                      </a:r>
-                    </a:p>
-                  </a:txBody>
-                  <a:tcPr anchor="ctr">
-                    <a:solidFill>
-                      <a:srgbClr val="2ECC71"/>
                     </a:solidFill>
                   </a:tcPr>
                 </a:tc>
@@ -7126,18 +7512,18 @@
                       <a:pPr algn="ctr">
                         <a:defRPr sz="1100" b="1">
                           <a:solidFill>
-                            <a:srgbClr val="2ECC71"/>
-                          </a:solidFill>
-                        </a:defRPr>
-                      </a:pPr>
-                      <a:r>
-                        <a:t>Speed</a:t>
-                      </a:r>
-                    </a:p>
-                  </a:txBody>
-                  <a:tcPr anchor="ctr">
-                    <a:solidFill>
-                      <a:srgbClr val="1A3A1A"/>
+                            <a:srgbClr val="E74C3C"/>
+                          </a:solidFill>
+                        </a:defRPr>
+                      </a:pPr>
+                      <a:r>
+                        <a:t>X</a:t>
+                      </a:r>
+                    </a:p>
+                  </a:txBody>
+                  <a:tcPr anchor="ctr">
+                    <a:solidFill>
+                      <a:srgbClr val="2A2A3E"/>
                     </a:solidFill>
                   </a:tcPr>
                 </a:tc>
@@ -7149,18 +7535,18 @@
                       <a:pPr algn="ctr">
                         <a:defRPr sz="1100" b="1">
                           <a:solidFill>
-                            <a:srgbClr val="2ECC71"/>
-                          </a:solidFill>
-                        </a:defRPr>
-                      </a:pPr>
-                      <a:r>
-                        <a:t>EasyOCR</a:t>
-                      </a:r>
-                    </a:p>
-                  </a:txBody>
-                  <a:tcPr anchor="ctr">
-                    <a:solidFill>
-                      <a:srgbClr val="1A3A1A"/>
+                            <a:srgbClr val="E74C3C"/>
+                          </a:solidFill>
+                        </a:defRPr>
+                      </a:pPr>
+                      <a:r>
+                        <a:t>X</a:t>
+                      </a:r>
+                    </a:p>
+                  </a:txBody>
+                  <a:tcPr anchor="ctr">
+                    <a:solidFill>
+                      <a:srgbClr val="2A2A3E"/>
                     </a:solidFill>
                   </a:tcPr>
                 </a:tc>
@@ -7172,18 +7558,18 @@
                       <a:pPr algn="ctr">
                         <a:defRPr sz="1100" b="1">
                           <a:solidFill>
-                            <a:srgbClr val="2ECC71"/>
-                          </a:solidFill>
-                        </a:defRPr>
-                      </a:pPr>
-                      <a:r>
-                        <a:t>EasyOCR</a:t>
-                      </a:r>
-                    </a:p>
-                  </a:txBody>
-                  <a:tcPr anchor="ctr">
-                    <a:solidFill>
-                      <a:srgbClr val="1A3A1A"/>
+                            <a:srgbClr val="E74C3C"/>
+                          </a:solidFill>
+                        </a:defRPr>
+                      </a:pPr>
+                      <a:r>
+                        <a:t>X</a:t>
+                      </a:r>
+                    </a:p>
+                  </a:txBody>
+                  <a:tcPr anchor="ctr">
+                    <a:solidFill>
+                      <a:srgbClr val="2A2A3E"/>
                     </a:solidFill>
                   </a:tcPr>
                 </a:tc>
@@ -7200,13 +7586,13 @@
                         </a:defRPr>
                       </a:pPr>
                       <a:r>
-                        <a:t>TrOCR</a:t>
-                      </a:r>
-                    </a:p>
-                  </a:txBody>
-                  <a:tcPr anchor="ctr">
-                    <a:solidFill>
-                      <a:srgbClr val="1A3A1A"/>
+                        <a:t>O</a:t>
+                      </a:r>
+                    </a:p>
+                  </a:txBody>
+                  <a:tcPr anchor="ctr">
+                    <a:solidFill>
+                      <a:srgbClr val="2A2A3E"/>
                     </a:solidFill>
                   </a:tcPr>
                 </a:tc>
@@ -7218,21 +7604,23 @@
                       <a:pPr algn="ctr">
                         <a:defRPr sz="1100" b="1">
                           <a:solidFill>
-                            <a:srgbClr val="2ECC71"/>
-                          </a:solidFill>
-                        </a:defRPr>
-                      </a:pPr>
-                      <a:r>
-                        <a:t>TrOCR/Rapid</a:t>
-                      </a:r>
-                    </a:p>
-                  </a:txBody>
-                  <a:tcPr anchor="ctr">
-                    <a:solidFill>
-                      <a:srgbClr val="1A3A1A"/>
-                    </a:solidFill>
-                  </a:tcPr>
-                </a:tc>
+                            <a:srgbClr val="F39C12"/>
+                          </a:solidFill>
+                        </a:defRPr>
+                      </a:pPr>
+                      <a:r>
+                        <a:t>~</a:t>
+                      </a:r>
+                    </a:p>
+                  </a:txBody>
+                  <a:tcPr anchor="ctr">
+                    <a:solidFill>
+                      <a:srgbClr val="2A2A3E"/>
+                    </a:solidFill>
+                  </a:tcPr>
+                </a:tc>
+              </a:tr>
+              <a:tr h="548640">
                 <a:tc>
                   <a:txBody>
                     <a:bodyPr/>
@@ -7246,7 +7634,7 @@
                         </a:defRPr>
                       </a:pPr>
                       <a:r>
-                        <a:t>RapidOCR</a:t>
+                        <a:t>BEST</a:t>
                       </a:r>
                     </a:p>
                   </a:txBody>
@@ -7269,8 +7657,174 @@
                         </a:defRPr>
                       </a:pPr>
                       <a:r>
-                        <a:t>RapidOCR</a:t>
-                      </a:r>
+                        <a:t>0.519s</a:t>
+                      </a:r>
+                    </a:p>
+                  </a:txBody>
+                  <a:tcPr anchor="ctr">
+                    <a:solidFill>
+                      <a:srgbClr val="1A3A1A"/>
+                    </a:solidFill>
+                  </a:tcPr>
+                </a:tc>
+                <a:tc>
+                  <a:txBody>
+                    <a:bodyPr/>
+                    <a:lstStyle/>
+                    <a:p>
+                      <a:pPr algn="ctr">
+                        <a:defRPr sz="1100" b="1">
+                          <a:solidFill>
+                            <a:srgbClr val="2ECC71"/>
+                          </a:solidFill>
+                        </a:defRPr>
+                      </a:pPr>
+                      <a:r>
+                        <a:t>62.5%</a:t>
+                      </a:r>
+                    </a:p>
+                  </a:txBody>
+                  <a:tcPr anchor="ctr">
+                    <a:solidFill>
+                      <a:srgbClr val="1A3A1A"/>
+                    </a:solidFill>
+                  </a:tcPr>
+                </a:tc>
+                <a:tc>
+                  <a:txBody>
+                    <a:bodyPr/>
+                    <a:lstStyle/>
+                    <a:p>
+                      <a:pPr algn="ctr">
+                        <a:defRPr sz="1000" b="1">
+                          <a:solidFill>
+                            <a:srgbClr val="2ECC71"/>
+                          </a:solidFill>
+                        </a:defRPr>
+                      </a:pPr>
+                      <a:r>
+                        <a:t>Quarter</a:t>
+                      </a:r>
+                    </a:p>
+                  </a:txBody>
+                  <a:tcPr anchor="ctr">
+                    <a:solidFill>
+                      <a:srgbClr val="1A3A1A"/>
+                    </a:solidFill>
+                  </a:tcPr>
+                </a:tc>
+                <a:tc>
+                  <a:txBody>
+                    <a:bodyPr/>
+                    <a:lstStyle/>
+                    <a:p>
+                      <a:pPr algn="ctr">
+                        <a:defRPr sz="1000" b="0">
+                          <a:solidFill>
+                            <a:srgbClr val="FFFFFF"/>
+                          </a:solidFill>
+                        </a:defRPr>
+                      </a:pPr>
+                    </a:p>
+                  </a:txBody>
+                  <a:tcPr anchor="ctr">
+                    <a:solidFill>
+                      <a:srgbClr val="1A3A1A"/>
+                    </a:solidFill>
+                  </a:tcPr>
+                </a:tc>
+                <a:tc>
+                  <a:txBody>
+                    <a:bodyPr/>
+                    <a:lstStyle/>
+                    <a:p>
+                      <a:pPr algn="ctr">
+                        <a:defRPr sz="1000" b="0">
+                          <a:solidFill>
+                            <a:srgbClr val="FFFFFF"/>
+                          </a:solidFill>
+                        </a:defRPr>
+                      </a:pPr>
+                    </a:p>
+                  </a:txBody>
+                  <a:tcPr anchor="ctr">
+                    <a:solidFill>
+                      <a:srgbClr val="1A3A1A"/>
+                    </a:solidFill>
+                  </a:tcPr>
+                </a:tc>
+                <a:tc>
+                  <a:txBody>
+                    <a:bodyPr/>
+                    <a:lstStyle/>
+                    <a:p>
+                      <a:pPr algn="ctr">
+                        <a:defRPr sz="1000" b="0">
+                          <a:solidFill>
+                            <a:srgbClr val="FFFFFF"/>
+                          </a:solidFill>
+                        </a:defRPr>
+                      </a:pPr>
+                    </a:p>
+                  </a:txBody>
+                  <a:tcPr anchor="ctr">
+                    <a:solidFill>
+                      <a:srgbClr val="1A3A1A"/>
+                    </a:solidFill>
+                  </a:tcPr>
+                </a:tc>
+                <a:tc>
+                  <a:txBody>
+                    <a:bodyPr/>
+                    <a:lstStyle/>
+                    <a:p>
+                      <a:pPr algn="ctr">
+                        <a:defRPr sz="1000" b="0">
+                          <a:solidFill>
+                            <a:srgbClr val="FFFFFF"/>
+                          </a:solidFill>
+                        </a:defRPr>
+                      </a:pPr>
+                    </a:p>
+                  </a:txBody>
+                  <a:tcPr anchor="ctr">
+                    <a:solidFill>
+                      <a:srgbClr val="1A3A1A"/>
+                    </a:solidFill>
+                  </a:tcPr>
+                </a:tc>
+                <a:tc>
+                  <a:txBody>
+                    <a:bodyPr/>
+                    <a:lstStyle/>
+                    <a:p>
+                      <a:pPr algn="ctr">
+                        <a:defRPr sz="1000" b="0">
+                          <a:solidFill>
+                            <a:srgbClr val="FFFFFF"/>
+                          </a:solidFill>
+                        </a:defRPr>
+                      </a:pPr>
+                    </a:p>
+                  </a:txBody>
+                  <a:tcPr anchor="ctr">
+                    <a:solidFill>
+                      <a:srgbClr val="1A3A1A"/>
+                    </a:solidFill>
+                  </a:tcPr>
+                </a:tc>
+                <a:tc>
+                  <a:txBody>
+                    <a:bodyPr/>
+                    <a:lstStyle/>
+                    <a:p>
+                      <a:pPr algn="ctr">
+                        <a:defRPr sz="1000" b="0">
+                          <a:solidFill>
+                            <a:srgbClr val="FFFFFF"/>
+                          </a:solidFill>
+                        </a:defRPr>
+                      </a:pPr>
                     </a:p>
                   </a:txBody>
                   <a:tcPr anchor="ctr">
@@ -7292,8 +7846,8 @@
         </p:nvSpPr>
         <p:spPr>
           <a:xfrm>
-            <a:off x="457200" y="4572000"/>
-            <a:ext cx="10972800" cy="2286000"/>
+            <a:off x="274320" y="3931920"/>
+            <a:ext cx="5760720" cy="2743200"/>
           </a:xfrm>
           <a:prstGeom prst="rect">
             <a:avLst/>
@@ -7309,12 +7863,12 @@
             <a:pPr algn="l">
               <a:defRPr sz="2000" b="1">
                 <a:solidFill>
-                  <a:srgbClr val="2ECC71"/>
+                  <a:srgbClr val="E74C3C"/>
                 </a:solidFill>
               </a:defRPr>
             </a:pPr>
             <a:r>
-              <a:t>Key Findings</a:t>
+              <a:t>EasyOCR 주요 오류 패턴</a:t>
             </a:r>
           </a:p>
           <a:p>
@@ -7335,7 +7889,19 @@
               </a:defRPr>
             </a:pPr>
             <a:r>
-              <a:t>1. EasyOCR is the ONLY method meeting the 1-second requirement (0.563s)</a:t>
+              <a:t>1. 0/O 혼동: T062→TO62, 039R→O39R</a:t>
+            </a:r>
+          </a:p>
+          <a:p>
+            <a:pPr algn="l">
+              <a:defRPr sz="1200" b="0">
+                <a:solidFill>
+                  <a:srgbClr val="BDBDBD"/>
+                </a:solidFill>
+              </a:defRPr>
+            </a:pPr>
+            <a:r>
+              <a:t>   → 숫자 0과 영문 O를 구분 못함</a:t>
             </a:r>
           </a:p>
           <a:p>
@@ -7347,7 +7913,31 @@
               </a:defRPr>
             </a:pPr>
             <a:r>
-              <a:t>2. TrOCR achieves the HIGHEST overall accuracy (81.2%) - best for full-text fields</a:t>
+              <a:t>2. 복잡 코드 구조 파괴:</a:t>
+            </a:r>
+          </a:p>
+          <a:p>
+            <a:pPr algn="l">
+              <a:defRPr sz="1200" b="0">
+                <a:solidFill>
+                  <a:srgbClr val="BDBDBD"/>
+                </a:solidFill>
+              </a:defRPr>
+            </a:pPr>
+            <a:r>
+              <a:t>   LOT NO: 5QQAM42QC → SQ0AM42C (완전 다름)</a:t>
+            </a:r>
+          </a:p>
+          <a:p>
+            <a:pPr algn="l">
+              <a:defRPr sz="1200" b="0">
+                <a:solidFill>
+                  <a:srgbClr val="BDBDBD"/>
+                </a:solidFill>
+              </a:defRPr>
+            </a:pPr>
+            <a:r>
+              <a:t>   ITEM: 3AA00AAAU → ZAAOQAAAU (A→Q 오류)</a:t>
             </a:r>
           </a:p>
           <a:p>
@@ -7359,71 +7949,33 @@
               </a:defRPr>
             </a:pPr>
             <a:r>
-              <a:t>3. RapidOCR has BEST complex code recognition (LOT NO 94%, ITEM 85%)</a:t>
+              <a:t>3. 특수문자/구분자 누락:</a:t>
             </a:r>
           </a:p>
           <a:p>
             <a:pPr algn="l">
-              <a:defRPr sz="1400" b="0">
+              <a:defRPr sz="1200" b="0">
                 <a:solidFill>
-                  <a:srgbClr val="F39C12"/>
+                  <a:srgbClr val="BDBDBD"/>
                 </a:solidFill>
               </a:defRPr>
             </a:pPr>
             <a:r>
-              <a:t>4. All methods struggle with dense alphanumeric codes (ITEM field) - a universal OCR challenge</a:t>
-            </a:r>
-          </a:p>
-          <a:p>
-            <a:pPr algn="l">
-              <a:defRPr sz="1400" b="0">
-                <a:solidFill>
-                  <a:srgbClr val="F39C12"/>
-                </a:solidFill>
-              </a:defRPr>
-            </a:pPr>
-            <a:r>
-              <a:t>5. Preprocessing (upscale, CLAHE) does NOT consistently improve accuracy</a:t>
+              <a:t>   괄호, 하이픈, 콜론 등이 무시됨</a:t>
             </a:r>
           </a:p>
         </p:txBody>
       </p:sp>
-    </p:spTree>
-  </p:cSld>
-  <p:clrMapOvr>
-    <a:masterClrMapping/>
-  </p:clrMapOvr>
-</p:sld>
-</file>
-
-<file path=ppt/slides/slide7.xml><?xml version="1.0" encoding="utf-8"?>
-<p:sld xmlns:a="http://schemas.openxmlformats.org/drawingml/2006/main" xmlns:p="http://schemas.openxmlformats.org/presentationml/2006/main" xmlns:r="http://schemas.openxmlformats.org/officeDocument/2006/relationships">
-  <p:cSld>
-    <p:bg>
-      <p:bgPr>
-        <a:solidFill>
-          <a:srgbClr val="1A1A2E"/>
-        </a:solidFill>
-        <a:effectLst/>
-      </p:bgPr>
-    </p:bg>
-    <p:spTree>
-      <p:nvGrpSpPr>
-        <p:cNvPr id="1" name=""/>
-        <p:cNvGrpSpPr/>
-        <p:nvPr/>
-      </p:nvGrpSpPr>
-      <p:grpSpPr/>
       <p:sp>
         <p:nvSpPr>
-          <p:cNvPr id="2" name="TextBox 1"/>
+          <p:cNvPr id="5" name="TextBox 4"/>
           <p:cNvSpPr txBox="1"/>
           <p:nvPr/>
         </p:nvSpPr>
         <p:spPr>
           <a:xfrm>
-            <a:off x="457200" y="274320"/>
-            <a:ext cx="10972800" cy="731520"/>
+            <a:off x="6217920" y="3931920"/>
+            <a:ext cx="5486400" cy="2743200"/>
           </a:xfrm>
           <a:prstGeom prst="rect">
             <a:avLst/>
@@ -7437,49 +7989,14 @@
           <a:lstStyle/>
           <a:p>
             <a:pPr algn="l">
-              <a:defRPr sz="3200" b="1">
+              <a:defRPr sz="2000" b="1">
                 <a:solidFill>
                   <a:srgbClr val="0074D9"/>
                 </a:solidFill>
               </a:defRPr>
             </a:pPr>
             <a:r>
-              <a:t>Recommendations &amp; Next Steps</a:t>
-            </a:r>
-          </a:p>
-        </p:txBody>
-      </p:sp>
-      <p:sp>
-        <p:nvSpPr>
-          <p:cNvPr id="3" name="TextBox 2"/>
-          <p:cNvSpPr txBox="1"/>
-          <p:nvPr/>
-        </p:nvSpPr>
-        <p:spPr>
-          <a:xfrm>
-            <a:off x="457200" y="1188720"/>
-            <a:ext cx="5303520" cy="5029200"/>
-          </a:xfrm>
-          <a:prstGeom prst="rect">
-            <a:avLst/>
-          </a:prstGeom>
-          <a:noFill/>
-        </p:spPr>
-        <p:txBody>
-          <a:bodyPr wrap="square">
-            <a:spAutoFit/>
-          </a:bodyPr>
-          <a:lstStyle/>
-          <a:p>
-            <a:pPr algn="l">
-              <a:defRPr sz="2000" b="1">
-                <a:solidFill>
-                  <a:srgbClr val="2ECC71"/>
-                </a:solidFill>
-              </a:defRPr>
-            </a:pPr>
-            <a:r>
-              <a:t>For Real-time (&lt; 1 second)</a:t>
+              <a:t>vs Qwen3.5-2B (참고)</a:t>
             </a:r>
           </a:p>
           <a:p>
@@ -7493,412 +8010,92 @@
           </a:p>
           <a:p>
             <a:pPr algn="l">
-              <a:defRPr sz="1500" b="1">
+              <a:defRPr sz="1400" b="0">
+                <a:solidFill>
+                  <a:srgbClr val="2ECC71"/>
+                </a:solidFill>
+              </a:defRPr>
+            </a:pPr>
+            <a:r>
+              <a:t>Qwen: 3.7초, 8/8 필드 정확 인식</a:t>
+            </a:r>
+          </a:p>
+          <a:p>
+            <a:pPr algn="l">
+              <a:defRPr sz="1400" b="0">
+                <a:solidFill>
+                  <a:srgbClr val="F39C12"/>
+                </a:solidFill>
+              </a:defRPr>
+            </a:pPr>
+            <a:r>
+              <a:t>EasyOCR: 0.5초, 5/8 필드 인식</a:t>
+            </a:r>
+          </a:p>
+          <a:p>
+            <a:pPr algn="l">
+              <a:defRPr sz="800" b="0">
                 <a:solidFill>
                   <a:srgbClr val="FFFFFF"/>
                 </a:solidFill>
               </a:defRPr>
             </a:pPr>
-            <a:r>
-              <a:t>EasyOCR (GPU) is the recommended choice</a:t>
-            </a:r>
           </a:p>
           <a:p>
             <a:pPr algn="l">
-              <a:defRPr sz="1300" b="0">
-                <a:solidFill>
-                  <a:srgbClr val="BDBDBD"/>
-                </a:solidFill>
-              </a:defRPr>
-            </a:pPr>
-            <a:r>
-              <a:t>  - 0.563s on quarter image, 62.5% accuracy</a:t>
-            </a:r>
-          </a:p>
-          <a:p>
-            <a:pPr algn="l">
-              <a:defRPr sz="1300" b="0">
-                <a:solidFill>
-                  <a:srgbClr val="BDBDBD"/>
-                </a:solidFill>
-              </a:defRPr>
-            </a:pPr>
-            <a:r>
-              <a:t>  - Simple API, active community</a:t>
-            </a:r>
-          </a:p>
-          <a:p>
-            <a:pPr algn="l">
-              <a:defRPr sz="1300" b="0">
-                <a:solidFill>
-                  <a:srgbClr val="BDBDBD"/>
-                </a:solidFill>
-              </a:defRPr>
-            </a:pPr>
-            <a:r>
-              <a:t>  - Can be improved with post-processing</a:t>
-            </a:r>
-          </a:p>
-          <a:p>
-            <a:pPr algn="l">
-              <a:defRPr sz="1000" b="0">
+              <a:defRPr sz="1400" b="0">
                 <a:solidFill>
                   <a:srgbClr val="FFFFFF"/>
                 </a:solidFill>
               </a:defRPr>
             </a:pPr>
+            <a:r>
+              <a:t>EasyOCR은 7배 빠르지만</a:t>
+            </a:r>
           </a:p>
           <a:p>
             <a:pPr algn="l">
-              <a:defRPr sz="2000" b="1">
-                <a:solidFill>
-                  <a:srgbClr val="F39C12"/>
-                </a:solidFill>
-              </a:defRPr>
-            </a:pPr>
-            <a:r>
-              <a:t>For Maximum Accuracy</a:t>
-            </a:r>
-          </a:p>
-          <a:p>
-            <a:pPr algn="l">
-              <a:defRPr sz="600" b="0">
+              <a:defRPr sz="1400" b="0">
                 <a:solidFill>
                   <a:srgbClr val="FFFFFF"/>
                 </a:solidFill>
               </a:defRPr>
             </a:pPr>
+            <a:r>
+              <a:t>복잡한 영숫자 코드에서 한계가 명확함.</a:t>
+            </a:r>
           </a:p>
           <a:p>
             <a:pPr algn="l">
-              <a:defRPr sz="1500" b="1">
+              <a:defRPr sz="800" b="0">
                 <a:solidFill>
                   <a:srgbClr val="FFFFFF"/>
                 </a:solidFill>
               </a:defRPr>
             </a:pPr>
-            <a:r>
-              <a:t>TrOCR Hybrid approach (offline/batch)</a:t>
-            </a:r>
           </a:p>
           <a:p>
             <a:pPr algn="l">
-              <a:defRPr sz="1300" b="0">
-                <a:solidFill>
-                  <a:srgbClr val="BDBDBD"/>
-                </a:solidFill>
-              </a:defRPr>
-            </a:pPr>
-            <a:r>
-              <a:t>  - 81.2% accuracy, 3.2s per image</a:t>
-            </a:r>
-          </a:p>
-          <a:p>
-            <a:pPr algn="l">
-              <a:defRPr sz="1300" b="0">
-                <a:solidFill>
-                  <a:srgbClr val="BDBDBD"/>
-                </a:solidFill>
-              </a:defRPr>
-            </a:pPr>
-            <a:r>
-              <a:t>  - Best for DEVICE, ASSEMBLED fields</a:t>
-            </a:r>
-          </a:p>
-          <a:p>
-            <a:pPr algn="l">
-              <a:defRPr sz="1000" b="0">
-                <a:solidFill>
-                  <a:srgbClr val="FFFFFF"/>
-                </a:solidFill>
-              </a:defRPr>
-            </a:pPr>
-          </a:p>
-          <a:p>
-            <a:pPr algn="l">
-              <a:defRPr sz="2000" b="1">
-                <a:solidFill>
-                  <a:srgbClr val="0074D9"/>
-                </a:solidFill>
-              </a:defRPr>
-            </a:pPr>
-            <a:r>
-              <a:t>For Complex Code Recognition</a:t>
-            </a:r>
-          </a:p>
-          <a:p>
-            <a:pPr algn="l">
-              <a:defRPr sz="600" b="0">
-                <a:solidFill>
-                  <a:srgbClr val="FFFFFF"/>
-                </a:solidFill>
-              </a:defRPr>
-            </a:pPr>
-          </a:p>
-          <a:p>
-            <a:pPr algn="l">
-              <a:defRPr sz="1500" b="1">
-                <a:solidFill>
-                  <a:srgbClr val="FFFFFF"/>
-                </a:solidFill>
-              </a:defRPr>
-            </a:pPr>
-            <a:r>
-              <a:t>RapidOCR (PaddleOCR ONNX)</a:t>
-            </a:r>
-          </a:p>
-          <a:p>
-            <a:pPr algn="l">
-              <a:defRPr sz="1300" b="0">
-                <a:solidFill>
-                  <a:srgbClr val="BDBDBD"/>
-                </a:solidFill>
-              </a:defRPr>
-            </a:pPr>
-            <a:r>
-              <a:t>  - LOT NO: 94%, ITEM: 85% partial match</a:t>
-            </a:r>
-          </a:p>
-          <a:p>
-            <a:pPr algn="l">
-              <a:defRPr sz="1300" b="0">
-                <a:solidFill>
-                  <a:srgbClr val="BDBDBD"/>
-                </a:solidFill>
-              </a:defRPr>
-            </a:pPr>
-            <a:r>
-              <a:t>  - Could be faster with GPU ONNX provider</a:t>
-            </a:r>
-          </a:p>
-        </p:txBody>
-      </p:sp>
-      <p:sp>
-        <p:nvSpPr>
-          <p:cNvPr id="4" name="TextBox 3"/>
-          <p:cNvSpPr txBox="1"/>
-          <p:nvPr/>
-        </p:nvSpPr>
-        <p:spPr>
-          <a:xfrm>
-            <a:off x="6217920" y="1188720"/>
-            <a:ext cx="5303520" cy="5029200"/>
-          </a:xfrm>
-          <a:prstGeom prst="rect">
-            <a:avLst/>
-          </a:prstGeom>
-          <a:noFill/>
-        </p:spPr>
-        <p:txBody>
-          <a:bodyPr wrap="square">
-            <a:spAutoFit/>
-          </a:bodyPr>
-          <a:lstStyle/>
-          <a:p>
-            <a:pPr algn="l">
-              <a:defRPr sz="2000" b="1">
+              <a:defRPr sz="1400" b="1">
                 <a:solidFill>
                   <a:srgbClr val="2ECC71"/>
                 </a:solidFill>
               </a:defRPr>
             </a:pPr>
             <a:r>
-              <a:t>Optimization Strategies</a:t>
+              <a:t>결론: 단순 필드(SUPPLIER, Q'TY, DATE)는 OK</a:t>
             </a:r>
           </a:p>
           <a:p>
             <a:pPr algn="l">
-              <a:defRPr sz="600" b="0">
+              <a:defRPr sz="1400" b="1">
                 <a:solidFill>
-                  <a:srgbClr val="FFFFFF"/>
+                  <a:srgbClr val="E74C3C"/>
                 </a:solidFill>
               </a:defRPr>
             </a:pPr>
-          </a:p>
-          <a:p>
-            <a:pPr algn="l">
-              <a:defRPr sz="1600" b="1">
-                <a:solidFill>
-                  <a:srgbClr val="F39C12"/>
-                </a:solidFill>
-              </a:defRPr>
-            </a:pPr>
-            <a:r>
-              <a:t>Speed Improvements:</a:t>
-            </a:r>
-          </a:p>
-          <a:p>
-            <a:pPr algn="l">
-              <a:defRPr sz="1300" b="0">
-                <a:solidFill>
-                  <a:srgbClr val="FFFFFF"/>
-                </a:solidFill>
-              </a:defRPr>
-            </a:pPr>
-            <a:r>
-              <a:t>  - RapidOCR: Switch to ONNX GPU provider</a:t>
-            </a:r>
-          </a:p>
-          <a:p>
-            <a:pPr algn="l">
-              <a:defRPr sz="1300" b="0">
-                <a:solidFill>
-                  <a:srgbClr val="FFFFFF"/>
-                </a:solidFill>
-              </a:defRPr>
-            </a:pPr>
-            <a:r>
-              <a:t>  - TrOCR: Batch inference for line crops</a:t>
-            </a:r>
-          </a:p>
-          <a:p>
-            <a:pPr algn="l">
-              <a:defRPr sz="1300" b="0">
-                <a:solidFill>
-                  <a:srgbClr val="FFFFFF"/>
-                </a:solidFill>
-              </a:defRPr>
-            </a:pPr>
-            <a:r>
-              <a:t>  - Model quantization (INT8/FP16)</a:t>
-            </a:r>
-          </a:p>
-          <a:p>
-            <a:pPr algn="l">
-              <a:defRPr sz="1300" b="0">
-                <a:solidFill>
-                  <a:srgbClr val="FFFFFF"/>
-                </a:solidFill>
-              </a:defRPr>
-            </a:pPr>
-            <a:r>
-              <a:t>  - TensorRT deployment for all models</a:t>
-            </a:r>
-          </a:p>
-          <a:p>
-            <a:pPr algn="l">
-              <a:defRPr sz="1000" b="0">
-                <a:solidFill>
-                  <a:srgbClr val="FFFFFF"/>
-                </a:solidFill>
-              </a:defRPr>
-            </a:pPr>
-          </a:p>
-          <a:p>
-            <a:pPr algn="l">
-              <a:defRPr sz="1600" b="1">
-                <a:solidFill>
-                  <a:srgbClr val="F39C12"/>
-                </a:solidFill>
-              </a:defRPr>
-            </a:pPr>
-            <a:r>
-              <a:t>Accuracy Improvements:</a:t>
-            </a:r>
-          </a:p>
-          <a:p>
-            <a:pPr algn="l">
-              <a:defRPr sz="1300" b="0">
-                <a:solidFill>
-                  <a:srgbClr val="FFFFFF"/>
-                </a:solidFill>
-              </a:defRPr>
-            </a:pPr>
-            <a:r>
-              <a:t>  - Ensemble: combine EasyOCR + RapidOCR</a:t>
-            </a:r>
-          </a:p>
-          <a:p>
-            <a:pPr algn="l">
-              <a:defRPr sz="1300" b="0">
-                <a:solidFill>
-                  <a:srgbClr val="FFFFFF"/>
-                </a:solidFill>
-              </a:defRPr>
-            </a:pPr>
-            <a:r>
-              <a:t>  - Fine-tune on semiconductor label data</a:t>
-            </a:r>
-          </a:p>
-          <a:p>
-            <a:pPr algn="l">
-              <a:defRPr sz="1300" b="0">
-                <a:solidFill>
-                  <a:srgbClr val="FFFFFF"/>
-                </a:solidFill>
-              </a:defRPr>
-            </a:pPr>
-            <a:r>
-              <a:t>  - Region-specific OCR (barcode vs text)</a:t>
-            </a:r>
-          </a:p>
-          <a:p>
-            <a:pPr algn="l">
-              <a:defRPr sz="1300" b="0">
-                <a:solidFill>
-                  <a:srgbClr val="FFFFFF"/>
-                </a:solidFill>
-              </a:defRPr>
-            </a:pPr>
-            <a:r>
-              <a:t>  - Structured output with regex validation</a:t>
-            </a:r>
-          </a:p>
-          <a:p>
-            <a:pPr algn="l">
-              <a:defRPr sz="1000" b="0">
-                <a:solidFill>
-                  <a:srgbClr val="FFFFFF"/>
-                </a:solidFill>
-              </a:defRPr>
-            </a:pPr>
-          </a:p>
-          <a:p>
-            <a:pPr algn="l">
-              <a:defRPr sz="1600" b="1">
-                <a:solidFill>
-                  <a:srgbClr val="0074D9"/>
-                </a:solidFill>
-              </a:defRPr>
-            </a:pPr>
-            <a:r>
-              <a:t>vs Qwen-VL (Reference):</a:t>
-            </a:r>
-          </a:p>
-          <a:p>
-            <a:pPr algn="l">
-              <a:defRPr sz="1300" b="0">
-                <a:solidFill>
-                  <a:srgbClr val="FFFFFF"/>
-                </a:solidFill>
-              </a:defRPr>
-            </a:pPr>
-            <a:r>
-              <a:t>  - LLM-based OCR provides context awareness</a:t>
-            </a:r>
-          </a:p>
-          <a:p>
-            <a:pPr algn="l">
-              <a:defRPr sz="1300" b="0">
-                <a:solidFill>
-                  <a:srgbClr val="FFFFFF"/>
-                </a:solidFill>
-              </a:defRPr>
-            </a:pPr>
-            <a:r>
-              <a:t>  - Higher accuracy but much slower (&gt;5s)</a:t>
-            </a:r>
-          </a:p>
-          <a:p>
-            <a:pPr algn="l">
-              <a:defRPr sz="1300" b="0">
-                <a:solidFill>
-                  <a:srgbClr val="FFFFFF"/>
-                </a:solidFill>
-              </a:defRPr>
-            </a:pPr>
-            <a:r>
-              <a:t>  - Best for complex document understanding</a:t>
+            <a:r>
+              <a:t>반도체 코드(DEVICE, LOT, ITEM)는 부족</a:t>
             </a:r>
           </a:p>
         </p:txBody>
